--- a/SEVEN-G/pptx/es/SEVEN-G_Curso_Empresa.pptx
+++ b/SEVEN-G/pptx/es/SEVEN-G_Curso_Empresa.pptx
@@ -6649,6 +6649,40 @@
           </a:p>
         </p:txBody>
       </p:sp>
+      <p:sp>
+        <p:nvSpPr>
+          <p:cNvPr id="236" name="Texto 236"/>
+          <p:cNvSpPr txBox="1"/>
+          <p:nvPr/>
+        </p:nvSpPr>
+        <p:spPr>
+          <a:xfrm>
+            <a:off x="609600" y="5550000"/>
+            <a:ext cx="10972800" cy="1000000"/>
+          </a:xfrm>
+          <a:prstGeom prst="rect">
+            <a:avLst/>
+          </a:prstGeom>
+          <a:noFill/>
+        </p:spPr>
+        <p:txBody>
+          <a:bodyPr wrap="square" anchor="t" lIns="45720" rIns="45720">
+            <a:noAutofit/>
+          </a:bodyPr>
+          <a:lstStyle/>
+          <a:p>
+            <a:pPr algn="ctr"/>
+            <a:r>
+              <a:rPr lang="es-ES" sz="1000" dirty="0">
+                <a:solidFill>
+                  <a:srgbClr val="564D47"/>
+                </a:solidFill>
+              </a:rPr>
+              <a:t>Aviso legal: ayuda metodológica genérica y gratuita, «tal cual» y con fines informativos; no es asesoramiento jurídico ni está revisada jurídicamente para ningún caso. Cada organización la adapta y es responsable de su revisión legal y de su cumplimiento regulatorio; puede no recoger cambios normativos recientes. En la máxima medida permitida por la ley, el autor no asume responsabilidad alguna por los efectos de su aplicación. No otorga certificación de ningún tipo. Detalle en el documento 93.</a:t>
+            </a:r>
+          </a:p>
+        </p:txBody>
+      </p:sp>
     </p:spTree>
   </p:cSld>
   <p:clrMapOvr>

--- a/SEVEN-G/pptx/es/SEVEN-G_Curso_Empresa.pptx
+++ b/SEVEN-G/pptx/es/SEVEN-G_Curso_Empresa.pptx
@@ -31,6 +31,7 @@
     <p:sldId id="279" r:id="rIdS24"/>
     <p:sldId id="280" r:id="rIdS25"/>
     <p:sldId id="281" r:id="rIdS26"/>
+    <p:sldId id="282" r:id="rIdS27"/>
   </p:sldIdLst>
   <p:sldSz cx="12192000" cy="6858000" type="screen16x9"/>
   <p:notesSz cx="6858000" cy="9144000"/>
@@ -1125,7 +1126,7 @@
       </p:sp>
       <p:pic>
         <p:nvPicPr>
-          <p:cNvPr id="124" name="Imagen 124" descr="Panel del consejo con las tarjetas de cartera y valor"/>
+          <p:cNvPr id="124" name="Imagen 124" descr="Panel del consejo: tarjetas de cartera y valor y la lectura «Qué frena el escalado»"/>
           <p:cNvPicPr>
             <a:picLocks noChangeAspect="1"/>
           </p:cNvPicPr>
@@ -1190,7 +1191,7 @@
                   <a:srgbClr val="2F2B28"/>
                 </a:solidFill>
               </a:rPr>
-              <a:t>15 casos: cuántos hay en uso, en desarrollo, en prueba de concepto, propuestos y fuera.</a:t>
+              <a:t>Arriba, las cifras: 15 casos, costes 2,4 M€ al año, retorno total 7,3 M€ y neto anual 4,8 M€. Cada cifra se pulsa y abre sus casos.</a:t>
             </a:r>
           </a:p>
           <a:p>
@@ -1210,7 +1211,7 @@
                   <a:srgbClr val="2F2B28"/>
                 </a:solidFill>
               </a:rPr>
-              <a:t>Costes 2,4 M€ al año y retorno total 7,3 M€ (eficiencias más retorno): el neto anual es 4,8 M€.</a:t>
+              <a:t>La tarjeta amarilla es la importante: solo el 36 % del valor está validado por control de gestión. En rojo: solo 3 de 15 casos tienen todos los controles.</a:t>
             </a:r>
           </a:p>
           <a:p>
@@ -1230,7 +1231,7 @@
                   <a:srgbClr val="2F2B28"/>
                 </a:solidFill>
               </a:rPr>
-              <a:t>La tarjeta amarilla es la importante: solo el 36 % del valor está validado por control de gestión. El resto es declarado o estimado.</a:t>
+              <a:t>Debajo, «Qué frena el escalado»: los tres frenos por los que empezar, con qué bloquean, qué hacer, quién y el valor en juego (documento 60 §10.4).</a:t>
             </a:r>
           </a:p>
           <a:p>
@@ -1250,7 +1251,7 @@
                   <a:srgbClr val="2F2B28"/>
                 </a:solidFill>
               </a:rPr>
-              <a:t>La capacidad liberada que no se materializa aparece aparte y no suma.</a:t>
+              <a:t>En el ejemplo: primero riesgo y cumplimiento (bloquea G5), después el valor sin validar (bloquea G7 · Escalar) y los casos que no avanzan.</a:t>
             </a:r>
           </a:p>
           <a:p>
@@ -1270,9 +1271,254 @@
                   <a:srgbClr val="2F2B28"/>
                 </a:solidFill>
               </a:rPr>
-              <a:t>En rojo: solo 3 de 15 casos tienen todos los controles (evaluaciones de impacto, seguridad, manual de uso).</a:t>
-            </a:r>
-          </a:p>
+              <a:t>El valor en juego ordena, no promete: es declarado, no validado.</a:t>
+            </a:r>
+          </a:p>
+        </p:txBody>
+      </p:sp>
+      <p:sp>
+        <p:nvSpPr>
+          <p:cNvPr id="126" name="Texto 126"/>
+          <p:cNvSpPr txBox="1"/>
+          <p:nvPr/>
+        </p:nvSpPr>
+        <p:spPr>
+          <a:xfrm>
+            <a:off x="609600" y="6260000"/>
+            <a:ext cx="10972800" cy="450000"/>
+          </a:xfrm>
+          <a:prstGeom prst="rect">
+            <a:avLst/>
+          </a:prstGeom>
+          <a:noFill/>
+        </p:spPr>
+        <p:txBody>
+          <a:bodyPr wrap="square" anchor="t" lIns="45720" rIns="45720">
+            <a:noAutofit/>
+          </a:bodyPr>
+          <a:lstStyle/>
+          <a:p>
+            <a:pPr algn="l"/>
+            <a:r>
+              <a:rPr lang="es-ES" sz="1300" b="1" dirty="0">
+                <a:solidFill>
+                  <a:srgbClr val="0F5499"/>
+                </a:solidFill>
+              </a:rPr>
+              <a:t>Si una cifra del panel no gusta, no se retoca el panel: se corrige la evidencia en el registro y se vuelve a generar.</a:t>
+            </a:r>
+          </a:p>
+        </p:txBody>
+      </p:sp>
+    </p:spTree>
+  </p:cSld>
+  <p:clrMapOvr>
+    <a:overrideClrMapping bg1="lt1" tx1="dk1" bg2="lt2" tx2="dk2" accent1="accent1" accent2="accent2" accent3="accent3" accent4="accent4" accent5="accent5" accent6="accent6" hlink="hlink" folHlink="folHlink"/>
+  </p:clrMapOvr>
+</p:sld>
+</file>
+
+<file path=ppt/slides/slide13.xml><?xml version="1.0" encoding="utf-8"?>
+<p:sld xmlns:a="http://schemas.openxmlformats.org/drawingml/2006/main" xmlns:r="http://schemas.openxmlformats.org/officeDocument/2006/relationships" xmlns:p="http://schemas.openxmlformats.org/presentationml/2006/main">
+  <p:cSld>
+    <p:bg>
+      <p:bgPr>
+        <a:solidFill>
+          <a:srgbClr val="FBE2CD"/>
+        </a:solidFill>
+        <a:effectLst/>
+      </p:bgPr>
+    </p:bg>
+    <p:spTree>
+      <p:nvGrpSpPr>
+        <p:cNvPr id="1" name=""/>
+        <p:cNvGrpSpPr/>
+        <p:nvPr/>
+      </p:nvGrpSpPr>
+      <p:grpSpPr>
+        <a:xfrm>
+          <a:off x="0" y="0"/>
+          <a:ext cx="0" cy="0"/>
+          <a:chOff x="0" y="0"/>
+          <a:chExt cx="0" cy="0"/>
+        </a:xfrm>
+      </p:grpSpPr>
+      <p:sp>
+        <p:nvSpPr>
+          <p:cNvPr id="134" name="Marca"/>
+          <p:cNvSpPr/>
+          <p:nvPr/>
+        </p:nvSpPr>
+        <p:spPr>
+          <a:xfrm>
+            <a:off x="609600" y="365760"/>
+            <a:ext cx="182880" cy="182880"/>
+          </a:xfrm>
+          <a:prstGeom prst="rect">
+            <a:avLst/>
+          </a:prstGeom>
+          <a:solidFill>
+            <a:srgbClr val="990F3D"/>
+          </a:solidFill>
+        </p:spPr>
+        <p:txBody>
+          <a:bodyPr/>
+          <a:lstStyle/>
+          <a:p/>
+        </p:txBody>
+      </p:sp>
+      <p:sp>
+        <p:nvSpPr>
+          <p:cNvPr id="135" name="Texto 135"/>
+          <p:cNvSpPr txBox="1"/>
+          <p:nvPr/>
+        </p:nvSpPr>
+        <p:spPr>
+          <a:xfrm>
+            <a:off x="838200" y="300000"/>
+            <a:ext cx="10500000" cy="320000"/>
+          </a:xfrm>
+          <a:prstGeom prst="rect">
+            <a:avLst/>
+          </a:prstGeom>
+          <a:noFill/>
+        </p:spPr>
+        <p:txBody>
+          <a:bodyPr wrap="square" anchor="ctr" lIns="45720" rIns="45720">
+            <a:noAutofit/>
+          </a:bodyPr>
+          <a:lstStyle/>
+          <a:p>
+            <a:pPr algn="l"/>
+            <a:r>
+              <a:rPr lang="es-ES" sz="1400" b="1" dirty="0">
+                <a:solidFill>
+                  <a:srgbClr val="1A1817"/>
+                </a:solidFill>
+              </a:rPr>
+              <a:t>SEVEN-G · CURSO · EMPRESA · AUTOCONSULTORÍA</a:t>
+            </a:r>
+          </a:p>
+        </p:txBody>
+      </p:sp>
+      <p:sp>
+        <p:nvSpPr>
+          <p:cNvPr id="136" name="Texto 136"/>
+          <p:cNvSpPr txBox="1"/>
+          <p:nvPr/>
+        </p:nvSpPr>
+        <p:spPr>
+          <a:xfrm>
+            <a:off x="609600" y="700000"/>
+            <a:ext cx="10972800" cy="650000"/>
+          </a:xfrm>
+          <a:prstGeom prst="rect">
+            <a:avLst/>
+          </a:prstGeom>
+          <a:noFill/>
+        </p:spPr>
+        <p:txBody>
+          <a:bodyPr wrap="square" anchor="t" lIns="45720" rIns="45720">
+            <a:noAutofit/>
+          </a:bodyPr>
+          <a:lstStyle/>
+          <a:p>
+            <a:pPr algn="l"/>
+            <a:r>
+              <a:rPr lang="es-ES" sz="2700" b="1" dirty="0">
+                <a:solidFill>
+                  <a:srgbClr val="990F3D"/>
+                </a:solidFill>
+              </a:rPr>
+              <a:t>Dónde está el impacto: esferas × ambición</a:t>
+            </a:r>
+          </a:p>
+        </p:txBody>
+      </p:sp>
+      <p:sp>
+        <p:nvSpPr>
+          <p:cNvPr id="137" name="Texto 137"/>
+          <p:cNvSpPr txBox="1"/>
+          <p:nvPr/>
+        </p:nvSpPr>
+        <p:spPr>
+          <a:xfrm>
+            <a:off x="609600" y="1330000"/>
+            <a:ext cx="10972800" cy="450000"/>
+          </a:xfrm>
+          <a:prstGeom prst="rect">
+            <a:avLst/>
+          </a:prstGeom>
+          <a:noFill/>
+        </p:spPr>
+        <p:txBody>
+          <a:bodyPr wrap="square" anchor="t" lIns="45720" rIns="45720">
+            <a:noAutofit/>
+          </a:bodyPr>
+          <a:lstStyle/>
+          <a:p>
+            <a:pPr algn="l"/>
+            <a:r>
+              <a:rPr lang="es-ES" sz="1500" dirty="0">
+                <a:solidFill>
+                  <a:srgbClr val="564D47"/>
+                </a:solidFill>
+              </a:rPr>
+              <a:t>El mapa de calor de la cartera (T16) en el mismo panel. Datos ficticios</a:t>
+            </a:r>
+          </a:p>
+        </p:txBody>
+      </p:sp>
+      <p:pic>
+        <p:nvPicPr>
+          <p:cNvPr id="131" name="Imagen 131" descr="Mapa de calor de esferas por nivel de ambición con casos, inversión, neto y brechas"/>
+          <p:cNvPicPr>
+            <a:picLocks noChangeAspect="1"/>
+          </p:cNvPicPr>
+          <p:nvPr/>
+        </p:nvPicPr>
+        <p:blipFill>
+          <a:blip r:embed="rIdImg_impacto"/>
+          <a:stretch>
+            <a:fillRect/>
+          </a:stretch>
+        </p:blipFill>
+        <p:spPr>
+          <a:xfrm>
+            <a:off x="609600" y="1900000"/>
+            <a:ext cx="6700000" cy="4243333"/>
+          </a:xfrm>
+          <a:prstGeom prst="rect">
+            <a:avLst/>
+          </a:prstGeom>
+          <a:ln w="12700">
+            <a:solidFill>
+              <a:srgbClr val="C9A78D"/>
+            </a:solidFill>
+          </a:ln>
+        </p:spPr>
+      </p:pic>
+      <p:sp>
+        <p:nvSpPr>
+          <p:cNvPr id="132" name="Texto 132"/>
+          <p:cNvSpPr txBox="1"/>
+          <p:nvPr/>
+        </p:nvSpPr>
+        <p:spPr>
+          <a:xfrm>
+            <a:off x="7509600" y="1850000"/>
+            <a:ext cx="4072800" cy="4400000"/>
+          </a:xfrm>
+          <a:prstGeom prst="rect">
+            <a:avLst/>
+          </a:prstGeom>
+          <a:noFill/>
+        </p:spPr>
+        <p:txBody>
+          <a:bodyPr wrap="square" anchor="t" lIns="45720" rIns="45720">
+            <a:noAutofit/>
+          </a:bodyPr>
+          <a:lstStyle/>
           <a:p>
             <a:pPr marL="285750" indent="-285750">
               <a:spcAft>
@@ -1290,14 +1536,94 @@
                   <a:srgbClr val="2F2B28"/>
                 </a:solidFill>
               </a:rPr>
-              <a:t>Otras páginas: embudo y ciclo de vida, histórico y adopción, riesgo y cumplimiento, inventario.</a:t>
-            </a:r>
-          </a:p>
-        </p:txBody>
-      </p:sp>
-      <p:sp>
-        <p:nvSpPr>
-          <p:cNvPr id="126" name="Texto 126"/>
+              <a:t>Filas: las áreas donde la IA crea valor (cliente, producto, personas, operaciones, datos, conocimiento, decisión). Columnas: optimizar, aumentar, transformar.</a:t>
+            </a:r>
+          </a:p>
+          <a:p>
+            <a:pPr marL="285750" indent="-285750">
+              <a:spcAft>
+                <a:spcPts val="400"/>
+              </a:spcAft>
+              <a:buClr>
+                <a:srgbClr val="990F3D"/>
+              </a:buClr>
+              <a:buFont typeface="Arial"/>
+              <a:buChar char="•"/>
+            </a:pPr>
+            <a:r>
+              <a:rPr lang="es-ES" sz="1300" dirty="0">
+                <a:solidFill>
+                  <a:srgbClr val="2F2B28"/>
+                </a:solidFill>
+              </a:rPr>
+              <a:t>Cada celda: casos, inversión y coste, neto anual y valor validado; el color dice dónde se concentra el gasto.</a:t>
+            </a:r>
+          </a:p>
+          <a:p>
+            <a:pPr marL="285750" indent="-285750">
+              <a:spcAft>
+                <a:spcPts val="400"/>
+              </a:spcAft>
+              <a:buClr>
+                <a:srgbClr val="990F3D"/>
+              </a:buClr>
+              <a:buFont typeface="Arial"/>
+              <a:buChar char="•"/>
+            </a:pPr>
+            <a:r>
+              <a:rPr lang="es-ES" sz="1300" dirty="0">
+                <a:solidFill>
+                  <a:srgbClr val="2F2B28"/>
+                </a:solidFill>
+              </a:rPr>
+              <a:t>«Brecha»: la ambición que aprobó la dirección en C2 para esa esfera no tiene ningún caso que haya superado G2.</a:t>
+            </a:r>
+          </a:p>
+          <a:p>
+            <a:pPr marL="285750" indent="-285750">
+              <a:spcAft>
+                <a:spcPts val="400"/>
+              </a:spcAft>
+              <a:buClr>
+                <a:srgbClr val="990F3D"/>
+              </a:buClr>
+              <a:buFont typeface="Arial"/>
+              <a:buChar char="•"/>
+            </a:pPr>
+            <a:r>
+              <a:rPr lang="es-ES" sz="1300" dirty="0">
+                <a:solidFill>
+                  <a:srgbClr val="2F2B28"/>
+                </a:solidFill>
+              </a:rPr>
+              <a:t>En el ejemplo: el 40 % del gasto está en Cliente, Datos no tiene actividad y cinco esferas tienen brecha.</a:t>
+            </a:r>
+          </a:p>
+          <a:p>
+            <a:pPr marL="285750" indent="-285750">
+              <a:spcAft>
+                <a:spcPts val="400"/>
+              </a:spcAft>
+              <a:buClr>
+                <a:srgbClr val="990F3D"/>
+              </a:buClr>
+              <a:buFont typeface="Arial"/>
+              <a:buChar char="•"/>
+            </a:pPr>
+            <a:r>
+              <a:rPr lang="es-ES" sz="1300" dirty="0">
+                <a:solidFill>
+                  <a:srgbClr val="2F2B28"/>
+                </a:solidFill>
+              </a:rPr>
+              <a:t>La ambición objetivo sale de la tesis aprobada en el registro, no se escribe en el panel.</a:t>
+            </a:r>
+          </a:p>
+        </p:txBody>
+      </p:sp>
+      <p:sp>
+        <p:nvSpPr>
+          <p:cNvPr id="133" name="Texto 133"/>
           <p:cNvSpPr txBox="1"/>
           <p:nvPr/>
         </p:nvSpPr>
@@ -1324,7 +1650,7 @@
                   <a:srgbClr val="0F5499"/>
                 </a:solidFill>
               </a:rPr>
-              <a:t>Si una cifra del panel no gusta, no se retoca el panel: se corrige la evidencia en el registro y se vuelve a generar.</a:t>
+              <a:t>La pregunta que responde: ¿dónde tiene la IA más impacto en la compañía y dónde no estamos jugando? (documento 10 §8)</a:t>
             </a:r>
           </a:p>
         </p:txBody>
@@ -1337,7 +1663,7 @@
 </p:sld>
 </file>
 
-<file path=ppt/slides/slide13.xml><?xml version="1.0" encoding="utf-8"?>
+<file path=ppt/slides/slide14.xml><?xml version="1.0" encoding="utf-8"?>
 <p:sld xmlns:a="http://schemas.openxmlformats.org/drawingml/2006/main" xmlns:r="http://schemas.openxmlformats.org/officeDocument/2006/relationships" xmlns:p="http://schemas.openxmlformats.org/presentationml/2006/main">
   <p:cSld>
     <p:bg>
@@ -1364,7 +1690,7 @@
       </p:grpSpPr>
       <p:sp>
         <p:nvSpPr>
-          <p:cNvPr id="131" name="Marca"/>
+          <p:cNvPr id="138" name="Marca"/>
           <p:cNvSpPr/>
           <p:nvPr/>
         </p:nvSpPr>
@@ -1388,7 +1714,7 @@
       </p:sp>
       <p:sp>
         <p:nvSpPr>
-          <p:cNvPr id="132" name="Texto 132"/>
+          <p:cNvPr id="139" name="Texto 139"/>
           <p:cNvSpPr txBox="1"/>
           <p:nvPr/>
         </p:nvSpPr>
@@ -1422,7 +1748,7 @@
       </p:sp>
       <p:sp>
         <p:nvSpPr>
-          <p:cNvPr id="133" name="Texto 133"/>
+          <p:cNvPr id="140" name="Texto 140"/>
           <p:cNvSpPr txBox="1"/>
           <p:nvPr/>
         </p:nvSpPr>
@@ -1456,7 +1782,7 @@
       </p:sp>
       <p:sp>
         <p:nvSpPr>
-          <p:cNvPr id="134" name="Texto 134"/>
+          <p:cNvPr id="141" name="Texto 141"/>
           <p:cNvSpPr txBox="1"/>
           <p:nvPr/>
         </p:nvSpPr>
@@ -1484,349 +1810,6 @@
                 </a:solidFill>
               </a:rPr>
               <a:t>Datos ficticios, ilustrativos: no describen ninguna compañía real.</a:t>
-            </a:r>
-          </a:p>
-        </p:txBody>
-      </p:sp>
-    </p:spTree>
-  </p:cSld>
-  <p:clrMapOvr>
-    <a:overrideClrMapping bg1="lt1" tx1="dk1" bg2="lt2" tx2="dk2" accent1="accent1" accent2="accent2" accent3="accent3" accent4="accent4" accent5="accent5" accent6="accent6" hlink="hlink" folHlink="folHlink"/>
-  </p:clrMapOvr>
-</p:sld>
-</file>
-
-<file path=ppt/slides/slide14.xml><?xml version="1.0" encoding="utf-8"?>
-<p:sld xmlns:a="http://schemas.openxmlformats.org/drawingml/2006/main" xmlns:r="http://schemas.openxmlformats.org/officeDocument/2006/relationships" xmlns:p="http://schemas.openxmlformats.org/presentationml/2006/main">
-  <p:cSld>
-    <p:bg>
-      <p:bgPr>
-        <a:solidFill>
-          <a:srgbClr val="FBE2CD"/>
-        </a:solidFill>
-        <a:effectLst/>
-      </p:bgPr>
-    </p:bg>
-    <p:spTree>
-      <p:nvGrpSpPr>
-        <p:cNvPr id="1" name=""/>
-        <p:cNvGrpSpPr/>
-        <p:nvPr/>
-      </p:nvGrpSpPr>
-      <p:grpSpPr>
-        <a:xfrm>
-          <a:off x="0" y="0"/>
-          <a:ext cx="0" cy="0"/>
-          <a:chOff x="0" y="0"/>
-          <a:chExt cx="0" cy="0"/>
-        </a:xfrm>
-      </p:grpSpPr>
-      <p:sp>
-        <p:nvSpPr>
-          <p:cNvPr id="138" name="Marca"/>
-          <p:cNvSpPr/>
-          <p:nvPr/>
-        </p:nvSpPr>
-        <p:spPr>
-          <a:xfrm>
-            <a:off x="609600" y="365760"/>
-            <a:ext cx="182880" cy="182880"/>
-          </a:xfrm>
-          <a:prstGeom prst="rect">
-            <a:avLst/>
-          </a:prstGeom>
-          <a:solidFill>
-            <a:srgbClr val="990F3D"/>
-          </a:solidFill>
-        </p:spPr>
-        <p:txBody>
-          <a:bodyPr/>
-          <a:lstStyle/>
-          <a:p/>
-        </p:txBody>
-      </p:sp>
-      <p:sp>
-        <p:nvSpPr>
-          <p:cNvPr id="139" name="Texto 139"/>
-          <p:cNvSpPr txBox="1"/>
-          <p:nvPr/>
-        </p:nvSpPr>
-        <p:spPr>
-          <a:xfrm>
-            <a:off x="838200" y="300000"/>
-            <a:ext cx="10500000" cy="320000"/>
-          </a:xfrm>
-          <a:prstGeom prst="rect">
-            <a:avLst/>
-          </a:prstGeom>
-          <a:noFill/>
-        </p:spPr>
-        <p:txBody>
-          <a:bodyPr wrap="square" anchor="ctr" lIns="45720" rIns="45720">
-            <a:noAutofit/>
-          </a:bodyPr>
-          <a:lstStyle/>
-          <a:p>
-            <a:pPr algn="l"/>
-            <a:r>
-              <a:rPr lang="es-ES" sz="1400" b="1" dirty="0">
-                <a:solidFill>
-                  <a:srgbClr val="1A1817"/>
-                </a:solidFill>
-              </a:rPr>
-              <a:t>SEVEN-G · CURSO · EMPRESA · AUTOCONSULTORÍA</a:t>
-            </a:r>
-          </a:p>
-        </p:txBody>
-      </p:sp>
-      <p:sp>
-        <p:nvSpPr>
-          <p:cNvPr id="140" name="Texto 140"/>
-          <p:cNvSpPr txBox="1"/>
-          <p:nvPr/>
-        </p:nvSpPr>
-        <p:spPr>
-          <a:xfrm>
-            <a:off x="609600" y="700000"/>
-            <a:ext cx="10972800" cy="650000"/>
-          </a:xfrm>
-          <a:prstGeom prst="rect">
-            <a:avLst/>
-          </a:prstGeom>
-          <a:noFill/>
-        </p:spPr>
-        <p:txBody>
-          <a:bodyPr wrap="square" anchor="t" lIns="45720" rIns="45720">
-            <a:noAutofit/>
-          </a:bodyPr>
-          <a:lstStyle/>
-          <a:p>
-            <a:pPr algn="l"/>
-            <a:r>
-              <a:rPr lang="es-ES" sz="2700" b="1" dirty="0">
-                <a:solidFill>
-                  <a:srgbClr val="990F3D"/>
-                </a:solidFill>
-              </a:rPr>
-              <a:t>Ejemplo 1 · Cuando una iniciativa se para</a:t>
-            </a:r>
-          </a:p>
-        </p:txBody>
-      </p:sp>
-      <p:sp>
-        <p:nvSpPr>
-          <p:cNvPr id="135" name="Texto 135"/>
-          <p:cNvSpPr txBox="1"/>
-          <p:nvPr/>
-        </p:nvSpPr>
-        <p:spPr>
-          <a:xfrm>
-            <a:off x="609600" y="1330000"/>
-            <a:ext cx="10972800" cy="500000"/>
-          </a:xfrm>
-          <a:prstGeom prst="rect">
-            <a:avLst/>
-          </a:prstGeom>
-          <a:noFill/>
-        </p:spPr>
-        <p:txBody>
-          <a:bodyPr wrap="square" anchor="t" lIns="45720" rIns="45720">
-            <a:noAutofit/>
-          </a:bodyPr>
-          <a:lstStyle/>
-          <a:p>
-            <a:pPr algn="l"/>
-            <a:r>
-              <a:rPr lang="es-ES" sz="1700" b="1" dirty="0">
-                <a:solidFill>
-                  <a:srgbClr val="2F2B28"/>
-                </a:solidFill>
-              </a:rPr>
-              <a:t>Cribado de candidaturas en procesos de selección (RR. HH.)</a:t>
-            </a:r>
-          </a:p>
-        </p:txBody>
-      </p:sp>
-      <p:sp>
-        <p:nvSpPr>
-          <p:cNvPr id="136" name="Texto 136"/>
-          <p:cNvSpPr txBox="1"/>
-          <p:nvPr/>
-        </p:nvSpPr>
-        <p:spPr>
-          <a:xfrm>
-            <a:off x="609600" y="1900000"/>
-            <a:ext cx="10972800" cy="3550000"/>
-          </a:xfrm>
-          <a:prstGeom prst="rect">
-            <a:avLst/>
-          </a:prstGeom>
-          <a:noFill/>
-        </p:spPr>
-        <p:txBody>
-          <a:bodyPr wrap="square" anchor="t" lIns="45720" rIns="45720">
-            <a:noAutofit/>
-          </a:bodyPr>
-          <a:lstStyle/>
-          <a:p>
-            <a:pPr marL="285750" indent="-285750">
-              <a:spcAft>
-                <a:spcPts val="400"/>
-              </a:spcAft>
-              <a:buClr>
-                <a:srgbClr val="990F3D"/>
-              </a:buClr>
-              <a:buFont typeface="Arial"/>
-              <a:buChar char="•"/>
-            </a:pPr>
-            <a:r>
-              <a:rPr lang="es-ES" sz="1500" dirty="0">
-                <a:solidFill>
-                  <a:srgbClr val="2F2B28"/>
-                </a:solidFill>
-              </a:rPr>
-              <a:t>Fases 0 y 1: RR. HH. la patrocina (P01–P05). Al decidir sobre personas, la intensidad es Enterprise (P04). Entra en «Propuesto».</a:t>
-            </a:r>
-          </a:p>
-          <a:p>
-            <a:pPr marL="285750" indent="-285750">
-              <a:spcAft>
-                <a:spcPts val="400"/>
-              </a:spcAft>
-              <a:buClr>
-                <a:srgbClr val="990F3D"/>
-              </a:buClr>
-              <a:buFont typeface="Arial"/>
-              <a:buChar char="•"/>
-            </a:pPr>
-            <a:r>
-              <a:rPr lang="es-ES" sz="1500" dirty="0">
-                <a:solidFill>
-                  <a:srgbClr val="2F2B28"/>
-                </a:solidFill>
-              </a:rPr>
-              <a:t>Fase 2: la hipótesis (P08) promete un 40 % menos de tiempo de cribado frente a la línea base (P09). El piloto lo confirma: G2, Continuar.</a:t>
-            </a:r>
-          </a:p>
-          <a:p>
-            <a:pPr marL="285750" indent="-285750">
-              <a:spcAft>
-                <a:spcPts val="400"/>
-              </a:spcAft>
-              <a:buClr>
-                <a:srgbClr val="990F3D"/>
-              </a:buClr>
-              <a:buFont typeface="Arial"/>
-              <a:buChar char="•"/>
-            </a:pPr>
-            <a:r>
-              <a:rPr lang="es-ES" sz="1500" dirty="0">
-                <a:solidFill>
-                  <a:srgbClr val="2F2B28"/>
-                </a:solidFill>
-              </a:rPr>
-              <a:t>Fase 3: la clasificación regulatoria (P11) lo sitúa como sistema de alto riesgo. La prueba de sesgo detecta que penaliza a candidatos de más edad.</a:t>
-            </a:r>
-          </a:p>
-          <a:p>
-            <a:pPr marL="285750" indent="-285750">
-              <a:spcAft>
-                <a:spcPts val="400"/>
-              </a:spcAft>
-              <a:buClr>
-                <a:srgbClr val="990F3D"/>
-              </a:buClr>
-              <a:buFont typeface="Arial"/>
-              <a:buChar char="•"/>
-            </a:pPr>
-            <a:r>
-              <a:rPr lang="es-ES" sz="1500" dirty="0">
-                <a:solidFill>
-                  <a:srgbClr val="2F2B28"/>
-                </a:solidFill>
-              </a:rPr>
-              <a:t>Se itera dos veces ajustando variables: corregir el sesgo destruye la capacidad predictiva que justificaba el proyecto.</a:t>
-            </a:r>
-          </a:p>
-          <a:p>
-            <a:pPr marL="285750" indent="-285750">
-              <a:spcAft>
-                <a:spcPts val="400"/>
-              </a:spcAft>
-              <a:buClr>
-                <a:srgbClr val="990F3D"/>
-              </a:buClr>
-              <a:buFont typeface="Arial"/>
-              <a:buChar char="•"/>
-            </a:pPr>
-            <a:r>
-              <a:rPr lang="es-ES" sz="1500" dirty="0">
-                <a:solidFill>
-                  <a:srgbClr val="2F2B28"/>
-                </a:solidFill>
-              </a:rPr>
-              <a:t>G3: riesgo residual alto sin mitigación viable (P12, P13). El comité de IA decide Parar; queda en P29 con su motivo.</a:t>
-            </a:r>
-          </a:p>
-          <a:p>
-            <a:pPr marL="285750" indent="-285750">
-              <a:spcAft>
-                <a:spcPts val="400"/>
-              </a:spcAft>
-              <a:buClr>
-                <a:srgbClr val="990F3D"/>
-              </a:buClr>
-              <a:buFont typeface="Arial"/>
-              <a:buChar char="•"/>
-            </a:pPr>
-            <a:r>
-              <a:rPr lang="es-ES" sz="1500" dirty="0">
-                <a:solidFill>
-                  <a:srgbClr val="2F2B28"/>
-                </a:solidFill>
-              </a:rPr>
-              <a:t>En el embudo aparece a la derecha de «Prueba de concepto»: Descartado · riesgo inaceptable. Lección: probar el sesgo antes, en la fase 2.</a:t>
-            </a:r>
-          </a:p>
-        </p:txBody>
-      </p:sp>
-      <p:sp>
-        <p:nvSpPr>
-          <p:cNvPr id="137" name="Caja 137"/>
-          <p:cNvSpPr/>
-          <p:nvPr/>
-        </p:nvSpPr>
-        <p:spPr>
-          <a:xfrm>
-            <a:off x="609600" y="5600000"/>
-            <a:ext cx="10972800" cy="900000"/>
-          </a:xfrm>
-          <a:prstGeom prst="roundRect">
-            <a:avLst>
-              <a:gd name="adj" fmla="val 6000"/>
-            </a:avLst>
-          </a:prstGeom>
-          <a:solidFill>
-            <a:srgbClr val="990F3D"/>
-          </a:solidFill>
-          <a:ln>
-            <a:noFill/>
-          </a:ln>
-        </p:spPr>
-        <p:txBody>
-          <a:bodyPr wrap="square" anchor="ctr" lIns="45720" rIns="45720">
-            <a:noAutofit/>
-          </a:bodyPr>
-          <a:lstStyle/>
-          <a:p>
-            <a:pPr algn="ctr"/>
-            <a:r>
-              <a:rPr lang="es-ES" sz="2100" b="1" dirty="0">
-                <a:solidFill>
-                  <a:srgbClr val="FFFFFF"/>
-                </a:solidFill>
-              </a:rPr>
-              <a:t>PARADA EN G3 · SE EVITÓ CONSTRUIR Y OPERAR UN SISTEMA INVIABLE</a:t>
             </a:r>
           </a:p>
         </p:txBody>
@@ -1866,7 +1849,7 @@
       </p:grpSpPr>
       <p:sp>
         <p:nvSpPr>
-          <p:cNvPr id="158" name="Marca"/>
+          <p:cNvPr id="145" name="Marca"/>
           <p:cNvSpPr/>
           <p:nvPr/>
         </p:nvSpPr>
@@ -1890,7 +1873,7 @@
       </p:sp>
       <p:sp>
         <p:nvSpPr>
-          <p:cNvPr id="159" name="Texto 159"/>
+          <p:cNvPr id="146" name="Texto 146"/>
           <p:cNvSpPr txBox="1"/>
           <p:nvPr/>
         </p:nvSpPr>
@@ -1924,7 +1907,7 @@
       </p:sp>
       <p:sp>
         <p:nvSpPr>
-          <p:cNvPr id="160" name="Texto 160"/>
+          <p:cNvPr id="147" name="Texto 147"/>
           <p:cNvSpPr txBox="1"/>
           <p:nvPr/>
         </p:nvSpPr>
@@ -1951,21 +1934,21 @@
                   <a:srgbClr val="990F3D"/>
                 </a:solidFill>
               </a:rPr>
-              <a:t>La iniciativa 1, sobre el ciclo de vida</a:t>
-            </a:r>
-          </a:p>
-        </p:txBody>
-      </p:sp>
-      <p:sp>
-        <p:nvSpPr>
-          <p:cNvPr id="161" name="Texto 161"/>
+              <a:t>Ejemplo 1 · Cuando una iniciativa se para</a:t>
+            </a:r>
+          </a:p>
+        </p:txBody>
+      </p:sp>
+      <p:sp>
+        <p:nvSpPr>
+          <p:cNvPr id="142" name="Texto 142"/>
           <p:cNvSpPr txBox="1"/>
           <p:nvPr/>
         </p:nvSpPr>
         <p:spPr>
           <a:xfrm>
             <a:off x="609600" y="1330000"/>
-            <a:ext cx="10972800" cy="450000"/>
+            <a:ext cx="10972800" cy="500000"/>
           </a:xfrm>
           <a:prstGeom prst="rect">
             <a:avLst/>
@@ -1980,26 +1963,169 @@
           <a:p>
             <a:pPr algn="l"/>
             <a:r>
+              <a:rPr lang="es-ES" sz="1700" b="1" dirty="0">
+                <a:solidFill>
+                  <a:srgbClr val="2F2B28"/>
+                </a:solidFill>
+              </a:rPr>
+              <a:t>Cribado de candidaturas en procesos de selección (RR. HH.)</a:t>
+            </a:r>
+          </a:p>
+        </p:txBody>
+      </p:sp>
+      <p:sp>
+        <p:nvSpPr>
+          <p:cNvPr id="143" name="Texto 143"/>
+          <p:cNvSpPr txBox="1"/>
+          <p:nvPr/>
+        </p:nvSpPr>
+        <p:spPr>
+          <a:xfrm>
+            <a:off x="609600" y="1900000"/>
+            <a:ext cx="10972800" cy="3550000"/>
+          </a:xfrm>
+          <a:prstGeom prst="rect">
+            <a:avLst/>
+          </a:prstGeom>
+          <a:noFill/>
+        </p:spPr>
+        <p:txBody>
+          <a:bodyPr wrap="square" anchor="t" lIns="45720" rIns="45720">
+            <a:noAutofit/>
+          </a:bodyPr>
+          <a:lstStyle/>
+          <a:p>
+            <a:pPr marL="285750" indent="-285750">
+              <a:spcAft>
+                <a:spcPts val="400"/>
+              </a:spcAft>
+              <a:buClr>
+                <a:srgbClr val="990F3D"/>
+              </a:buClr>
+              <a:buFont typeface="Arial"/>
+              <a:buChar char="•"/>
+            </a:pPr>
+            <a:r>
               <a:rPr lang="es-ES" sz="1500" dirty="0">
                 <a:solidFill>
-                  <a:srgbClr val="564D47"/>
-                </a:solidFill>
-              </a:rPr>
-              <a:t>Llegó a la fase 3 y no superó la puerta G3</a:t>
-            </a:r>
-          </a:p>
-        </p:txBody>
-      </p:sp>
-      <p:sp>
-        <p:nvSpPr>
-          <p:cNvPr id="141" name="Caja 141"/>
+                  <a:srgbClr val="2F2B28"/>
+                </a:solidFill>
+              </a:rPr>
+              <a:t>Fases 0 y 1: RR. HH. la patrocina (P01–P05). Al decidir sobre personas, la intensidad es Enterprise (P04). Entra en «Propuesto».</a:t>
+            </a:r>
+          </a:p>
+          <a:p>
+            <a:pPr marL="285750" indent="-285750">
+              <a:spcAft>
+                <a:spcPts val="400"/>
+              </a:spcAft>
+              <a:buClr>
+                <a:srgbClr val="990F3D"/>
+              </a:buClr>
+              <a:buFont typeface="Arial"/>
+              <a:buChar char="•"/>
+            </a:pPr>
+            <a:r>
+              <a:rPr lang="es-ES" sz="1500" dirty="0">
+                <a:solidFill>
+                  <a:srgbClr val="2F2B28"/>
+                </a:solidFill>
+              </a:rPr>
+              <a:t>Fase 2: la hipótesis (P08) promete un 40 % menos de tiempo de cribado frente a la línea base (P09). El piloto lo confirma: G2, Continuar.</a:t>
+            </a:r>
+          </a:p>
+          <a:p>
+            <a:pPr marL="285750" indent="-285750">
+              <a:spcAft>
+                <a:spcPts val="400"/>
+              </a:spcAft>
+              <a:buClr>
+                <a:srgbClr val="990F3D"/>
+              </a:buClr>
+              <a:buFont typeface="Arial"/>
+              <a:buChar char="•"/>
+            </a:pPr>
+            <a:r>
+              <a:rPr lang="es-ES" sz="1500" dirty="0">
+                <a:solidFill>
+                  <a:srgbClr val="2F2B28"/>
+                </a:solidFill>
+              </a:rPr>
+              <a:t>Fase 3: la clasificación regulatoria (P11) lo sitúa como sistema de alto riesgo. La prueba de sesgo detecta que penaliza a candidatos de más edad.</a:t>
+            </a:r>
+          </a:p>
+          <a:p>
+            <a:pPr marL="285750" indent="-285750">
+              <a:spcAft>
+                <a:spcPts val="400"/>
+              </a:spcAft>
+              <a:buClr>
+                <a:srgbClr val="990F3D"/>
+              </a:buClr>
+              <a:buFont typeface="Arial"/>
+              <a:buChar char="•"/>
+            </a:pPr>
+            <a:r>
+              <a:rPr lang="es-ES" sz="1500" dirty="0">
+                <a:solidFill>
+                  <a:srgbClr val="2F2B28"/>
+                </a:solidFill>
+              </a:rPr>
+              <a:t>Se itera dos veces ajustando variables: corregir el sesgo destruye la capacidad predictiva que justificaba el proyecto.</a:t>
+            </a:r>
+          </a:p>
+          <a:p>
+            <a:pPr marL="285750" indent="-285750">
+              <a:spcAft>
+                <a:spcPts val="400"/>
+              </a:spcAft>
+              <a:buClr>
+                <a:srgbClr val="990F3D"/>
+              </a:buClr>
+              <a:buFont typeface="Arial"/>
+              <a:buChar char="•"/>
+            </a:pPr>
+            <a:r>
+              <a:rPr lang="es-ES" sz="1500" dirty="0">
+                <a:solidFill>
+                  <a:srgbClr val="2F2B28"/>
+                </a:solidFill>
+              </a:rPr>
+              <a:t>G3: riesgo residual alto sin mitigación viable (P12, P13). El comité de IA decide Parar; queda en P29 con su motivo.</a:t>
+            </a:r>
+          </a:p>
+          <a:p>
+            <a:pPr marL="285750" indent="-285750">
+              <a:spcAft>
+                <a:spcPts val="400"/>
+              </a:spcAft>
+              <a:buClr>
+                <a:srgbClr val="990F3D"/>
+              </a:buClr>
+              <a:buFont typeface="Arial"/>
+              <a:buChar char="•"/>
+            </a:pPr>
+            <a:r>
+              <a:rPr lang="es-ES" sz="1500" dirty="0">
+                <a:solidFill>
+                  <a:srgbClr val="2F2B28"/>
+                </a:solidFill>
+              </a:rPr>
+              <a:t>En el embudo aparece a la derecha de «Prueba de concepto»: Descartado · riesgo inaceptable. Lección: probar el sesgo antes, en la fase 2.</a:t>
+            </a:r>
+          </a:p>
+        </p:txBody>
+      </p:sp>
+      <p:sp>
+        <p:nvSpPr>
+          <p:cNvPr id="144" name="Caja 144"/>
           <p:cNvSpPr/>
           <p:nvPr/>
         </p:nvSpPr>
         <p:spPr>
           <a:xfrm>
-            <a:off x="681000" y="2350000"/>
-            <a:ext cx="1240000" cy="1500000"/>
+            <a:off x="609600" y="5600000"/>
+            <a:ext cx="10972800" cy="900000"/>
           </a:xfrm>
           <a:prstGeom prst="roundRect">
             <a:avLst>
@@ -2021,693 +2147,12 @@
           <a:p>
             <a:pPr algn="ctr"/>
             <a:r>
-              <a:rPr lang="es-ES" sz="2400" b="1" dirty="0">
+              <a:rPr lang="es-ES" sz="2100" b="1" dirty="0">
                 <a:solidFill>
                   <a:srgbClr val="FFFFFF"/>
                 </a:solidFill>
               </a:rPr>
-              <a:t>F0</a:t>
-            </a:r>
-          </a:p>
-          <a:p>
-            <a:pPr algn="ctr"/>
-            <a:r>
-              <a:rPr lang="es-ES" sz="1050" dirty="0">
-                <a:solidFill>
-                  <a:srgbClr val="FFFFFF"/>
-                </a:solidFill>
-              </a:rPr>
-              <a:t>Contexto y restricciones</a:t>
-            </a:r>
-          </a:p>
-        </p:txBody>
-      </p:sp>
-      <p:sp>
-        <p:nvSpPr>
-          <p:cNvPr id="142" name="Texto 142"/>
-          <p:cNvSpPr txBox="1"/>
-          <p:nvPr/>
-        </p:nvSpPr>
-        <p:spPr>
-          <a:xfrm>
-            <a:off x="1591000" y="3900000"/>
-            <a:ext cx="800000" cy="300000"/>
-          </a:xfrm>
-          <a:prstGeom prst="rect">
-            <a:avLst/>
-          </a:prstGeom>
-          <a:noFill/>
-        </p:spPr>
-        <p:txBody>
-          <a:bodyPr wrap="square" anchor="t" lIns="45720" rIns="45720">
-            <a:noAutofit/>
-          </a:bodyPr>
-          <a:lstStyle/>
-          <a:p>
-            <a:pPr algn="ctr"/>
-            <a:r>
-              <a:rPr lang="es-ES" sz="1200" b="1" dirty="0">
-                <a:solidFill>
-                  <a:srgbClr val="990F3D"/>
-                </a:solidFill>
-              </a:rPr>
-              <a:t>G0</a:t>
-            </a:r>
-          </a:p>
-        </p:txBody>
-      </p:sp>
-      <p:sp>
-        <p:nvSpPr>
-          <p:cNvPr id="143" name="Caja 143"/>
-          <p:cNvSpPr/>
-          <p:nvPr/>
-        </p:nvSpPr>
-        <p:spPr>
-          <a:xfrm>
-            <a:off x="2051000" y="2350000"/>
-            <a:ext cx="1240000" cy="1500000"/>
-          </a:xfrm>
-          <a:prstGeom prst="roundRect">
-            <a:avLst>
-              <a:gd name="adj" fmla="val 6000"/>
-            </a:avLst>
-          </a:prstGeom>
-          <a:solidFill>
-            <a:srgbClr val="990F3D"/>
-          </a:solidFill>
-          <a:ln>
-            <a:noFill/>
-          </a:ln>
-        </p:spPr>
-        <p:txBody>
-          <a:bodyPr wrap="square" anchor="ctr" lIns="45720" rIns="45720">
-            <a:noAutofit/>
-          </a:bodyPr>
-          <a:lstStyle/>
-          <a:p>
-            <a:pPr algn="ctr"/>
-            <a:r>
-              <a:rPr lang="es-ES" sz="2400" b="1" dirty="0">
-                <a:solidFill>
-                  <a:srgbClr val="FFFFFF"/>
-                </a:solidFill>
-              </a:rPr>
-              <a:t>F1</a:t>
-            </a:r>
-          </a:p>
-          <a:p>
-            <a:pPr algn="ctr"/>
-            <a:r>
-              <a:rPr lang="es-ES" sz="1050" dirty="0">
-                <a:solidFill>
-                  <a:srgbClr val="FFFFFF"/>
-                </a:solidFill>
-              </a:rPr>
-              <a:t>Descubrimiento de oportunidades</a:t>
-            </a:r>
-          </a:p>
-        </p:txBody>
-      </p:sp>
-      <p:sp>
-        <p:nvSpPr>
-          <p:cNvPr id="144" name="Texto 144"/>
-          <p:cNvSpPr txBox="1"/>
-          <p:nvPr/>
-        </p:nvSpPr>
-        <p:spPr>
-          <a:xfrm>
-            <a:off x="2961000" y="3900000"/>
-            <a:ext cx="800000" cy="300000"/>
-          </a:xfrm>
-          <a:prstGeom prst="rect">
-            <a:avLst/>
-          </a:prstGeom>
-          <a:noFill/>
-        </p:spPr>
-        <p:txBody>
-          <a:bodyPr wrap="square" anchor="t" lIns="45720" rIns="45720">
-            <a:noAutofit/>
-          </a:bodyPr>
-          <a:lstStyle/>
-          <a:p>
-            <a:pPr algn="ctr"/>
-            <a:r>
-              <a:rPr lang="es-ES" sz="1200" b="1" dirty="0">
-                <a:solidFill>
-                  <a:srgbClr val="990F3D"/>
-                </a:solidFill>
-              </a:rPr>
-              <a:t>G1</a:t>
-            </a:r>
-          </a:p>
-        </p:txBody>
-      </p:sp>
-      <p:sp>
-        <p:nvSpPr>
-          <p:cNvPr id="145" name="Caja 145"/>
-          <p:cNvSpPr/>
-          <p:nvPr/>
-        </p:nvSpPr>
-        <p:spPr>
-          <a:xfrm>
-            <a:off x="3421000" y="2350000"/>
-            <a:ext cx="1240000" cy="1500000"/>
-          </a:xfrm>
-          <a:prstGeom prst="roundRect">
-            <a:avLst>
-              <a:gd name="adj" fmla="val 6000"/>
-            </a:avLst>
-          </a:prstGeom>
-          <a:solidFill>
-            <a:srgbClr val="990F3D"/>
-          </a:solidFill>
-          <a:ln>
-            <a:noFill/>
-          </a:ln>
-        </p:spPr>
-        <p:txBody>
-          <a:bodyPr wrap="square" anchor="ctr" lIns="45720" rIns="45720">
-            <a:noAutofit/>
-          </a:bodyPr>
-          <a:lstStyle/>
-          <a:p>
-            <a:pPr algn="ctr"/>
-            <a:r>
-              <a:rPr lang="es-ES" sz="2400" b="1" dirty="0">
-                <a:solidFill>
-                  <a:srgbClr val="FFFFFF"/>
-                </a:solidFill>
-              </a:rPr>
-              <a:t>F2</a:t>
-            </a:r>
-          </a:p>
-          <a:p>
-            <a:pPr algn="ctr"/>
-            <a:r>
-              <a:rPr lang="es-ES" sz="1050" dirty="0">
-                <a:solidFill>
-                  <a:srgbClr val="FFFFFF"/>
-                </a:solidFill>
-              </a:rPr>
-              <a:t>Hipótesis de valor</a:t>
-            </a:r>
-          </a:p>
-        </p:txBody>
-      </p:sp>
-      <p:sp>
-        <p:nvSpPr>
-          <p:cNvPr id="146" name="Texto 146"/>
-          <p:cNvSpPr txBox="1"/>
-          <p:nvPr/>
-        </p:nvSpPr>
-        <p:spPr>
-          <a:xfrm>
-            <a:off x="4331000" y="3900000"/>
-            <a:ext cx="800000" cy="300000"/>
-          </a:xfrm>
-          <a:prstGeom prst="rect">
-            <a:avLst/>
-          </a:prstGeom>
-          <a:noFill/>
-        </p:spPr>
-        <p:txBody>
-          <a:bodyPr wrap="square" anchor="t" lIns="45720" rIns="45720">
-            <a:noAutofit/>
-          </a:bodyPr>
-          <a:lstStyle/>
-          <a:p>
-            <a:pPr algn="ctr"/>
-            <a:r>
-              <a:rPr lang="es-ES" sz="1200" b="1" dirty="0">
-                <a:solidFill>
-                  <a:srgbClr val="990F3D"/>
-                </a:solidFill>
-              </a:rPr>
-              <a:t>G2</a:t>
-            </a:r>
-          </a:p>
-        </p:txBody>
-      </p:sp>
-      <p:sp>
-        <p:nvSpPr>
-          <p:cNvPr id="147" name="Caja 147"/>
-          <p:cNvSpPr/>
-          <p:nvPr/>
-        </p:nvSpPr>
-        <p:spPr>
-          <a:xfrm>
-            <a:off x="4791000" y="2350000"/>
-            <a:ext cx="1240000" cy="1500000"/>
-          </a:xfrm>
-          <a:prstGeom prst="roundRect">
-            <a:avLst>
-              <a:gd name="adj" fmla="val 6000"/>
-            </a:avLst>
-          </a:prstGeom>
-          <a:solidFill>
-            <a:srgbClr val="990F3D"/>
-          </a:solidFill>
-          <a:ln>
-            <a:noFill/>
-          </a:ln>
-        </p:spPr>
-        <p:txBody>
-          <a:bodyPr wrap="square" anchor="ctr" lIns="45720" rIns="45720">
-            <a:noAutofit/>
-          </a:bodyPr>
-          <a:lstStyle/>
-          <a:p>
-            <a:pPr algn="ctr"/>
-            <a:r>
-              <a:rPr lang="es-ES" sz="2400" b="1" dirty="0">
-                <a:solidFill>
-                  <a:srgbClr val="FFFFFF"/>
-                </a:solidFill>
-              </a:rPr>
-              <a:t>F3</a:t>
-            </a:r>
-          </a:p>
-          <a:p>
-            <a:pPr algn="ctr"/>
-            <a:r>
-              <a:rPr lang="es-ES" sz="1050" dirty="0">
-                <a:solidFill>
-                  <a:srgbClr val="FFFFFF"/>
-                </a:solidFill>
-              </a:rPr>
-              <a:t>Viabilidad y riesgo</a:t>
-            </a:r>
-          </a:p>
-        </p:txBody>
-      </p:sp>
-      <p:sp>
-        <p:nvSpPr>
-          <p:cNvPr id="148" name="Texto 148"/>
-          <p:cNvSpPr txBox="1"/>
-          <p:nvPr/>
-        </p:nvSpPr>
-        <p:spPr>
-          <a:xfrm>
-            <a:off x="5701000" y="3900000"/>
-            <a:ext cx="800000" cy="300000"/>
-          </a:xfrm>
-          <a:prstGeom prst="rect">
-            <a:avLst/>
-          </a:prstGeom>
-          <a:noFill/>
-        </p:spPr>
-        <p:txBody>
-          <a:bodyPr wrap="square" anchor="t" lIns="45720" rIns="45720">
-            <a:noAutofit/>
-          </a:bodyPr>
-          <a:lstStyle/>
-          <a:p>
-            <a:pPr algn="ctr"/>
-            <a:r>
-              <a:rPr lang="es-ES" sz="1200" b="1" dirty="0">
-                <a:solidFill>
-                  <a:srgbClr val="990F3D"/>
-                </a:solidFill>
-              </a:rPr>
-              <a:t>G3</a:t>
-            </a:r>
-          </a:p>
-        </p:txBody>
-      </p:sp>
-      <p:sp>
-        <p:nvSpPr>
-          <p:cNvPr id="149" name="Caja 149"/>
-          <p:cNvSpPr/>
-          <p:nvPr/>
-        </p:nvSpPr>
-        <p:spPr>
-          <a:xfrm>
-            <a:off x="6161000" y="2350000"/>
-            <a:ext cx="1240000" cy="1500000"/>
-          </a:xfrm>
-          <a:prstGeom prst="roundRect">
-            <a:avLst>
-              <a:gd name="adj" fmla="val 6000"/>
-            </a:avLst>
-          </a:prstGeom>
-          <a:solidFill>
-            <a:srgbClr val="C9A78D"/>
-          </a:solidFill>
-          <a:ln>
-            <a:noFill/>
-          </a:ln>
-        </p:spPr>
-        <p:txBody>
-          <a:bodyPr wrap="square" anchor="ctr" lIns="45720" rIns="45720">
-            <a:noAutofit/>
-          </a:bodyPr>
-          <a:lstStyle/>
-          <a:p>
-            <a:pPr algn="ctr"/>
-            <a:r>
-              <a:rPr lang="es-ES" sz="2400" b="1" dirty="0">
-                <a:solidFill>
-                  <a:srgbClr val="564D47"/>
-                </a:solidFill>
-              </a:rPr>
-              <a:t>F4</a:t>
-            </a:r>
-          </a:p>
-          <a:p>
-            <a:pPr algn="ctr"/>
-            <a:r>
-              <a:rPr lang="es-ES" sz="1050" dirty="0">
-                <a:solidFill>
-                  <a:srgbClr val="564D47"/>
-                </a:solidFill>
-              </a:rPr>
-              <a:t>Diseño de la solución</a:t>
-            </a:r>
-          </a:p>
-        </p:txBody>
-      </p:sp>
-      <p:sp>
-        <p:nvSpPr>
-          <p:cNvPr id="150" name="Texto 150"/>
-          <p:cNvSpPr txBox="1"/>
-          <p:nvPr/>
-        </p:nvSpPr>
-        <p:spPr>
-          <a:xfrm>
-            <a:off x="7071000" y="3900000"/>
-            <a:ext cx="800000" cy="300000"/>
-          </a:xfrm>
-          <a:prstGeom prst="rect">
-            <a:avLst/>
-          </a:prstGeom>
-          <a:noFill/>
-        </p:spPr>
-        <p:txBody>
-          <a:bodyPr wrap="square" anchor="t" lIns="45720" rIns="45720">
-            <a:noAutofit/>
-          </a:bodyPr>
-          <a:lstStyle/>
-          <a:p>
-            <a:pPr algn="ctr"/>
-            <a:r>
-              <a:rPr lang="es-ES" sz="1200" b="1" dirty="0">
-                <a:solidFill>
-                  <a:srgbClr val="990F3D"/>
-                </a:solidFill>
-              </a:rPr>
-              <a:t>G4</a:t>
-            </a:r>
-          </a:p>
-        </p:txBody>
-      </p:sp>
-      <p:sp>
-        <p:nvSpPr>
-          <p:cNvPr id="151" name="Caja 151"/>
-          <p:cNvSpPr/>
-          <p:nvPr/>
-        </p:nvSpPr>
-        <p:spPr>
-          <a:xfrm>
-            <a:off x="7531000" y="2350000"/>
-            <a:ext cx="1240000" cy="1500000"/>
-          </a:xfrm>
-          <a:prstGeom prst="roundRect">
-            <a:avLst>
-              <a:gd name="adj" fmla="val 6000"/>
-            </a:avLst>
-          </a:prstGeom>
-          <a:solidFill>
-            <a:srgbClr val="C9A78D"/>
-          </a:solidFill>
-          <a:ln>
-            <a:noFill/>
-          </a:ln>
-        </p:spPr>
-        <p:txBody>
-          <a:bodyPr wrap="square" anchor="ctr" lIns="45720" rIns="45720">
-            <a:noAutofit/>
-          </a:bodyPr>
-          <a:lstStyle/>
-          <a:p>
-            <a:pPr algn="ctr"/>
-            <a:r>
-              <a:rPr lang="es-ES" sz="2400" b="1" dirty="0">
-                <a:solidFill>
-                  <a:srgbClr val="564D47"/>
-                </a:solidFill>
-              </a:rPr>
-              <a:t>F5</a:t>
-            </a:r>
-          </a:p>
-          <a:p>
-            <a:pPr algn="ctr"/>
-            <a:r>
-              <a:rPr lang="es-ES" sz="1050" dirty="0">
-                <a:solidFill>
-                  <a:srgbClr val="564D47"/>
-                </a:solidFill>
-              </a:rPr>
-              <a:t>Entrega y validación</a:t>
-            </a:r>
-          </a:p>
-        </p:txBody>
-      </p:sp>
-      <p:sp>
-        <p:nvSpPr>
-          <p:cNvPr id="152" name="Texto 152"/>
-          <p:cNvSpPr txBox="1"/>
-          <p:nvPr/>
-        </p:nvSpPr>
-        <p:spPr>
-          <a:xfrm>
-            <a:off x="8441000" y="3900000"/>
-            <a:ext cx="800000" cy="300000"/>
-          </a:xfrm>
-          <a:prstGeom prst="rect">
-            <a:avLst/>
-          </a:prstGeom>
-          <a:noFill/>
-        </p:spPr>
-        <p:txBody>
-          <a:bodyPr wrap="square" anchor="t" lIns="45720" rIns="45720">
-            <a:noAutofit/>
-          </a:bodyPr>
-          <a:lstStyle/>
-          <a:p>
-            <a:pPr algn="ctr"/>
-            <a:r>
-              <a:rPr lang="es-ES" sz="1200" b="1" dirty="0">
-                <a:solidFill>
-                  <a:srgbClr val="990F3D"/>
-                </a:solidFill>
-              </a:rPr>
-              <a:t>G5</a:t>
-            </a:r>
-          </a:p>
-        </p:txBody>
-      </p:sp>
-      <p:sp>
-        <p:nvSpPr>
-          <p:cNvPr id="153" name="Caja 153"/>
-          <p:cNvSpPr/>
-          <p:nvPr/>
-        </p:nvSpPr>
-        <p:spPr>
-          <a:xfrm>
-            <a:off x="8901000" y="2350000"/>
-            <a:ext cx="1240000" cy="1500000"/>
-          </a:xfrm>
-          <a:prstGeom prst="roundRect">
-            <a:avLst>
-              <a:gd name="adj" fmla="val 6000"/>
-            </a:avLst>
-          </a:prstGeom>
-          <a:solidFill>
-            <a:srgbClr val="C9A78D"/>
-          </a:solidFill>
-          <a:ln>
-            <a:noFill/>
-          </a:ln>
-        </p:spPr>
-        <p:txBody>
-          <a:bodyPr wrap="square" anchor="ctr" lIns="45720" rIns="45720">
-            <a:noAutofit/>
-          </a:bodyPr>
-          <a:lstStyle/>
-          <a:p>
-            <a:pPr algn="ctr"/>
-            <a:r>
-              <a:rPr lang="es-ES" sz="2400" b="1" dirty="0">
-                <a:solidFill>
-                  <a:srgbClr val="564D47"/>
-                </a:solidFill>
-              </a:rPr>
-              <a:t>F6</a:t>
-            </a:r>
-          </a:p>
-          <a:p>
-            <a:pPr algn="ctr"/>
-            <a:r>
-              <a:rPr lang="es-ES" sz="1050" dirty="0">
-                <a:solidFill>
-                  <a:srgbClr val="564D47"/>
-                </a:solidFill>
-              </a:rPr>
-              <a:t>Operación y gobierno</a:t>
-            </a:r>
-          </a:p>
-        </p:txBody>
-      </p:sp>
-      <p:sp>
-        <p:nvSpPr>
-          <p:cNvPr id="154" name="Texto 154"/>
-          <p:cNvSpPr txBox="1"/>
-          <p:nvPr/>
-        </p:nvSpPr>
-        <p:spPr>
-          <a:xfrm>
-            <a:off x="9811000" y="3900000"/>
-            <a:ext cx="800000" cy="300000"/>
-          </a:xfrm>
-          <a:prstGeom prst="rect">
-            <a:avLst/>
-          </a:prstGeom>
-          <a:noFill/>
-        </p:spPr>
-        <p:txBody>
-          <a:bodyPr wrap="square" anchor="t" lIns="45720" rIns="45720">
-            <a:noAutofit/>
-          </a:bodyPr>
-          <a:lstStyle/>
-          <a:p>
-            <a:pPr algn="ctr"/>
-            <a:r>
-              <a:rPr lang="es-ES" sz="1200" b="1" dirty="0">
-                <a:solidFill>
-                  <a:srgbClr val="990F3D"/>
-                </a:solidFill>
-              </a:rPr>
-              <a:t>R6</a:t>
-            </a:r>
-          </a:p>
-        </p:txBody>
-      </p:sp>
-      <p:sp>
-        <p:nvSpPr>
-          <p:cNvPr id="155" name="Caja 155"/>
-          <p:cNvSpPr/>
-          <p:nvPr/>
-        </p:nvSpPr>
-        <p:spPr>
-          <a:xfrm>
-            <a:off x="10271000" y="2350000"/>
-            <a:ext cx="1240000" cy="1500000"/>
-          </a:xfrm>
-          <a:prstGeom prst="roundRect">
-            <a:avLst>
-              <a:gd name="adj" fmla="val 6000"/>
-            </a:avLst>
-          </a:prstGeom>
-          <a:solidFill>
-            <a:srgbClr val="C9A78D"/>
-          </a:solidFill>
-          <a:ln>
-            <a:noFill/>
-          </a:ln>
-        </p:spPr>
-        <p:txBody>
-          <a:bodyPr wrap="square" anchor="ctr" lIns="45720" rIns="45720">
-            <a:noAutofit/>
-          </a:bodyPr>
-          <a:lstStyle/>
-          <a:p>
-            <a:pPr algn="ctr"/>
-            <a:r>
-              <a:rPr lang="es-ES" sz="2400" b="1" dirty="0">
-                <a:solidFill>
-                  <a:srgbClr val="564D47"/>
-                </a:solidFill>
-              </a:rPr>
-              <a:t>F7</a:t>
-            </a:r>
-          </a:p>
-          <a:p>
-            <a:pPr algn="ctr"/>
-            <a:r>
-              <a:rPr lang="es-ES" sz="1050" dirty="0">
-                <a:solidFill>
-                  <a:srgbClr val="564D47"/>
-                </a:solidFill>
-              </a:rPr>
-              <a:t>Evolución o retirada</a:t>
-            </a:r>
-          </a:p>
-        </p:txBody>
-      </p:sp>
-      <p:sp>
-        <p:nvSpPr>
-          <p:cNvPr id="156" name="Texto 156"/>
-          <p:cNvSpPr txBox="1"/>
-          <p:nvPr/>
-        </p:nvSpPr>
-        <p:spPr>
-          <a:xfrm>
-            <a:off x="11181000" y="3900000"/>
-            <a:ext cx="800000" cy="300000"/>
-          </a:xfrm>
-          <a:prstGeom prst="rect">
-            <a:avLst/>
-          </a:prstGeom>
-          <a:noFill/>
-        </p:spPr>
-        <p:txBody>
-          <a:bodyPr wrap="square" anchor="t" lIns="45720" rIns="45720">
-            <a:noAutofit/>
-          </a:bodyPr>
-          <a:lstStyle/>
-          <a:p>
-            <a:pPr algn="ctr"/>
-            <a:r>
-              <a:rPr lang="es-ES" sz="1200" b="1" dirty="0">
-                <a:solidFill>
-                  <a:srgbClr val="990F3D"/>
-                </a:solidFill>
-              </a:rPr>
-              <a:t>G7</a:t>
-            </a:r>
-          </a:p>
-        </p:txBody>
-      </p:sp>
-      <p:sp>
-        <p:nvSpPr>
-          <p:cNvPr id="157" name="Texto 157"/>
-          <p:cNvSpPr txBox="1"/>
-          <p:nvPr/>
-        </p:nvSpPr>
-        <p:spPr>
-          <a:xfrm>
-            <a:off x="609600" y="4430000"/>
-            <a:ext cx="10972800" cy="600000"/>
-          </a:xfrm>
-          <a:prstGeom prst="rect">
-            <a:avLst/>
-          </a:prstGeom>
-          <a:noFill/>
-        </p:spPr>
-        <p:txBody>
-          <a:bodyPr wrap="square" anchor="t" lIns="45720" rIns="45720">
-            <a:noAutofit/>
-          </a:bodyPr>
-          <a:lstStyle/>
-          <a:p>
-            <a:pPr algn="ctr"/>
-            <a:r>
-              <a:rPr lang="es-ES" sz="2200" b="1" dirty="0">
-                <a:solidFill>
-                  <a:srgbClr val="990F3D"/>
-                </a:solidFill>
-              </a:rPr>
-              <a:t>PARADA EN G3 · sale del embudo como «Descartado», con su motivo</a:t>
+              <a:t>PARADA EN G3 · SE EVITÓ CONSTRUIR Y OPERAR UN SISTEMA INVIABLE</a:t>
             </a:r>
           </a:p>
         </p:txBody>
@@ -2832,21 +2277,21 @@
                   <a:srgbClr val="990F3D"/>
                 </a:solidFill>
               </a:rPr>
-              <a:t>Ejemplo 2 · Cuando una iniciativa llega a producción</a:t>
-            </a:r>
-          </a:p>
-        </p:txBody>
-      </p:sp>
-      <p:sp>
-        <p:nvSpPr>
-          <p:cNvPr id="162" name="Texto 162"/>
+              <a:t>La iniciativa 1, sobre el ciclo de vida</a:t>
+            </a:r>
+          </a:p>
+        </p:txBody>
+      </p:sp>
+      <p:sp>
+        <p:nvSpPr>
+          <p:cNvPr id="168" name="Texto 168"/>
           <p:cNvSpPr txBox="1"/>
           <p:nvPr/>
         </p:nvSpPr>
         <p:spPr>
           <a:xfrm>
             <a:off x="609600" y="1330000"/>
-            <a:ext cx="10972800" cy="500000"/>
+            <a:ext cx="10972800" cy="450000"/>
           </a:xfrm>
           <a:prstGeom prst="rect">
             <a:avLst/>
@@ -2861,169 +2306,26 @@
           <a:p>
             <a:pPr algn="l"/>
             <a:r>
-              <a:rPr lang="es-ES" sz="1700" b="1" dirty="0">
-                <a:solidFill>
-                  <a:srgbClr val="2F2B28"/>
-                </a:solidFill>
-              </a:rPr>
-              <a:t>Asistente de respuesta a incidencias de TI de primer nivel</a:t>
-            </a:r>
-          </a:p>
-        </p:txBody>
-      </p:sp>
-      <p:sp>
-        <p:nvSpPr>
-          <p:cNvPr id="163" name="Texto 163"/>
-          <p:cNvSpPr txBox="1"/>
-          <p:nvPr/>
-        </p:nvSpPr>
-        <p:spPr>
-          <a:xfrm>
-            <a:off x="609600" y="1900000"/>
-            <a:ext cx="10972800" cy="3550000"/>
-          </a:xfrm>
-          <a:prstGeom prst="rect">
-            <a:avLst/>
-          </a:prstGeom>
-          <a:noFill/>
-        </p:spPr>
-        <p:txBody>
-          <a:bodyPr wrap="square" anchor="t" lIns="45720" rIns="45720">
-            <a:noAutofit/>
-          </a:bodyPr>
-          <a:lstStyle/>
-          <a:p>
-            <a:pPr marL="285750" indent="-285750">
-              <a:spcAft>
-                <a:spcPts val="400"/>
-              </a:spcAft>
-              <a:buClr>
-                <a:srgbClr val="990F3D"/>
-              </a:buClr>
-              <a:buFont typeface="Arial"/>
-              <a:buChar char="•"/>
-            </a:pPr>
-            <a:r>
               <a:rPr lang="es-ES" sz="1500" dirty="0">
                 <a:solidFill>
-                  <a:srgbClr val="2F2B28"/>
-                </a:solidFill>
-              </a:rPr>
-              <a:t>Fases 0 y 1: TI la patrocina; frente a la alternativa sin IA (más plantilla), se propone la esfera de operaciones con ambición Optimizar (P07).</a:t>
-            </a:r>
-          </a:p>
-          <a:p>
-            <a:pPr marL="285750" indent="-285750">
-              <a:spcAft>
-                <a:spcPts val="400"/>
-              </a:spcAft>
-              <a:buClr>
-                <a:srgbClr val="990F3D"/>
-              </a:buClr>
-              <a:buFont typeface="Arial"/>
-              <a:buChar char="•"/>
-            </a:pPr>
-            <a:r>
-              <a:rPr lang="es-ES" sz="1500" dirty="0">
-                <a:solidFill>
-                  <a:srgbClr val="2F2B28"/>
-                </a:solidFill>
-              </a:rPr>
-              <a:t>Fase 2: hipótesis de un 30 % menos de tiempo de resolución en incidencias sencillas; el piloto controlado da un 32 %.</a:t>
-            </a:r>
-          </a:p>
-          <a:p>
-            <a:pPr marL="285750" indent="-285750">
-              <a:spcAft>
-                <a:spcPts val="400"/>
-              </a:spcAft>
-              <a:buClr>
-                <a:srgbClr val="990F3D"/>
-              </a:buClr>
-              <a:buFont typeface="Arial"/>
-              <a:buChar char="•"/>
-            </a:pPr>
-            <a:r>
-              <a:rPr lang="es-ES" sz="1500" dirty="0">
-                <a:solidFill>
-                  <a:srgbClr val="2F2B28"/>
-                </a:solidFill>
-              </a:rPr>
-              <a:t>Fase 3: sin sesgo relevante, riesgo residual medio aceptado por su órgano (P12), proveedor evaluado (P14). G3, Continuar.</a:t>
-            </a:r>
-          </a:p>
-          <a:p>
-            <a:pPr marL="285750" indent="-285750">
-              <a:spcAft>
-                <a:spcPts val="400"/>
-              </a:spcAft>
-              <a:buClr>
-                <a:srgbClr val="990F3D"/>
-              </a:buClr>
-              <a:buFont typeface="Arial"/>
-              <a:buChar char="•"/>
-            </a:pPr>
-            <a:r>
-              <a:rPr lang="es-ES" sz="1500" dirty="0">
-                <a:solidFill>
-                  <a:srgbClr val="2F2B28"/>
-                </a:solidFill>
-              </a:rPr>
-              <a:t>Fases 4 y 5: supervisión humana obligatoria por encima de cierta gravedad (P17), reversión probada (P19) y firma de puesta en producción (P23).</a:t>
-            </a:r>
-          </a:p>
-          <a:p>
-            <a:pPr marL="285750" indent="-285750">
-              <a:spcAft>
-                <a:spcPts val="400"/>
-              </a:spcAft>
-              <a:buClr>
-                <a:srgbClr val="990F3D"/>
-              </a:buClr>
-              <a:buFont typeface="Arial"/>
-              <a:buChar char="•"/>
-            </a:pPr>
-            <a:r>
-              <a:rPr lang="es-ES" sz="1500" dirty="0">
-                <a:solidFill>
-                  <a:srgbClr val="2F2B28"/>
-                </a:solidFill>
-              </a:rPr>
-              <a:t>Fase 6: catorce meses en uso. Control de gestión valida 1,1 M€ al año (P28); la capacidad liberada se reasignó a incidencias complejas.</a:t>
-            </a:r>
-          </a:p>
-          <a:p>
-            <a:pPr marL="285750" indent="-285750">
-              <a:spcAft>
-                <a:spcPts val="400"/>
-              </a:spcAft>
-              <a:buClr>
-                <a:srgbClr val="990F3D"/>
-              </a:buClr>
-              <a:buFont typeface="Arial"/>
-              <a:buChar char="•"/>
-            </a:pPr>
-            <a:r>
-              <a:rPr lang="es-ES" sz="1500" dirty="0">
-                <a:solidFill>
-                  <a:srgbClr val="2F2B28"/>
-                </a:solidFill>
-              </a:rPr>
-              <a:t>En el embudo está en «En uso»; en el panel suma al neto anual porque su valor está validado, no declarado.</a:t>
-            </a:r>
-          </a:p>
-        </p:txBody>
-      </p:sp>
-      <p:sp>
-        <p:nvSpPr>
-          <p:cNvPr id="164" name="Caja 164"/>
+                  <a:srgbClr val="564D47"/>
+                </a:solidFill>
+              </a:rPr>
+              <a:t>Llegó a la fase 3 y no superó la puerta G3</a:t>
+            </a:r>
+          </a:p>
+        </p:txBody>
+      </p:sp>
+      <p:sp>
+        <p:nvSpPr>
+          <p:cNvPr id="148" name="Caja 148"/>
           <p:cNvSpPr/>
           <p:nvPr/>
         </p:nvSpPr>
         <p:spPr>
           <a:xfrm>
-            <a:off x="609600" y="5600000"/>
-            <a:ext cx="10972800" cy="900000"/>
+            <a:off x="681000" y="2350000"/>
+            <a:ext cx="1240000" cy="1500000"/>
           </a:xfrm>
           <a:prstGeom prst="roundRect">
             <a:avLst>
@@ -3031,7 +2333,7 @@
             </a:avLst>
           </a:prstGeom>
           <a:solidFill>
-            <a:srgbClr val="0D7680"/>
+            <a:srgbClr val="990F3D"/>
           </a:solidFill>
           <a:ln>
             <a:noFill/>
@@ -3045,12 +2347,693 @@
           <a:p>
             <a:pPr algn="ctr"/>
             <a:r>
-              <a:rPr lang="es-ES" sz="2100" b="1" dirty="0">
+              <a:rPr lang="es-ES" sz="2400" b="1" dirty="0">
                 <a:solidFill>
                   <a:srgbClr val="FFFFFF"/>
                 </a:solidFill>
               </a:rPr>
-              <a:t>EN PRODUCCIÓN · 1,1 M€ DE RETORNO ANUAL VALIDADO · R6 TRIMESTRAL</a:t>
+              <a:t>F0</a:t>
+            </a:r>
+          </a:p>
+          <a:p>
+            <a:pPr algn="ctr"/>
+            <a:r>
+              <a:rPr lang="es-ES" sz="1050" dirty="0">
+                <a:solidFill>
+                  <a:srgbClr val="FFFFFF"/>
+                </a:solidFill>
+              </a:rPr>
+              <a:t>Contexto y restricciones</a:t>
+            </a:r>
+          </a:p>
+        </p:txBody>
+      </p:sp>
+      <p:sp>
+        <p:nvSpPr>
+          <p:cNvPr id="149" name="Texto 149"/>
+          <p:cNvSpPr txBox="1"/>
+          <p:nvPr/>
+        </p:nvSpPr>
+        <p:spPr>
+          <a:xfrm>
+            <a:off x="1591000" y="3900000"/>
+            <a:ext cx="800000" cy="300000"/>
+          </a:xfrm>
+          <a:prstGeom prst="rect">
+            <a:avLst/>
+          </a:prstGeom>
+          <a:noFill/>
+        </p:spPr>
+        <p:txBody>
+          <a:bodyPr wrap="square" anchor="t" lIns="45720" rIns="45720">
+            <a:noAutofit/>
+          </a:bodyPr>
+          <a:lstStyle/>
+          <a:p>
+            <a:pPr algn="ctr"/>
+            <a:r>
+              <a:rPr lang="es-ES" sz="1200" b="1" dirty="0">
+                <a:solidFill>
+                  <a:srgbClr val="990F3D"/>
+                </a:solidFill>
+              </a:rPr>
+              <a:t>G0</a:t>
+            </a:r>
+          </a:p>
+        </p:txBody>
+      </p:sp>
+      <p:sp>
+        <p:nvSpPr>
+          <p:cNvPr id="150" name="Caja 150"/>
+          <p:cNvSpPr/>
+          <p:nvPr/>
+        </p:nvSpPr>
+        <p:spPr>
+          <a:xfrm>
+            <a:off x="2051000" y="2350000"/>
+            <a:ext cx="1240000" cy="1500000"/>
+          </a:xfrm>
+          <a:prstGeom prst="roundRect">
+            <a:avLst>
+              <a:gd name="adj" fmla="val 6000"/>
+            </a:avLst>
+          </a:prstGeom>
+          <a:solidFill>
+            <a:srgbClr val="990F3D"/>
+          </a:solidFill>
+          <a:ln>
+            <a:noFill/>
+          </a:ln>
+        </p:spPr>
+        <p:txBody>
+          <a:bodyPr wrap="square" anchor="ctr" lIns="45720" rIns="45720">
+            <a:noAutofit/>
+          </a:bodyPr>
+          <a:lstStyle/>
+          <a:p>
+            <a:pPr algn="ctr"/>
+            <a:r>
+              <a:rPr lang="es-ES" sz="2400" b="1" dirty="0">
+                <a:solidFill>
+                  <a:srgbClr val="FFFFFF"/>
+                </a:solidFill>
+              </a:rPr>
+              <a:t>F1</a:t>
+            </a:r>
+          </a:p>
+          <a:p>
+            <a:pPr algn="ctr"/>
+            <a:r>
+              <a:rPr lang="es-ES" sz="1050" dirty="0">
+                <a:solidFill>
+                  <a:srgbClr val="FFFFFF"/>
+                </a:solidFill>
+              </a:rPr>
+              <a:t>Descubrimiento de oportunidades</a:t>
+            </a:r>
+          </a:p>
+        </p:txBody>
+      </p:sp>
+      <p:sp>
+        <p:nvSpPr>
+          <p:cNvPr id="151" name="Texto 151"/>
+          <p:cNvSpPr txBox="1"/>
+          <p:nvPr/>
+        </p:nvSpPr>
+        <p:spPr>
+          <a:xfrm>
+            <a:off x="2961000" y="3900000"/>
+            <a:ext cx="800000" cy="300000"/>
+          </a:xfrm>
+          <a:prstGeom prst="rect">
+            <a:avLst/>
+          </a:prstGeom>
+          <a:noFill/>
+        </p:spPr>
+        <p:txBody>
+          <a:bodyPr wrap="square" anchor="t" lIns="45720" rIns="45720">
+            <a:noAutofit/>
+          </a:bodyPr>
+          <a:lstStyle/>
+          <a:p>
+            <a:pPr algn="ctr"/>
+            <a:r>
+              <a:rPr lang="es-ES" sz="1200" b="1" dirty="0">
+                <a:solidFill>
+                  <a:srgbClr val="990F3D"/>
+                </a:solidFill>
+              </a:rPr>
+              <a:t>G1</a:t>
+            </a:r>
+          </a:p>
+        </p:txBody>
+      </p:sp>
+      <p:sp>
+        <p:nvSpPr>
+          <p:cNvPr id="152" name="Caja 152"/>
+          <p:cNvSpPr/>
+          <p:nvPr/>
+        </p:nvSpPr>
+        <p:spPr>
+          <a:xfrm>
+            <a:off x="3421000" y="2350000"/>
+            <a:ext cx="1240000" cy="1500000"/>
+          </a:xfrm>
+          <a:prstGeom prst="roundRect">
+            <a:avLst>
+              <a:gd name="adj" fmla="val 6000"/>
+            </a:avLst>
+          </a:prstGeom>
+          <a:solidFill>
+            <a:srgbClr val="990F3D"/>
+          </a:solidFill>
+          <a:ln>
+            <a:noFill/>
+          </a:ln>
+        </p:spPr>
+        <p:txBody>
+          <a:bodyPr wrap="square" anchor="ctr" lIns="45720" rIns="45720">
+            <a:noAutofit/>
+          </a:bodyPr>
+          <a:lstStyle/>
+          <a:p>
+            <a:pPr algn="ctr"/>
+            <a:r>
+              <a:rPr lang="es-ES" sz="2400" b="1" dirty="0">
+                <a:solidFill>
+                  <a:srgbClr val="FFFFFF"/>
+                </a:solidFill>
+              </a:rPr>
+              <a:t>F2</a:t>
+            </a:r>
+          </a:p>
+          <a:p>
+            <a:pPr algn="ctr"/>
+            <a:r>
+              <a:rPr lang="es-ES" sz="1050" dirty="0">
+                <a:solidFill>
+                  <a:srgbClr val="FFFFFF"/>
+                </a:solidFill>
+              </a:rPr>
+              <a:t>Hipótesis de valor</a:t>
+            </a:r>
+          </a:p>
+        </p:txBody>
+      </p:sp>
+      <p:sp>
+        <p:nvSpPr>
+          <p:cNvPr id="153" name="Texto 153"/>
+          <p:cNvSpPr txBox="1"/>
+          <p:nvPr/>
+        </p:nvSpPr>
+        <p:spPr>
+          <a:xfrm>
+            <a:off x="4331000" y="3900000"/>
+            <a:ext cx="800000" cy="300000"/>
+          </a:xfrm>
+          <a:prstGeom prst="rect">
+            <a:avLst/>
+          </a:prstGeom>
+          <a:noFill/>
+        </p:spPr>
+        <p:txBody>
+          <a:bodyPr wrap="square" anchor="t" lIns="45720" rIns="45720">
+            <a:noAutofit/>
+          </a:bodyPr>
+          <a:lstStyle/>
+          <a:p>
+            <a:pPr algn="ctr"/>
+            <a:r>
+              <a:rPr lang="es-ES" sz="1200" b="1" dirty="0">
+                <a:solidFill>
+                  <a:srgbClr val="990F3D"/>
+                </a:solidFill>
+              </a:rPr>
+              <a:t>G2</a:t>
+            </a:r>
+          </a:p>
+        </p:txBody>
+      </p:sp>
+      <p:sp>
+        <p:nvSpPr>
+          <p:cNvPr id="154" name="Caja 154"/>
+          <p:cNvSpPr/>
+          <p:nvPr/>
+        </p:nvSpPr>
+        <p:spPr>
+          <a:xfrm>
+            <a:off x="4791000" y="2350000"/>
+            <a:ext cx="1240000" cy="1500000"/>
+          </a:xfrm>
+          <a:prstGeom prst="roundRect">
+            <a:avLst>
+              <a:gd name="adj" fmla="val 6000"/>
+            </a:avLst>
+          </a:prstGeom>
+          <a:solidFill>
+            <a:srgbClr val="990F3D"/>
+          </a:solidFill>
+          <a:ln>
+            <a:noFill/>
+          </a:ln>
+        </p:spPr>
+        <p:txBody>
+          <a:bodyPr wrap="square" anchor="ctr" lIns="45720" rIns="45720">
+            <a:noAutofit/>
+          </a:bodyPr>
+          <a:lstStyle/>
+          <a:p>
+            <a:pPr algn="ctr"/>
+            <a:r>
+              <a:rPr lang="es-ES" sz="2400" b="1" dirty="0">
+                <a:solidFill>
+                  <a:srgbClr val="FFFFFF"/>
+                </a:solidFill>
+              </a:rPr>
+              <a:t>F3</a:t>
+            </a:r>
+          </a:p>
+          <a:p>
+            <a:pPr algn="ctr"/>
+            <a:r>
+              <a:rPr lang="es-ES" sz="1050" dirty="0">
+                <a:solidFill>
+                  <a:srgbClr val="FFFFFF"/>
+                </a:solidFill>
+              </a:rPr>
+              <a:t>Viabilidad y riesgo</a:t>
+            </a:r>
+          </a:p>
+        </p:txBody>
+      </p:sp>
+      <p:sp>
+        <p:nvSpPr>
+          <p:cNvPr id="155" name="Texto 155"/>
+          <p:cNvSpPr txBox="1"/>
+          <p:nvPr/>
+        </p:nvSpPr>
+        <p:spPr>
+          <a:xfrm>
+            <a:off x="5701000" y="3900000"/>
+            <a:ext cx="800000" cy="300000"/>
+          </a:xfrm>
+          <a:prstGeom prst="rect">
+            <a:avLst/>
+          </a:prstGeom>
+          <a:noFill/>
+        </p:spPr>
+        <p:txBody>
+          <a:bodyPr wrap="square" anchor="t" lIns="45720" rIns="45720">
+            <a:noAutofit/>
+          </a:bodyPr>
+          <a:lstStyle/>
+          <a:p>
+            <a:pPr algn="ctr"/>
+            <a:r>
+              <a:rPr lang="es-ES" sz="1200" b="1" dirty="0">
+                <a:solidFill>
+                  <a:srgbClr val="990F3D"/>
+                </a:solidFill>
+              </a:rPr>
+              <a:t>G3</a:t>
+            </a:r>
+          </a:p>
+        </p:txBody>
+      </p:sp>
+      <p:sp>
+        <p:nvSpPr>
+          <p:cNvPr id="156" name="Caja 156"/>
+          <p:cNvSpPr/>
+          <p:nvPr/>
+        </p:nvSpPr>
+        <p:spPr>
+          <a:xfrm>
+            <a:off x="6161000" y="2350000"/>
+            <a:ext cx="1240000" cy="1500000"/>
+          </a:xfrm>
+          <a:prstGeom prst="roundRect">
+            <a:avLst>
+              <a:gd name="adj" fmla="val 6000"/>
+            </a:avLst>
+          </a:prstGeom>
+          <a:solidFill>
+            <a:srgbClr val="C9A78D"/>
+          </a:solidFill>
+          <a:ln>
+            <a:noFill/>
+          </a:ln>
+        </p:spPr>
+        <p:txBody>
+          <a:bodyPr wrap="square" anchor="ctr" lIns="45720" rIns="45720">
+            <a:noAutofit/>
+          </a:bodyPr>
+          <a:lstStyle/>
+          <a:p>
+            <a:pPr algn="ctr"/>
+            <a:r>
+              <a:rPr lang="es-ES" sz="2400" b="1" dirty="0">
+                <a:solidFill>
+                  <a:srgbClr val="564D47"/>
+                </a:solidFill>
+              </a:rPr>
+              <a:t>F4</a:t>
+            </a:r>
+          </a:p>
+          <a:p>
+            <a:pPr algn="ctr"/>
+            <a:r>
+              <a:rPr lang="es-ES" sz="1050" dirty="0">
+                <a:solidFill>
+                  <a:srgbClr val="564D47"/>
+                </a:solidFill>
+              </a:rPr>
+              <a:t>Diseño de la solución</a:t>
+            </a:r>
+          </a:p>
+        </p:txBody>
+      </p:sp>
+      <p:sp>
+        <p:nvSpPr>
+          <p:cNvPr id="157" name="Texto 157"/>
+          <p:cNvSpPr txBox="1"/>
+          <p:nvPr/>
+        </p:nvSpPr>
+        <p:spPr>
+          <a:xfrm>
+            <a:off x="7071000" y="3900000"/>
+            <a:ext cx="800000" cy="300000"/>
+          </a:xfrm>
+          <a:prstGeom prst="rect">
+            <a:avLst/>
+          </a:prstGeom>
+          <a:noFill/>
+        </p:spPr>
+        <p:txBody>
+          <a:bodyPr wrap="square" anchor="t" lIns="45720" rIns="45720">
+            <a:noAutofit/>
+          </a:bodyPr>
+          <a:lstStyle/>
+          <a:p>
+            <a:pPr algn="ctr"/>
+            <a:r>
+              <a:rPr lang="es-ES" sz="1200" b="1" dirty="0">
+                <a:solidFill>
+                  <a:srgbClr val="990F3D"/>
+                </a:solidFill>
+              </a:rPr>
+              <a:t>G4</a:t>
+            </a:r>
+          </a:p>
+        </p:txBody>
+      </p:sp>
+      <p:sp>
+        <p:nvSpPr>
+          <p:cNvPr id="158" name="Caja 158"/>
+          <p:cNvSpPr/>
+          <p:nvPr/>
+        </p:nvSpPr>
+        <p:spPr>
+          <a:xfrm>
+            <a:off x="7531000" y="2350000"/>
+            <a:ext cx="1240000" cy="1500000"/>
+          </a:xfrm>
+          <a:prstGeom prst="roundRect">
+            <a:avLst>
+              <a:gd name="adj" fmla="val 6000"/>
+            </a:avLst>
+          </a:prstGeom>
+          <a:solidFill>
+            <a:srgbClr val="C9A78D"/>
+          </a:solidFill>
+          <a:ln>
+            <a:noFill/>
+          </a:ln>
+        </p:spPr>
+        <p:txBody>
+          <a:bodyPr wrap="square" anchor="ctr" lIns="45720" rIns="45720">
+            <a:noAutofit/>
+          </a:bodyPr>
+          <a:lstStyle/>
+          <a:p>
+            <a:pPr algn="ctr"/>
+            <a:r>
+              <a:rPr lang="es-ES" sz="2400" b="1" dirty="0">
+                <a:solidFill>
+                  <a:srgbClr val="564D47"/>
+                </a:solidFill>
+              </a:rPr>
+              <a:t>F5</a:t>
+            </a:r>
+          </a:p>
+          <a:p>
+            <a:pPr algn="ctr"/>
+            <a:r>
+              <a:rPr lang="es-ES" sz="1050" dirty="0">
+                <a:solidFill>
+                  <a:srgbClr val="564D47"/>
+                </a:solidFill>
+              </a:rPr>
+              <a:t>Entrega y validación</a:t>
+            </a:r>
+          </a:p>
+        </p:txBody>
+      </p:sp>
+      <p:sp>
+        <p:nvSpPr>
+          <p:cNvPr id="159" name="Texto 159"/>
+          <p:cNvSpPr txBox="1"/>
+          <p:nvPr/>
+        </p:nvSpPr>
+        <p:spPr>
+          <a:xfrm>
+            <a:off x="8441000" y="3900000"/>
+            <a:ext cx="800000" cy="300000"/>
+          </a:xfrm>
+          <a:prstGeom prst="rect">
+            <a:avLst/>
+          </a:prstGeom>
+          <a:noFill/>
+        </p:spPr>
+        <p:txBody>
+          <a:bodyPr wrap="square" anchor="t" lIns="45720" rIns="45720">
+            <a:noAutofit/>
+          </a:bodyPr>
+          <a:lstStyle/>
+          <a:p>
+            <a:pPr algn="ctr"/>
+            <a:r>
+              <a:rPr lang="es-ES" sz="1200" b="1" dirty="0">
+                <a:solidFill>
+                  <a:srgbClr val="990F3D"/>
+                </a:solidFill>
+              </a:rPr>
+              <a:t>G5</a:t>
+            </a:r>
+          </a:p>
+        </p:txBody>
+      </p:sp>
+      <p:sp>
+        <p:nvSpPr>
+          <p:cNvPr id="160" name="Caja 160"/>
+          <p:cNvSpPr/>
+          <p:nvPr/>
+        </p:nvSpPr>
+        <p:spPr>
+          <a:xfrm>
+            <a:off x="8901000" y="2350000"/>
+            <a:ext cx="1240000" cy="1500000"/>
+          </a:xfrm>
+          <a:prstGeom prst="roundRect">
+            <a:avLst>
+              <a:gd name="adj" fmla="val 6000"/>
+            </a:avLst>
+          </a:prstGeom>
+          <a:solidFill>
+            <a:srgbClr val="C9A78D"/>
+          </a:solidFill>
+          <a:ln>
+            <a:noFill/>
+          </a:ln>
+        </p:spPr>
+        <p:txBody>
+          <a:bodyPr wrap="square" anchor="ctr" lIns="45720" rIns="45720">
+            <a:noAutofit/>
+          </a:bodyPr>
+          <a:lstStyle/>
+          <a:p>
+            <a:pPr algn="ctr"/>
+            <a:r>
+              <a:rPr lang="es-ES" sz="2400" b="1" dirty="0">
+                <a:solidFill>
+                  <a:srgbClr val="564D47"/>
+                </a:solidFill>
+              </a:rPr>
+              <a:t>F6</a:t>
+            </a:r>
+          </a:p>
+          <a:p>
+            <a:pPr algn="ctr"/>
+            <a:r>
+              <a:rPr lang="es-ES" sz="1050" dirty="0">
+                <a:solidFill>
+                  <a:srgbClr val="564D47"/>
+                </a:solidFill>
+              </a:rPr>
+              <a:t>Operación y gobierno</a:t>
+            </a:r>
+          </a:p>
+        </p:txBody>
+      </p:sp>
+      <p:sp>
+        <p:nvSpPr>
+          <p:cNvPr id="161" name="Texto 161"/>
+          <p:cNvSpPr txBox="1"/>
+          <p:nvPr/>
+        </p:nvSpPr>
+        <p:spPr>
+          <a:xfrm>
+            <a:off x="9811000" y="3900000"/>
+            <a:ext cx="800000" cy="300000"/>
+          </a:xfrm>
+          <a:prstGeom prst="rect">
+            <a:avLst/>
+          </a:prstGeom>
+          <a:noFill/>
+        </p:spPr>
+        <p:txBody>
+          <a:bodyPr wrap="square" anchor="t" lIns="45720" rIns="45720">
+            <a:noAutofit/>
+          </a:bodyPr>
+          <a:lstStyle/>
+          <a:p>
+            <a:pPr algn="ctr"/>
+            <a:r>
+              <a:rPr lang="es-ES" sz="1200" b="1" dirty="0">
+                <a:solidFill>
+                  <a:srgbClr val="990F3D"/>
+                </a:solidFill>
+              </a:rPr>
+              <a:t>R6</a:t>
+            </a:r>
+          </a:p>
+        </p:txBody>
+      </p:sp>
+      <p:sp>
+        <p:nvSpPr>
+          <p:cNvPr id="162" name="Caja 162"/>
+          <p:cNvSpPr/>
+          <p:nvPr/>
+        </p:nvSpPr>
+        <p:spPr>
+          <a:xfrm>
+            <a:off x="10271000" y="2350000"/>
+            <a:ext cx="1240000" cy="1500000"/>
+          </a:xfrm>
+          <a:prstGeom prst="roundRect">
+            <a:avLst>
+              <a:gd name="adj" fmla="val 6000"/>
+            </a:avLst>
+          </a:prstGeom>
+          <a:solidFill>
+            <a:srgbClr val="C9A78D"/>
+          </a:solidFill>
+          <a:ln>
+            <a:noFill/>
+          </a:ln>
+        </p:spPr>
+        <p:txBody>
+          <a:bodyPr wrap="square" anchor="ctr" lIns="45720" rIns="45720">
+            <a:noAutofit/>
+          </a:bodyPr>
+          <a:lstStyle/>
+          <a:p>
+            <a:pPr algn="ctr"/>
+            <a:r>
+              <a:rPr lang="es-ES" sz="2400" b="1" dirty="0">
+                <a:solidFill>
+                  <a:srgbClr val="564D47"/>
+                </a:solidFill>
+              </a:rPr>
+              <a:t>F7</a:t>
+            </a:r>
+          </a:p>
+          <a:p>
+            <a:pPr algn="ctr"/>
+            <a:r>
+              <a:rPr lang="es-ES" sz="1050" dirty="0">
+                <a:solidFill>
+                  <a:srgbClr val="564D47"/>
+                </a:solidFill>
+              </a:rPr>
+              <a:t>Evolución o retirada</a:t>
+            </a:r>
+          </a:p>
+        </p:txBody>
+      </p:sp>
+      <p:sp>
+        <p:nvSpPr>
+          <p:cNvPr id="163" name="Texto 163"/>
+          <p:cNvSpPr txBox="1"/>
+          <p:nvPr/>
+        </p:nvSpPr>
+        <p:spPr>
+          <a:xfrm>
+            <a:off x="11181000" y="3900000"/>
+            <a:ext cx="800000" cy="300000"/>
+          </a:xfrm>
+          <a:prstGeom prst="rect">
+            <a:avLst/>
+          </a:prstGeom>
+          <a:noFill/>
+        </p:spPr>
+        <p:txBody>
+          <a:bodyPr wrap="square" anchor="t" lIns="45720" rIns="45720">
+            <a:noAutofit/>
+          </a:bodyPr>
+          <a:lstStyle/>
+          <a:p>
+            <a:pPr algn="ctr"/>
+            <a:r>
+              <a:rPr lang="es-ES" sz="1200" b="1" dirty="0">
+                <a:solidFill>
+                  <a:srgbClr val="990F3D"/>
+                </a:solidFill>
+              </a:rPr>
+              <a:t>G7</a:t>
+            </a:r>
+          </a:p>
+        </p:txBody>
+      </p:sp>
+      <p:sp>
+        <p:nvSpPr>
+          <p:cNvPr id="164" name="Texto 164"/>
+          <p:cNvSpPr txBox="1"/>
+          <p:nvPr/>
+        </p:nvSpPr>
+        <p:spPr>
+          <a:xfrm>
+            <a:off x="609600" y="4430000"/>
+            <a:ext cx="10972800" cy="600000"/>
+          </a:xfrm>
+          <a:prstGeom prst="rect">
+            <a:avLst/>
+          </a:prstGeom>
+          <a:noFill/>
+        </p:spPr>
+        <p:txBody>
+          <a:bodyPr wrap="square" anchor="t" lIns="45720" rIns="45720">
+            <a:noAutofit/>
+          </a:bodyPr>
+          <a:lstStyle/>
+          <a:p>
+            <a:pPr algn="ctr"/>
+            <a:r>
+              <a:rPr lang="es-ES" sz="2200" b="1" dirty="0">
+                <a:solidFill>
+                  <a:srgbClr val="990F3D"/>
+                </a:solidFill>
+              </a:rPr>
+              <a:t>PARADA EN G3 · sale del embudo como «Descartado», con su motivo</a:t>
             </a:r>
           </a:p>
         </p:txBody>
@@ -3090,7 +3073,7 @@
       </p:grpSpPr>
       <p:sp>
         <p:nvSpPr>
-          <p:cNvPr id="185" name="Marca"/>
+          <p:cNvPr id="172" name="Marca"/>
           <p:cNvSpPr/>
           <p:nvPr/>
         </p:nvSpPr>
@@ -3114,7 +3097,7 @@
       </p:sp>
       <p:sp>
         <p:nvSpPr>
-          <p:cNvPr id="186" name="Texto 186"/>
+          <p:cNvPr id="173" name="Texto 173"/>
           <p:cNvSpPr txBox="1"/>
           <p:nvPr/>
         </p:nvSpPr>
@@ -3148,7 +3131,7 @@
       </p:sp>
       <p:sp>
         <p:nvSpPr>
-          <p:cNvPr id="187" name="Texto 187"/>
+          <p:cNvPr id="174" name="Texto 174"/>
           <p:cNvSpPr txBox="1"/>
           <p:nvPr/>
         </p:nvSpPr>
@@ -3175,21 +3158,21 @@
                   <a:srgbClr val="990F3D"/>
                 </a:solidFill>
               </a:rPr>
-              <a:t>La iniciativa 2, sobre el ciclo de vida</a:t>
-            </a:r>
-          </a:p>
-        </p:txBody>
-      </p:sp>
-      <p:sp>
-        <p:nvSpPr>
-          <p:cNvPr id="188" name="Texto 188"/>
+              <a:t>Ejemplo 2 · Cuando una iniciativa llega a producción</a:t>
+            </a:r>
+          </a:p>
+        </p:txBody>
+      </p:sp>
+      <p:sp>
+        <p:nvSpPr>
+          <p:cNvPr id="169" name="Texto 169"/>
           <p:cNvSpPr txBox="1"/>
           <p:nvPr/>
         </p:nvSpPr>
         <p:spPr>
           <a:xfrm>
             <a:off x="609600" y="1330000"/>
-            <a:ext cx="10972800" cy="450000"/>
+            <a:ext cx="10972800" cy="500000"/>
           </a:xfrm>
           <a:prstGeom prst="rect">
             <a:avLst/>
@@ -3204,26 +3187,169 @@
           <a:p>
             <a:pPr algn="l"/>
             <a:r>
+              <a:rPr lang="es-ES" sz="1700" b="1" dirty="0">
+                <a:solidFill>
+                  <a:srgbClr val="2F2B28"/>
+                </a:solidFill>
+              </a:rPr>
+              <a:t>Asistente de respuesta a incidencias de TI de primer nivel</a:t>
+            </a:r>
+          </a:p>
+        </p:txBody>
+      </p:sp>
+      <p:sp>
+        <p:nvSpPr>
+          <p:cNvPr id="170" name="Texto 170"/>
+          <p:cNvSpPr txBox="1"/>
+          <p:nvPr/>
+        </p:nvSpPr>
+        <p:spPr>
+          <a:xfrm>
+            <a:off x="609600" y="1900000"/>
+            <a:ext cx="10972800" cy="3550000"/>
+          </a:xfrm>
+          <a:prstGeom prst="rect">
+            <a:avLst/>
+          </a:prstGeom>
+          <a:noFill/>
+        </p:spPr>
+        <p:txBody>
+          <a:bodyPr wrap="square" anchor="t" lIns="45720" rIns="45720">
+            <a:noAutofit/>
+          </a:bodyPr>
+          <a:lstStyle/>
+          <a:p>
+            <a:pPr marL="285750" indent="-285750">
+              <a:spcAft>
+                <a:spcPts val="400"/>
+              </a:spcAft>
+              <a:buClr>
+                <a:srgbClr val="990F3D"/>
+              </a:buClr>
+              <a:buFont typeface="Arial"/>
+              <a:buChar char="•"/>
+            </a:pPr>
+            <a:r>
               <a:rPr lang="es-ES" sz="1500" dirty="0">
                 <a:solidFill>
-                  <a:srgbClr val="564D47"/>
-                </a:solidFill>
-              </a:rPr>
-              <a:t>Recorrió las fases 0 a 6 y sigue en uso; la fase 7 llegará con G7</a:t>
-            </a:r>
-          </a:p>
-        </p:txBody>
-      </p:sp>
-      <p:sp>
-        <p:nvSpPr>
-          <p:cNvPr id="168" name="Caja 168"/>
+                  <a:srgbClr val="2F2B28"/>
+                </a:solidFill>
+              </a:rPr>
+              <a:t>Fases 0 y 1: TI la patrocina; frente a la alternativa sin IA (más plantilla), se propone la esfera de operaciones con ambición Optimizar (P07).</a:t>
+            </a:r>
+          </a:p>
+          <a:p>
+            <a:pPr marL="285750" indent="-285750">
+              <a:spcAft>
+                <a:spcPts val="400"/>
+              </a:spcAft>
+              <a:buClr>
+                <a:srgbClr val="990F3D"/>
+              </a:buClr>
+              <a:buFont typeface="Arial"/>
+              <a:buChar char="•"/>
+            </a:pPr>
+            <a:r>
+              <a:rPr lang="es-ES" sz="1500" dirty="0">
+                <a:solidFill>
+                  <a:srgbClr val="2F2B28"/>
+                </a:solidFill>
+              </a:rPr>
+              <a:t>Fase 2: hipótesis de un 30 % menos de tiempo de resolución en incidencias sencillas; el piloto controlado da un 32 %.</a:t>
+            </a:r>
+          </a:p>
+          <a:p>
+            <a:pPr marL="285750" indent="-285750">
+              <a:spcAft>
+                <a:spcPts val="400"/>
+              </a:spcAft>
+              <a:buClr>
+                <a:srgbClr val="990F3D"/>
+              </a:buClr>
+              <a:buFont typeface="Arial"/>
+              <a:buChar char="•"/>
+            </a:pPr>
+            <a:r>
+              <a:rPr lang="es-ES" sz="1500" dirty="0">
+                <a:solidFill>
+                  <a:srgbClr val="2F2B28"/>
+                </a:solidFill>
+              </a:rPr>
+              <a:t>Fase 3: sin sesgo relevante, riesgo residual medio aceptado por su órgano (P12), proveedor evaluado (P14). G3, Continuar.</a:t>
+            </a:r>
+          </a:p>
+          <a:p>
+            <a:pPr marL="285750" indent="-285750">
+              <a:spcAft>
+                <a:spcPts val="400"/>
+              </a:spcAft>
+              <a:buClr>
+                <a:srgbClr val="990F3D"/>
+              </a:buClr>
+              <a:buFont typeface="Arial"/>
+              <a:buChar char="•"/>
+            </a:pPr>
+            <a:r>
+              <a:rPr lang="es-ES" sz="1500" dirty="0">
+                <a:solidFill>
+                  <a:srgbClr val="2F2B28"/>
+                </a:solidFill>
+              </a:rPr>
+              <a:t>Fases 4 y 5: supervisión humana obligatoria por encima de cierta gravedad (P17), reversión probada (P19) y firma de puesta en producción (P23).</a:t>
+            </a:r>
+          </a:p>
+          <a:p>
+            <a:pPr marL="285750" indent="-285750">
+              <a:spcAft>
+                <a:spcPts val="400"/>
+              </a:spcAft>
+              <a:buClr>
+                <a:srgbClr val="990F3D"/>
+              </a:buClr>
+              <a:buFont typeface="Arial"/>
+              <a:buChar char="•"/>
+            </a:pPr>
+            <a:r>
+              <a:rPr lang="es-ES" sz="1500" dirty="0">
+                <a:solidFill>
+                  <a:srgbClr val="2F2B28"/>
+                </a:solidFill>
+              </a:rPr>
+              <a:t>Fase 6: catorce meses en uso. Control de gestión valida 1,1 M€ al año (P28); la capacidad liberada se reasignó a incidencias complejas.</a:t>
+            </a:r>
+          </a:p>
+          <a:p>
+            <a:pPr marL="285750" indent="-285750">
+              <a:spcAft>
+                <a:spcPts val="400"/>
+              </a:spcAft>
+              <a:buClr>
+                <a:srgbClr val="990F3D"/>
+              </a:buClr>
+              <a:buFont typeface="Arial"/>
+              <a:buChar char="•"/>
+            </a:pPr>
+            <a:r>
+              <a:rPr lang="es-ES" sz="1500" dirty="0">
+                <a:solidFill>
+                  <a:srgbClr val="2F2B28"/>
+                </a:solidFill>
+              </a:rPr>
+              <a:t>En el embudo está en «En uso»; en el panel suma al neto anual porque su valor está validado, no declarado.</a:t>
+            </a:r>
+          </a:p>
+        </p:txBody>
+      </p:sp>
+      <p:sp>
+        <p:nvSpPr>
+          <p:cNvPr id="171" name="Caja 171"/>
           <p:cNvSpPr/>
           <p:nvPr/>
         </p:nvSpPr>
         <p:spPr>
           <a:xfrm>
-            <a:off x="681000" y="2350000"/>
-            <a:ext cx="1240000" cy="1500000"/>
+            <a:off x="609600" y="5600000"/>
+            <a:ext cx="10972800" cy="900000"/>
           </a:xfrm>
           <a:prstGeom prst="roundRect">
             <a:avLst>
@@ -3245,693 +3371,12 @@
           <a:p>
             <a:pPr algn="ctr"/>
             <a:r>
-              <a:rPr lang="es-ES" sz="2400" b="1" dirty="0">
+              <a:rPr lang="es-ES" sz="2100" b="1" dirty="0">
                 <a:solidFill>
                   <a:srgbClr val="FFFFFF"/>
                 </a:solidFill>
               </a:rPr>
-              <a:t>F0</a:t>
-            </a:r>
-          </a:p>
-          <a:p>
-            <a:pPr algn="ctr"/>
-            <a:r>
-              <a:rPr lang="es-ES" sz="1050" dirty="0">
-                <a:solidFill>
-                  <a:srgbClr val="FFFFFF"/>
-                </a:solidFill>
-              </a:rPr>
-              <a:t>Contexto y restricciones</a:t>
-            </a:r>
-          </a:p>
-        </p:txBody>
-      </p:sp>
-      <p:sp>
-        <p:nvSpPr>
-          <p:cNvPr id="169" name="Texto 169"/>
-          <p:cNvSpPr txBox="1"/>
-          <p:nvPr/>
-        </p:nvSpPr>
-        <p:spPr>
-          <a:xfrm>
-            <a:off x="1591000" y="3900000"/>
-            <a:ext cx="800000" cy="300000"/>
-          </a:xfrm>
-          <a:prstGeom prst="rect">
-            <a:avLst/>
-          </a:prstGeom>
-          <a:noFill/>
-        </p:spPr>
-        <p:txBody>
-          <a:bodyPr wrap="square" anchor="t" lIns="45720" rIns="45720">
-            <a:noAutofit/>
-          </a:bodyPr>
-          <a:lstStyle/>
-          <a:p>
-            <a:pPr algn="ctr"/>
-            <a:r>
-              <a:rPr lang="es-ES" sz="1200" b="1" dirty="0">
-                <a:solidFill>
-                  <a:srgbClr val="990F3D"/>
-                </a:solidFill>
-              </a:rPr>
-              <a:t>G0</a:t>
-            </a:r>
-          </a:p>
-        </p:txBody>
-      </p:sp>
-      <p:sp>
-        <p:nvSpPr>
-          <p:cNvPr id="170" name="Caja 170"/>
-          <p:cNvSpPr/>
-          <p:nvPr/>
-        </p:nvSpPr>
-        <p:spPr>
-          <a:xfrm>
-            <a:off x="2051000" y="2350000"/>
-            <a:ext cx="1240000" cy="1500000"/>
-          </a:xfrm>
-          <a:prstGeom prst="roundRect">
-            <a:avLst>
-              <a:gd name="adj" fmla="val 6000"/>
-            </a:avLst>
-          </a:prstGeom>
-          <a:solidFill>
-            <a:srgbClr val="0D7680"/>
-          </a:solidFill>
-          <a:ln>
-            <a:noFill/>
-          </a:ln>
-        </p:spPr>
-        <p:txBody>
-          <a:bodyPr wrap="square" anchor="ctr" lIns="45720" rIns="45720">
-            <a:noAutofit/>
-          </a:bodyPr>
-          <a:lstStyle/>
-          <a:p>
-            <a:pPr algn="ctr"/>
-            <a:r>
-              <a:rPr lang="es-ES" sz="2400" b="1" dirty="0">
-                <a:solidFill>
-                  <a:srgbClr val="FFFFFF"/>
-                </a:solidFill>
-              </a:rPr>
-              <a:t>F1</a:t>
-            </a:r>
-          </a:p>
-          <a:p>
-            <a:pPr algn="ctr"/>
-            <a:r>
-              <a:rPr lang="es-ES" sz="1050" dirty="0">
-                <a:solidFill>
-                  <a:srgbClr val="FFFFFF"/>
-                </a:solidFill>
-              </a:rPr>
-              <a:t>Descubrimiento de oportunidades</a:t>
-            </a:r>
-          </a:p>
-        </p:txBody>
-      </p:sp>
-      <p:sp>
-        <p:nvSpPr>
-          <p:cNvPr id="171" name="Texto 171"/>
-          <p:cNvSpPr txBox="1"/>
-          <p:nvPr/>
-        </p:nvSpPr>
-        <p:spPr>
-          <a:xfrm>
-            <a:off x="2961000" y="3900000"/>
-            <a:ext cx="800000" cy="300000"/>
-          </a:xfrm>
-          <a:prstGeom prst="rect">
-            <a:avLst/>
-          </a:prstGeom>
-          <a:noFill/>
-        </p:spPr>
-        <p:txBody>
-          <a:bodyPr wrap="square" anchor="t" lIns="45720" rIns="45720">
-            <a:noAutofit/>
-          </a:bodyPr>
-          <a:lstStyle/>
-          <a:p>
-            <a:pPr algn="ctr"/>
-            <a:r>
-              <a:rPr lang="es-ES" sz="1200" b="1" dirty="0">
-                <a:solidFill>
-                  <a:srgbClr val="990F3D"/>
-                </a:solidFill>
-              </a:rPr>
-              <a:t>G1</a:t>
-            </a:r>
-          </a:p>
-        </p:txBody>
-      </p:sp>
-      <p:sp>
-        <p:nvSpPr>
-          <p:cNvPr id="172" name="Caja 172"/>
-          <p:cNvSpPr/>
-          <p:nvPr/>
-        </p:nvSpPr>
-        <p:spPr>
-          <a:xfrm>
-            <a:off x="3421000" y="2350000"/>
-            <a:ext cx="1240000" cy="1500000"/>
-          </a:xfrm>
-          <a:prstGeom prst="roundRect">
-            <a:avLst>
-              <a:gd name="adj" fmla="val 6000"/>
-            </a:avLst>
-          </a:prstGeom>
-          <a:solidFill>
-            <a:srgbClr val="0D7680"/>
-          </a:solidFill>
-          <a:ln>
-            <a:noFill/>
-          </a:ln>
-        </p:spPr>
-        <p:txBody>
-          <a:bodyPr wrap="square" anchor="ctr" lIns="45720" rIns="45720">
-            <a:noAutofit/>
-          </a:bodyPr>
-          <a:lstStyle/>
-          <a:p>
-            <a:pPr algn="ctr"/>
-            <a:r>
-              <a:rPr lang="es-ES" sz="2400" b="1" dirty="0">
-                <a:solidFill>
-                  <a:srgbClr val="FFFFFF"/>
-                </a:solidFill>
-              </a:rPr>
-              <a:t>F2</a:t>
-            </a:r>
-          </a:p>
-          <a:p>
-            <a:pPr algn="ctr"/>
-            <a:r>
-              <a:rPr lang="es-ES" sz="1050" dirty="0">
-                <a:solidFill>
-                  <a:srgbClr val="FFFFFF"/>
-                </a:solidFill>
-              </a:rPr>
-              <a:t>Hipótesis de valor</a:t>
-            </a:r>
-          </a:p>
-        </p:txBody>
-      </p:sp>
-      <p:sp>
-        <p:nvSpPr>
-          <p:cNvPr id="173" name="Texto 173"/>
-          <p:cNvSpPr txBox="1"/>
-          <p:nvPr/>
-        </p:nvSpPr>
-        <p:spPr>
-          <a:xfrm>
-            <a:off x="4331000" y="3900000"/>
-            <a:ext cx="800000" cy="300000"/>
-          </a:xfrm>
-          <a:prstGeom prst="rect">
-            <a:avLst/>
-          </a:prstGeom>
-          <a:noFill/>
-        </p:spPr>
-        <p:txBody>
-          <a:bodyPr wrap="square" anchor="t" lIns="45720" rIns="45720">
-            <a:noAutofit/>
-          </a:bodyPr>
-          <a:lstStyle/>
-          <a:p>
-            <a:pPr algn="ctr"/>
-            <a:r>
-              <a:rPr lang="es-ES" sz="1200" b="1" dirty="0">
-                <a:solidFill>
-                  <a:srgbClr val="990F3D"/>
-                </a:solidFill>
-              </a:rPr>
-              <a:t>G2</a:t>
-            </a:r>
-          </a:p>
-        </p:txBody>
-      </p:sp>
-      <p:sp>
-        <p:nvSpPr>
-          <p:cNvPr id="174" name="Caja 174"/>
-          <p:cNvSpPr/>
-          <p:nvPr/>
-        </p:nvSpPr>
-        <p:spPr>
-          <a:xfrm>
-            <a:off x="4791000" y="2350000"/>
-            <a:ext cx="1240000" cy="1500000"/>
-          </a:xfrm>
-          <a:prstGeom prst="roundRect">
-            <a:avLst>
-              <a:gd name="adj" fmla="val 6000"/>
-            </a:avLst>
-          </a:prstGeom>
-          <a:solidFill>
-            <a:srgbClr val="0D7680"/>
-          </a:solidFill>
-          <a:ln>
-            <a:noFill/>
-          </a:ln>
-        </p:spPr>
-        <p:txBody>
-          <a:bodyPr wrap="square" anchor="ctr" lIns="45720" rIns="45720">
-            <a:noAutofit/>
-          </a:bodyPr>
-          <a:lstStyle/>
-          <a:p>
-            <a:pPr algn="ctr"/>
-            <a:r>
-              <a:rPr lang="es-ES" sz="2400" b="1" dirty="0">
-                <a:solidFill>
-                  <a:srgbClr val="FFFFFF"/>
-                </a:solidFill>
-              </a:rPr>
-              <a:t>F3</a:t>
-            </a:r>
-          </a:p>
-          <a:p>
-            <a:pPr algn="ctr"/>
-            <a:r>
-              <a:rPr lang="es-ES" sz="1050" dirty="0">
-                <a:solidFill>
-                  <a:srgbClr val="FFFFFF"/>
-                </a:solidFill>
-              </a:rPr>
-              <a:t>Viabilidad y riesgo</a:t>
-            </a:r>
-          </a:p>
-        </p:txBody>
-      </p:sp>
-      <p:sp>
-        <p:nvSpPr>
-          <p:cNvPr id="175" name="Texto 175"/>
-          <p:cNvSpPr txBox="1"/>
-          <p:nvPr/>
-        </p:nvSpPr>
-        <p:spPr>
-          <a:xfrm>
-            <a:off x="5701000" y="3900000"/>
-            <a:ext cx="800000" cy="300000"/>
-          </a:xfrm>
-          <a:prstGeom prst="rect">
-            <a:avLst/>
-          </a:prstGeom>
-          <a:noFill/>
-        </p:spPr>
-        <p:txBody>
-          <a:bodyPr wrap="square" anchor="t" lIns="45720" rIns="45720">
-            <a:noAutofit/>
-          </a:bodyPr>
-          <a:lstStyle/>
-          <a:p>
-            <a:pPr algn="ctr"/>
-            <a:r>
-              <a:rPr lang="es-ES" sz="1200" b="1" dirty="0">
-                <a:solidFill>
-                  <a:srgbClr val="990F3D"/>
-                </a:solidFill>
-              </a:rPr>
-              <a:t>G3</a:t>
-            </a:r>
-          </a:p>
-        </p:txBody>
-      </p:sp>
-      <p:sp>
-        <p:nvSpPr>
-          <p:cNvPr id="176" name="Caja 176"/>
-          <p:cNvSpPr/>
-          <p:nvPr/>
-        </p:nvSpPr>
-        <p:spPr>
-          <a:xfrm>
-            <a:off x="6161000" y="2350000"/>
-            <a:ext cx="1240000" cy="1500000"/>
-          </a:xfrm>
-          <a:prstGeom prst="roundRect">
-            <a:avLst>
-              <a:gd name="adj" fmla="val 6000"/>
-            </a:avLst>
-          </a:prstGeom>
-          <a:solidFill>
-            <a:srgbClr val="0D7680"/>
-          </a:solidFill>
-          <a:ln>
-            <a:noFill/>
-          </a:ln>
-        </p:spPr>
-        <p:txBody>
-          <a:bodyPr wrap="square" anchor="ctr" lIns="45720" rIns="45720">
-            <a:noAutofit/>
-          </a:bodyPr>
-          <a:lstStyle/>
-          <a:p>
-            <a:pPr algn="ctr"/>
-            <a:r>
-              <a:rPr lang="es-ES" sz="2400" b="1" dirty="0">
-                <a:solidFill>
-                  <a:srgbClr val="FFFFFF"/>
-                </a:solidFill>
-              </a:rPr>
-              <a:t>F4</a:t>
-            </a:r>
-          </a:p>
-          <a:p>
-            <a:pPr algn="ctr"/>
-            <a:r>
-              <a:rPr lang="es-ES" sz="1050" dirty="0">
-                <a:solidFill>
-                  <a:srgbClr val="FFFFFF"/>
-                </a:solidFill>
-              </a:rPr>
-              <a:t>Diseño de la solución</a:t>
-            </a:r>
-          </a:p>
-        </p:txBody>
-      </p:sp>
-      <p:sp>
-        <p:nvSpPr>
-          <p:cNvPr id="177" name="Texto 177"/>
-          <p:cNvSpPr txBox="1"/>
-          <p:nvPr/>
-        </p:nvSpPr>
-        <p:spPr>
-          <a:xfrm>
-            <a:off x="7071000" y="3900000"/>
-            <a:ext cx="800000" cy="300000"/>
-          </a:xfrm>
-          <a:prstGeom prst="rect">
-            <a:avLst/>
-          </a:prstGeom>
-          <a:noFill/>
-        </p:spPr>
-        <p:txBody>
-          <a:bodyPr wrap="square" anchor="t" lIns="45720" rIns="45720">
-            <a:noAutofit/>
-          </a:bodyPr>
-          <a:lstStyle/>
-          <a:p>
-            <a:pPr algn="ctr"/>
-            <a:r>
-              <a:rPr lang="es-ES" sz="1200" b="1" dirty="0">
-                <a:solidFill>
-                  <a:srgbClr val="990F3D"/>
-                </a:solidFill>
-              </a:rPr>
-              <a:t>G4</a:t>
-            </a:r>
-          </a:p>
-        </p:txBody>
-      </p:sp>
-      <p:sp>
-        <p:nvSpPr>
-          <p:cNvPr id="178" name="Caja 178"/>
-          <p:cNvSpPr/>
-          <p:nvPr/>
-        </p:nvSpPr>
-        <p:spPr>
-          <a:xfrm>
-            <a:off x="7531000" y="2350000"/>
-            <a:ext cx="1240000" cy="1500000"/>
-          </a:xfrm>
-          <a:prstGeom prst="roundRect">
-            <a:avLst>
-              <a:gd name="adj" fmla="val 6000"/>
-            </a:avLst>
-          </a:prstGeom>
-          <a:solidFill>
-            <a:srgbClr val="0D7680"/>
-          </a:solidFill>
-          <a:ln>
-            <a:noFill/>
-          </a:ln>
-        </p:spPr>
-        <p:txBody>
-          <a:bodyPr wrap="square" anchor="ctr" lIns="45720" rIns="45720">
-            <a:noAutofit/>
-          </a:bodyPr>
-          <a:lstStyle/>
-          <a:p>
-            <a:pPr algn="ctr"/>
-            <a:r>
-              <a:rPr lang="es-ES" sz="2400" b="1" dirty="0">
-                <a:solidFill>
-                  <a:srgbClr val="FFFFFF"/>
-                </a:solidFill>
-              </a:rPr>
-              <a:t>F5</a:t>
-            </a:r>
-          </a:p>
-          <a:p>
-            <a:pPr algn="ctr"/>
-            <a:r>
-              <a:rPr lang="es-ES" sz="1050" dirty="0">
-                <a:solidFill>
-                  <a:srgbClr val="FFFFFF"/>
-                </a:solidFill>
-              </a:rPr>
-              <a:t>Entrega y validación</a:t>
-            </a:r>
-          </a:p>
-        </p:txBody>
-      </p:sp>
-      <p:sp>
-        <p:nvSpPr>
-          <p:cNvPr id="179" name="Texto 179"/>
-          <p:cNvSpPr txBox="1"/>
-          <p:nvPr/>
-        </p:nvSpPr>
-        <p:spPr>
-          <a:xfrm>
-            <a:off x="8441000" y="3900000"/>
-            <a:ext cx="800000" cy="300000"/>
-          </a:xfrm>
-          <a:prstGeom prst="rect">
-            <a:avLst/>
-          </a:prstGeom>
-          <a:noFill/>
-        </p:spPr>
-        <p:txBody>
-          <a:bodyPr wrap="square" anchor="t" lIns="45720" rIns="45720">
-            <a:noAutofit/>
-          </a:bodyPr>
-          <a:lstStyle/>
-          <a:p>
-            <a:pPr algn="ctr"/>
-            <a:r>
-              <a:rPr lang="es-ES" sz="1200" b="1" dirty="0">
-                <a:solidFill>
-                  <a:srgbClr val="990F3D"/>
-                </a:solidFill>
-              </a:rPr>
-              <a:t>G5</a:t>
-            </a:r>
-          </a:p>
-        </p:txBody>
-      </p:sp>
-      <p:sp>
-        <p:nvSpPr>
-          <p:cNvPr id="180" name="Caja 180"/>
-          <p:cNvSpPr/>
-          <p:nvPr/>
-        </p:nvSpPr>
-        <p:spPr>
-          <a:xfrm>
-            <a:off x="8901000" y="2350000"/>
-            <a:ext cx="1240000" cy="1500000"/>
-          </a:xfrm>
-          <a:prstGeom prst="roundRect">
-            <a:avLst>
-              <a:gd name="adj" fmla="val 6000"/>
-            </a:avLst>
-          </a:prstGeom>
-          <a:solidFill>
-            <a:srgbClr val="0D7680"/>
-          </a:solidFill>
-          <a:ln>
-            <a:noFill/>
-          </a:ln>
-        </p:spPr>
-        <p:txBody>
-          <a:bodyPr wrap="square" anchor="ctr" lIns="45720" rIns="45720">
-            <a:noAutofit/>
-          </a:bodyPr>
-          <a:lstStyle/>
-          <a:p>
-            <a:pPr algn="ctr"/>
-            <a:r>
-              <a:rPr lang="es-ES" sz="2400" b="1" dirty="0">
-                <a:solidFill>
-                  <a:srgbClr val="FFFFFF"/>
-                </a:solidFill>
-              </a:rPr>
-              <a:t>F6</a:t>
-            </a:r>
-          </a:p>
-          <a:p>
-            <a:pPr algn="ctr"/>
-            <a:r>
-              <a:rPr lang="es-ES" sz="1050" dirty="0">
-                <a:solidFill>
-                  <a:srgbClr val="FFFFFF"/>
-                </a:solidFill>
-              </a:rPr>
-              <a:t>Operación y gobierno</a:t>
-            </a:r>
-          </a:p>
-        </p:txBody>
-      </p:sp>
-      <p:sp>
-        <p:nvSpPr>
-          <p:cNvPr id="181" name="Texto 181"/>
-          <p:cNvSpPr txBox="1"/>
-          <p:nvPr/>
-        </p:nvSpPr>
-        <p:spPr>
-          <a:xfrm>
-            <a:off x="9811000" y="3900000"/>
-            <a:ext cx="800000" cy="300000"/>
-          </a:xfrm>
-          <a:prstGeom prst="rect">
-            <a:avLst/>
-          </a:prstGeom>
-          <a:noFill/>
-        </p:spPr>
-        <p:txBody>
-          <a:bodyPr wrap="square" anchor="t" lIns="45720" rIns="45720">
-            <a:noAutofit/>
-          </a:bodyPr>
-          <a:lstStyle/>
-          <a:p>
-            <a:pPr algn="ctr"/>
-            <a:r>
-              <a:rPr lang="es-ES" sz="1200" b="1" dirty="0">
-                <a:solidFill>
-                  <a:srgbClr val="990F3D"/>
-                </a:solidFill>
-              </a:rPr>
-              <a:t>R6</a:t>
-            </a:r>
-          </a:p>
-        </p:txBody>
-      </p:sp>
-      <p:sp>
-        <p:nvSpPr>
-          <p:cNvPr id="182" name="Caja 182"/>
-          <p:cNvSpPr/>
-          <p:nvPr/>
-        </p:nvSpPr>
-        <p:spPr>
-          <a:xfrm>
-            <a:off x="10271000" y="2350000"/>
-            <a:ext cx="1240000" cy="1500000"/>
-          </a:xfrm>
-          <a:prstGeom prst="roundRect">
-            <a:avLst>
-              <a:gd name="adj" fmla="val 6000"/>
-            </a:avLst>
-          </a:prstGeom>
-          <a:solidFill>
-            <a:srgbClr val="C9A78D"/>
-          </a:solidFill>
-          <a:ln>
-            <a:noFill/>
-          </a:ln>
-        </p:spPr>
-        <p:txBody>
-          <a:bodyPr wrap="square" anchor="ctr" lIns="45720" rIns="45720">
-            <a:noAutofit/>
-          </a:bodyPr>
-          <a:lstStyle/>
-          <a:p>
-            <a:pPr algn="ctr"/>
-            <a:r>
-              <a:rPr lang="es-ES" sz="2400" b="1" dirty="0">
-                <a:solidFill>
-                  <a:srgbClr val="564D47"/>
-                </a:solidFill>
-              </a:rPr>
-              <a:t>F7</a:t>
-            </a:r>
-          </a:p>
-          <a:p>
-            <a:pPr algn="ctr"/>
-            <a:r>
-              <a:rPr lang="es-ES" sz="1050" dirty="0">
-                <a:solidFill>
-                  <a:srgbClr val="564D47"/>
-                </a:solidFill>
-              </a:rPr>
-              <a:t>Evolución o retirada</a:t>
-            </a:r>
-          </a:p>
-        </p:txBody>
-      </p:sp>
-      <p:sp>
-        <p:nvSpPr>
-          <p:cNvPr id="183" name="Texto 183"/>
-          <p:cNvSpPr txBox="1"/>
-          <p:nvPr/>
-        </p:nvSpPr>
-        <p:spPr>
-          <a:xfrm>
-            <a:off x="11181000" y="3900000"/>
-            <a:ext cx="800000" cy="300000"/>
-          </a:xfrm>
-          <a:prstGeom prst="rect">
-            <a:avLst/>
-          </a:prstGeom>
-          <a:noFill/>
-        </p:spPr>
-        <p:txBody>
-          <a:bodyPr wrap="square" anchor="t" lIns="45720" rIns="45720">
-            <a:noAutofit/>
-          </a:bodyPr>
-          <a:lstStyle/>
-          <a:p>
-            <a:pPr algn="ctr"/>
-            <a:r>
-              <a:rPr lang="es-ES" sz="1200" b="1" dirty="0">
-                <a:solidFill>
-                  <a:srgbClr val="990F3D"/>
-                </a:solidFill>
-              </a:rPr>
-              <a:t>G7</a:t>
-            </a:r>
-          </a:p>
-        </p:txBody>
-      </p:sp>
-      <p:sp>
-        <p:nvSpPr>
-          <p:cNvPr id="184" name="Texto 184"/>
-          <p:cNvSpPr txBox="1"/>
-          <p:nvPr/>
-        </p:nvSpPr>
-        <p:spPr>
-          <a:xfrm>
-            <a:off x="609600" y="4430000"/>
-            <a:ext cx="10972800" cy="600000"/>
-          </a:xfrm>
-          <a:prstGeom prst="rect">
-            <a:avLst/>
-          </a:prstGeom>
-          <a:noFill/>
-        </p:spPr>
-        <p:txBody>
-          <a:bodyPr wrap="square" anchor="t" lIns="45720" rIns="45720">
-            <a:noAutofit/>
-          </a:bodyPr>
-          <a:lstStyle/>
-          <a:p>
-            <a:pPr algn="ctr"/>
-            <a:r>
-              <a:rPr lang="es-ES" sz="2200" b="1" dirty="0">
-                <a:solidFill>
-                  <a:srgbClr val="0D7680"/>
-                </a:solidFill>
-              </a:rPr>
-              <a:t>EN USO · cada R6 confirma que sigue aportando valor bajo control</a:t>
+              <a:t>EN PRODUCCIÓN · 1,1 M€ DE RETORNO ANUAL VALIDADO · R6 TRIMESTRAL</a:t>
             </a:r>
           </a:p>
         </p:txBody>
@@ -3971,7 +3416,7 @@
       </p:grpSpPr>
       <p:sp>
         <p:nvSpPr>
-          <p:cNvPr id="190" name="Marca"/>
+          <p:cNvPr id="192" name="Marca"/>
           <p:cNvSpPr/>
           <p:nvPr/>
         </p:nvSpPr>
@@ -3995,7 +3440,7 @@
       </p:sp>
       <p:sp>
         <p:nvSpPr>
-          <p:cNvPr id="191" name="Texto 191"/>
+          <p:cNvPr id="193" name="Texto 193"/>
           <p:cNvSpPr txBox="1"/>
           <p:nvPr/>
         </p:nvSpPr>
@@ -4029,7 +3474,7 @@
       </p:sp>
       <p:sp>
         <p:nvSpPr>
-          <p:cNvPr id="192" name="Texto 192"/>
+          <p:cNvPr id="194" name="Texto 194"/>
           <p:cNvSpPr txBox="1"/>
           <p:nvPr/>
         </p:nvSpPr>
@@ -4056,21 +3501,21 @@
                   <a:srgbClr val="990F3D"/>
                 </a:solidFill>
               </a:rPr>
-              <a:t>Cómo se mide el valor</a:t>
-            </a:r>
-          </a:p>
-        </p:txBody>
-      </p:sp>
-      <p:sp>
-        <p:nvSpPr>
-          <p:cNvPr id="189" name="Texto 189"/>
-          <p:cNvSpPr txBox="1"/>
-          <p:nvPr/>
-        </p:nvSpPr>
-        <p:spPr>
-          <a:xfrm>
-            <a:off x="609600" y="1750000"/>
-            <a:ext cx="10972800" cy="4400000"/>
+              <a:t>La iniciativa 2, sobre el ciclo de vida</a:t>
+            </a:r>
+          </a:p>
+        </p:txBody>
+      </p:sp>
+      <p:sp>
+        <p:nvSpPr>
+          <p:cNvPr id="195" name="Texto 195"/>
+          <p:cNvSpPr txBox="1"/>
+          <p:nvPr/>
+        </p:nvSpPr>
+        <p:spPr>
+          <a:xfrm>
+            <a:off x="609600" y="1330000"/>
+            <a:ext cx="10972800" cy="450000"/>
           </a:xfrm>
           <a:prstGeom prst="rect">
             <a:avLst/>
@@ -4083,103 +3528,736 @@
           </a:bodyPr>
           <a:lstStyle/>
           <a:p>
-            <a:pPr marL="285750" indent="-285750">
-              <a:spcAft>
-                <a:spcPts val="400"/>
-              </a:spcAft>
-              <a:buClr>
-                <a:srgbClr val="990F3D"/>
-              </a:buClr>
-              <a:buFont typeface="Arial"/>
-              <a:buChar char="•"/>
-            </a:pPr>
-            <a:r>
-              <a:rPr lang="es-ES" sz="1800" dirty="0">
-                <a:solidFill>
-                  <a:srgbClr val="2F2B28"/>
-                </a:solidFill>
-              </a:rPr>
-              <a:t>Todo importe lleva fórmula y estado: validado (control de gestión), declarado (el equipo) o estimado.</a:t>
-            </a:r>
-          </a:p>
-          <a:p>
-            <a:pPr marL="285750" indent="-285750">
-              <a:spcAft>
-                <a:spcPts val="400"/>
-              </a:spcAft>
-              <a:buClr>
-                <a:srgbClr val="990F3D"/>
-              </a:buClr>
-              <a:buFont typeface="Arial"/>
-              <a:buChar char="•"/>
-            </a:pPr>
-            <a:r>
-              <a:rPr lang="es-ES" sz="1800" dirty="0">
-                <a:solidFill>
-                  <a:srgbClr val="2F2B28"/>
-                </a:solidFill>
-              </a:rPr>
-              <a:t>Las horas liberadas no son ahorro hasta que se materializan: baja un coste o se reasignan a una actividad con valor.</a:t>
-            </a:r>
-          </a:p>
-          <a:p>
-            <a:pPr marL="285750" indent="-285750">
-              <a:spcAft>
-                <a:spcPts val="400"/>
-              </a:spcAft>
-              <a:buClr>
-                <a:srgbClr val="990F3D"/>
-              </a:buClr>
-              <a:buFont typeface="Arial"/>
-              <a:buChar char="•"/>
-            </a:pPr>
-            <a:r>
-              <a:rPr lang="es-ES" sz="1800" dirty="0">
-                <a:solidFill>
-                  <a:srgbClr val="2F2B28"/>
-                </a:solidFill>
-              </a:rPr>
-              <a:t>El coste es completo: construcción, consumo, operación, supervisión humana y retirada.</a:t>
-            </a:r>
-          </a:p>
-          <a:p>
-            <a:pPr marL="285750" indent="-285750">
-              <a:spcAft>
-                <a:spcPts val="400"/>
-              </a:spcAft>
-              <a:buClr>
-                <a:srgbClr val="990F3D"/>
-              </a:buClr>
-              <a:buFont typeface="Arial"/>
-              <a:buChar char="•"/>
-            </a:pPr>
-            <a:r>
-              <a:rPr lang="es-ES" sz="1800" dirty="0">
-                <a:solidFill>
-                  <a:srgbClr val="2F2B28"/>
-                </a:solidFill>
-              </a:rPr>
-              <a:t>El índice de transformación usa ocho señales de evidencia para separar transformar de solo eficientar.</a:t>
-            </a:r>
-          </a:p>
-          <a:p>
-            <a:pPr marL="285750" indent="-285750">
-              <a:spcAft>
-                <a:spcPts val="400"/>
-              </a:spcAft>
-              <a:buClr>
-                <a:srgbClr val="990F3D"/>
-              </a:buClr>
-              <a:buFont typeface="Arial"/>
-              <a:buChar char="•"/>
-            </a:pPr>
-            <a:r>
-              <a:rPr lang="es-ES" sz="1800" dirty="0">
-                <a:solidFill>
-                  <a:srgbClr val="2F2B28"/>
-                </a:solidFill>
-              </a:rPr>
-              <a:t>Diez reglas de medición (documento 40). Ninguna cifra entra en el neto de la cartera sin su estado.</a:t>
+            <a:pPr algn="l"/>
+            <a:r>
+              <a:rPr lang="es-ES" sz="1500" dirty="0">
+                <a:solidFill>
+                  <a:srgbClr val="564D47"/>
+                </a:solidFill>
+              </a:rPr>
+              <a:t>Recorrió las fases 0 a 6 y sigue en uso; la fase 7 llegará con G7</a:t>
+            </a:r>
+          </a:p>
+        </p:txBody>
+      </p:sp>
+      <p:sp>
+        <p:nvSpPr>
+          <p:cNvPr id="175" name="Caja 175"/>
+          <p:cNvSpPr/>
+          <p:nvPr/>
+        </p:nvSpPr>
+        <p:spPr>
+          <a:xfrm>
+            <a:off x="681000" y="2350000"/>
+            <a:ext cx="1240000" cy="1500000"/>
+          </a:xfrm>
+          <a:prstGeom prst="roundRect">
+            <a:avLst>
+              <a:gd name="adj" fmla="val 6000"/>
+            </a:avLst>
+          </a:prstGeom>
+          <a:solidFill>
+            <a:srgbClr val="0D7680"/>
+          </a:solidFill>
+          <a:ln>
+            <a:noFill/>
+          </a:ln>
+        </p:spPr>
+        <p:txBody>
+          <a:bodyPr wrap="square" anchor="ctr" lIns="45720" rIns="45720">
+            <a:noAutofit/>
+          </a:bodyPr>
+          <a:lstStyle/>
+          <a:p>
+            <a:pPr algn="ctr"/>
+            <a:r>
+              <a:rPr lang="es-ES" sz="2400" b="1" dirty="0">
+                <a:solidFill>
+                  <a:srgbClr val="FFFFFF"/>
+                </a:solidFill>
+              </a:rPr>
+              <a:t>F0</a:t>
+            </a:r>
+          </a:p>
+          <a:p>
+            <a:pPr algn="ctr"/>
+            <a:r>
+              <a:rPr lang="es-ES" sz="1050" dirty="0">
+                <a:solidFill>
+                  <a:srgbClr val="FFFFFF"/>
+                </a:solidFill>
+              </a:rPr>
+              <a:t>Contexto y restricciones</a:t>
+            </a:r>
+          </a:p>
+        </p:txBody>
+      </p:sp>
+      <p:sp>
+        <p:nvSpPr>
+          <p:cNvPr id="176" name="Texto 176"/>
+          <p:cNvSpPr txBox="1"/>
+          <p:nvPr/>
+        </p:nvSpPr>
+        <p:spPr>
+          <a:xfrm>
+            <a:off x="1591000" y="3900000"/>
+            <a:ext cx="800000" cy="300000"/>
+          </a:xfrm>
+          <a:prstGeom prst="rect">
+            <a:avLst/>
+          </a:prstGeom>
+          <a:noFill/>
+        </p:spPr>
+        <p:txBody>
+          <a:bodyPr wrap="square" anchor="t" lIns="45720" rIns="45720">
+            <a:noAutofit/>
+          </a:bodyPr>
+          <a:lstStyle/>
+          <a:p>
+            <a:pPr algn="ctr"/>
+            <a:r>
+              <a:rPr lang="es-ES" sz="1200" b="1" dirty="0">
+                <a:solidFill>
+                  <a:srgbClr val="990F3D"/>
+                </a:solidFill>
+              </a:rPr>
+              <a:t>G0</a:t>
+            </a:r>
+          </a:p>
+        </p:txBody>
+      </p:sp>
+      <p:sp>
+        <p:nvSpPr>
+          <p:cNvPr id="177" name="Caja 177"/>
+          <p:cNvSpPr/>
+          <p:nvPr/>
+        </p:nvSpPr>
+        <p:spPr>
+          <a:xfrm>
+            <a:off x="2051000" y="2350000"/>
+            <a:ext cx="1240000" cy="1500000"/>
+          </a:xfrm>
+          <a:prstGeom prst="roundRect">
+            <a:avLst>
+              <a:gd name="adj" fmla="val 6000"/>
+            </a:avLst>
+          </a:prstGeom>
+          <a:solidFill>
+            <a:srgbClr val="0D7680"/>
+          </a:solidFill>
+          <a:ln>
+            <a:noFill/>
+          </a:ln>
+        </p:spPr>
+        <p:txBody>
+          <a:bodyPr wrap="square" anchor="ctr" lIns="45720" rIns="45720">
+            <a:noAutofit/>
+          </a:bodyPr>
+          <a:lstStyle/>
+          <a:p>
+            <a:pPr algn="ctr"/>
+            <a:r>
+              <a:rPr lang="es-ES" sz="2400" b="1" dirty="0">
+                <a:solidFill>
+                  <a:srgbClr val="FFFFFF"/>
+                </a:solidFill>
+              </a:rPr>
+              <a:t>F1</a:t>
+            </a:r>
+          </a:p>
+          <a:p>
+            <a:pPr algn="ctr"/>
+            <a:r>
+              <a:rPr lang="es-ES" sz="1050" dirty="0">
+                <a:solidFill>
+                  <a:srgbClr val="FFFFFF"/>
+                </a:solidFill>
+              </a:rPr>
+              <a:t>Descubrimiento de oportunidades</a:t>
+            </a:r>
+          </a:p>
+        </p:txBody>
+      </p:sp>
+      <p:sp>
+        <p:nvSpPr>
+          <p:cNvPr id="178" name="Texto 178"/>
+          <p:cNvSpPr txBox="1"/>
+          <p:nvPr/>
+        </p:nvSpPr>
+        <p:spPr>
+          <a:xfrm>
+            <a:off x="2961000" y="3900000"/>
+            <a:ext cx="800000" cy="300000"/>
+          </a:xfrm>
+          <a:prstGeom prst="rect">
+            <a:avLst/>
+          </a:prstGeom>
+          <a:noFill/>
+        </p:spPr>
+        <p:txBody>
+          <a:bodyPr wrap="square" anchor="t" lIns="45720" rIns="45720">
+            <a:noAutofit/>
+          </a:bodyPr>
+          <a:lstStyle/>
+          <a:p>
+            <a:pPr algn="ctr"/>
+            <a:r>
+              <a:rPr lang="es-ES" sz="1200" b="1" dirty="0">
+                <a:solidFill>
+                  <a:srgbClr val="990F3D"/>
+                </a:solidFill>
+              </a:rPr>
+              <a:t>G1</a:t>
+            </a:r>
+          </a:p>
+        </p:txBody>
+      </p:sp>
+      <p:sp>
+        <p:nvSpPr>
+          <p:cNvPr id="179" name="Caja 179"/>
+          <p:cNvSpPr/>
+          <p:nvPr/>
+        </p:nvSpPr>
+        <p:spPr>
+          <a:xfrm>
+            <a:off x="3421000" y="2350000"/>
+            <a:ext cx="1240000" cy="1500000"/>
+          </a:xfrm>
+          <a:prstGeom prst="roundRect">
+            <a:avLst>
+              <a:gd name="adj" fmla="val 6000"/>
+            </a:avLst>
+          </a:prstGeom>
+          <a:solidFill>
+            <a:srgbClr val="0D7680"/>
+          </a:solidFill>
+          <a:ln>
+            <a:noFill/>
+          </a:ln>
+        </p:spPr>
+        <p:txBody>
+          <a:bodyPr wrap="square" anchor="ctr" lIns="45720" rIns="45720">
+            <a:noAutofit/>
+          </a:bodyPr>
+          <a:lstStyle/>
+          <a:p>
+            <a:pPr algn="ctr"/>
+            <a:r>
+              <a:rPr lang="es-ES" sz="2400" b="1" dirty="0">
+                <a:solidFill>
+                  <a:srgbClr val="FFFFFF"/>
+                </a:solidFill>
+              </a:rPr>
+              <a:t>F2</a:t>
+            </a:r>
+          </a:p>
+          <a:p>
+            <a:pPr algn="ctr"/>
+            <a:r>
+              <a:rPr lang="es-ES" sz="1050" dirty="0">
+                <a:solidFill>
+                  <a:srgbClr val="FFFFFF"/>
+                </a:solidFill>
+              </a:rPr>
+              <a:t>Hipótesis de valor</a:t>
+            </a:r>
+          </a:p>
+        </p:txBody>
+      </p:sp>
+      <p:sp>
+        <p:nvSpPr>
+          <p:cNvPr id="180" name="Texto 180"/>
+          <p:cNvSpPr txBox="1"/>
+          <p:nvPr/>
+        </p:nvSpPr>
+        <p:spPr>
+          <a:xfrm>
+            <a:off x="4331000" y="3900000"/>
+            <a:ext cx="800000" cy="300000"/>
+          </a:xfrm>
+          <a:prstGeom prst="rect">
+            <a:avLst/>
+          </a:prstGeom>
+          <a:noFill/>
+        </p:spPr>
+        <p:txBody>
+          <a:bodyPr wrap="square" anchor="t" lIns="45720" rIns="45720">
+            <a:noAutofit/>
+          </a:bodyPr>
+          <a:lstStyle/>
+          <a:p>
+            <a:pPr algn="ctr"/>
+            <a:r>
+              <a:rPr lang="es-ES" sz="1200" b="1" dirty="0">
+                <a:solidFill>
+                  <a:srgbClr val="990F3D"/>
+                </a:solidFill>
+              </a:rPr>
+              <a:t>G2</a:t>
+            </a:r>
+          </a:p>
+        </p:txBody>
+      </p:sp>
+      <p:sp>
+        <p:nvSpPr>
+          <p:cNvPr id="181" name="Caja 181"/>
+          <p:cNvSpPr/>
+          <p:nvPr/>
+        </p:nvSpPr>
+        <p:spPr>
+          <a:xfrm>
+            <a:off x="4791000" y="2350000"/>
+            <a:ext cx="1240000" cy="1500000"/>
+          </a:xfrm>
+          <a:prstGeom prst="roundRect">
+            <a:avLst>
+              <a:gd name="adj" fmla="val 6000"/>
+            </a:avLst>
+          </a:prstGeom>
+          <a:solidFill>
+            <a:srgbClr val="0D7680"/>
+          </a:solidFill>
+          <a:ln>
+            <a:noFill/>
+          </a:ln>
+        </p:spPr>
+        <p:txBody>
+          <a:bodyPr wrap="square" anchor="ctr" lIns="45720" rIns="45720">
+            <a:noAutofit/>
+          </a:bodyPr>
+          <a:lstStyle/>
+          <a:p>
+            <a:pPr algn="ctr"/>
+            <a:r>
+              <a:rPr lang="es-ES" sz="2400" b="1" dirty="0">
+                <a:solidFill>
+                  <a:srgbClr val="FFFFFF"/>
+                </a:solidFill>
+              </a:rPr>
+              <a:t>F3</a:t>
+            </a:r>
+          </a:p>
+          <a:p>
+            <a:pPr algn="ctr"/>
+            <a:r>
+              <a:rPr lang="es-ES" sz="1050" dirty="0">
+                <a:solidFill>
+                  <a:srgbClr val="FFFFFF"/>
+                </a:solidFill>
+              </a:rPr>
+              <a:t>Viabilidad y riesgo</a:t>
+            </a:r>
+          </a:p>
+        </p:txBody>
+      </p:sp>
+      <p:sp>
+        <p:nvSpPr>
+          <p:cNvPr id="182" name="Texto 182"/>
+          <p:cNvSpPr txBox="1"/>
+          <p:nvPr/>
+        </p:nvSpPr>
+        <p:spPr>
+          <a:xfrm>
+            <a:off x="5701000" y="3900000"/>
+            <a:ext cx="800000" cy="300000"/>
+          </a:xfrm>
+          <a:prstGeom prst="rect">
+            <a:avLst/>
+          </a:prstGeom>
+          <a:noFill/>
+        </p:spPr>
+        <p:txBody>
+          <a:bodyPr wrap="square" anchor="t" lIns="45720" rIns="45720">
+            <a:noAutofit/>
+          </a:bodyPr>
+          <a:lstStyle/>
+          <a:p>
+            <a:pPr algn="ctr"/>
+            <a:r>
+              <a:rPr lang="es-ES" sz="1200" b="1" dirty="0">
+                <a:solidFill>
+                  <a:srgbClr val="990F3D"/>
+                </a:solidFill>
+              </a:rPr>
+              <a:t>G3</a:t>
+            </a:r>
+          </a:p>
+        </p:txBody>
+      </p:sp>
+      <p:sp>
+        <p:nvSpPr>
+          <p:cNvPr id="183" name="Caja 183"/>
+          <p:cNvSpPr/>
+          <p:nvPr/>
+        </p:nvSpPr>
+        <p:spPr>
+          <a:xfrm>
+            <a:off x="6161000" y="2350000"/>
+            <a:ext cx="1240000" cy="1500000"/>
+          </a:xfrm>
+          <a:prstGeom prst="roundRect">
+            <a:avLst>
+              <a:gd name="adj" fmla="val 6000"/>
+            </a:avLst>
+          </a:prstGeom>
+          <a:solidFill>
+            <a:srgbClr val="0D7680"/>
+          </a:solidFill>
+          <a:ln>
+            <a:noFill/>
+          </a:ln>
+        </p:spPr>
+        <p:txBody>
+          <a:bodyPr wrap="square" anchor="ctr" lIns="45720" rIns="45720">
+            <a:noAutofit/>
+          </a:bodyPr>
+          <a:lstStyle/>
+          <a:p>
+            <a:pPr algn="ctr"/>
+            <a:r>
+              <a:rPr lang="es-ES" sz="2400" b="1" dirty="0">
+                <a:solidFill>
+                  <a:srgbClr val="FFFFFF"/>
+                </a:solidFill>
+              </a:rPr>
+              <a:t>F4</a:t>
+            </a:r>
+          </a:p>
+          <a:p>
+            <a:pPr algn="ctr"/>
+            <a:r>
+              <a:rPr lang="es-ES" sz="1050" dirty="0">
+                <a:solidFill>
+                  <a:srgbClr val="FFFFFF"/>
+                </a:solidFill>
+              </a:rPr>
+              <a:t>Diseño de la solución</a:t>
+            </a:r>
+          </a:p>
+        </p:txBody>
+      </p:sp>
+      <p:sp>
+        <p:nvSpPr>
+          <p:cNvPr id="184" name="Texto 184"/>
+          <p:cNvSpPr txBox="1"/>
+          <p:nvPr/>
+        </p:nvSpPr>
+        <p:spPr>
+          <a:xfrm>
+            <a:off x="7071000" y="3900000"/>
+            <a:ext cx="800000" cy="300000"/>
+          </a:xfrm>
+          <a:prstGeom prst="rect">
+            <a:avLst/>
+          </a:prstGeom>
+          <a:noFill/>
+        </p:spPr>
+        <p:txBody>
+          <a:bodyPr wrap="square" anchor="t" lIns="45720" rIns="45720">
+            <a:noAutofit/>
+          </a:bodyPr>
+          <a:lstStyle/>
+          <a:p>
+            <a:pPr algn="ctr"/>
+            <a:r>
+              <a:rPr lang="es-ES" sz="1200" b="1" dirty="0">
+                <a:solidFill>
+                  <a:srgbClr val="990F3D"/>
+                </a:solidFill>
+              </a:rPr>
+              <a:t>G4</a:t>
+            </a:r>
+          </a:p>
+        </p:txBody>
+      </p:sp>
+      <p:sp>
+        <p:nvSpPr>
+          <p:cNvPr id="185" name="Caja 185"/>
+          <p:cNvSpPr/>
+          <p:nvPr/>
+        </p:nvSpPr>
+        <p:spPr>
+          <a:xfrm>
+            <a:off x="7531000" y="2350000"/>
+            <a:ext cx="1240000" cy="1500000"/>
+          </a:xfrm>
+          <a:prstGeom prst="roundRect">
+            <a:avLst>
+              <a:gd name="adj" fmla="val 6000"/>
+            </a:avLst>
+          </a:prstGeom>
+          <a:solidFill>
+            <a:srgbClr val="0D7680"/>
+          </a:solidFill>
+          <a:ln>
+            <a:noFill/>
+          </a:ln>
+        </p:spPr>
+        <p:txBody>
+          <a:bodyPr wrap="square" anchor="ctr" lIns="45720" rIns="45720">
+            <a:noAutofit/>
+          </a:bodyPr>
+          <a:lstStyle/>
+          <a:p>
+            <a:pPr algn="ctr"/>
+            <a:r>
+              <a:rPr lang="es-ES" sz="2400" b="1" dirty="0">
+                <a:solidFill>
+                  <a:srgbClr val="FFFFFF"/>
+                </a:solidFill>
+              </a:rPr>
+              <a:t>F5</a:t>
+            </a:r>
+          </a:p>
+          <a:p>
+            <a:pPr algn="ctr"/>
+            <a:r>
+              <a:rPr lang="es-ES" sz="1050" dirty="0">
+                <a:solidFill>
+                  <a:srgbClr val="FFFFFF"/>
+                </a:solidFill>
+              </a:rPr>
+              <a:t>Entrega y validación</a:t>
+            </a:r>
+          </a:p>
+        </p:txBody>
+      </p:sp>
+      <p:sp>
+        <p:nvSpPr>
+          <p:cNvPr id="186" name="Texto 186"/>
+          <p:cNvSpPr txBox="1"/>
+          <p:nvPr/>
+        </p:nvSpPr>
+        <p:spPr>
+          <a:xfrm>
+            <a:off x="8441000" y="3900000"/>
+            <a:ext cx="800000" cy="300000"/>
+          </a:xfrm>
+          <a:prstGeom prst="rect">
+            <a:avLst/>
+          </a:prstGeom>
+          <a:noFill/>
+        </p:spPr>
+        <p:txBody>
+          <a:bodyPr wrap="square" anchor="t" lIns="45720" rIns="45720">
+            <a:noAutofit/>
+          </a:bodyPr>
+          <a:lstStyle/>
+          <a:p>
+            <a:pPr algn="ctr"/>
+            <a:r>
+              <a:rPr lang="es-ES" sz="1200" b="1" dirty="0">
+                <a:solidFill>
+                  <a:srgbClr val="990F3D"/>
+                </a:solidFill>
+              </a:rPr>
+              <a:t>G5</a:t>
+            </a:r>
+          </a:p>
+        </p:txBody>
+      </p:sp>
+      <p:sp>
+        <p:nvSpPr>
+          <p:cNvPr id="187" name="Caja 187"/>
+          <p:cNvSpPr/>
+          <p:nvPr/>
+        </p:nvSpPr>
+        <p:spPr>
+          <a:xfrm>
+            <a:off x="8901000" y="2350000"/>
+            <a:ext cx="1240000" cy="1500000"/>
+          </a:xfrm>
+          <a:prstGeom prst="roundRect">
+            <a:avLst>
+              <a:gd name="adj" fmla="val 6000"/>
+            </a:avLst>
+          </a:prstGeom>
+          <a:solidFill>
+            <a:srgbClr val="0D7680"/>
+          </a:solidFill>
+          <a:ln>
+            <a:noFill/>
+          </a:ln>
+        </p:spPr>
+        <p:txBody>
+          <a:bodyPr wrap="square" anchor="ctr" lIns="45720" rIns="45720">
+            <a:noAutofit/>
+          </a:bodyPr>
+          <a:lstStyle/>
+          <a:p>
+            <a:pPr algn="ctr"/>
+            <a:r>
+              <a:rPr lang="es-ES" sz="2400" b="1" dirty="0">
+                <a:solidFill>
+                  <a:srgbClr val="FFFFFF"/>
+                </a:solidFill>
+              </a:rPr>
+              <a:t>F6</a:t>
+            </a:r>
+          </a:p>
+          <a:p>
+            <a:pPr algn="ctr"/>
+            <a:r>
+              <a:rPr lang="es-ES" sz="1050" dirty="0">
+                <a:solidFill>
+                  <a:srgbClr val="FFFFFF"/>
+                </a:solidFill>
+              </a:rPr>
+              <a:t>Operación y gobierno</a:t>
+            </a:r>
+          </a:p>
+        </p:txBody>
+      </p:sp>
+      <p:sp>
+        <p:nvSpPr>
+          <p:cNvPr id="188" name="Texto 188"/>
+          <p:cNvSpPr txBox="1"/>
+          <p:nvPr/>
+        </p:nvSpPr>
+        <p:spPr>
+          <a:xfrm>
+            <a:off x="9811000" y="3900000"/>
+            <a:ext cx="800000" cy="300000"/>
+          </a:xfrm>
+          <a:prstGeom prst="rect">
+            <a:avLst/>
+          </a:prstGeom>
+          <a:noFill/>
+        </p:spPr>
+        <p:txBody>
+          <a:bodyPr wrap="square" anchor="t" lIns="45720" rIns="45720">
+            <a:noAutofit/>
+          </a:bodyPr>
+          <a:lstStyle/>
+          <a:p>
+            <a:pPr algn="ctr"/>
+            <a:r>
+              <a:rPr lang="es-ES" sz="1200" b="1" dirty="0">
+                <a:solidFill>
+                  <a:srgbClr val="990F3D"/>
+                </a:solidFill>
+              </a:rPr>
+              <a:t>R6</a:t>
+            </a:r>
+          </a:p>
+        </p:txBody>
+      </p:sp>
+      <p:sp>
+        <p:nvSpPr>
+          <p:cNvPr id="189" name="Caja 189"/>
+          <p:cNvSpPr/>
+          <p:nvPr/>
+        </p:nvSpPr>
+        <p:spPr>
+          <a:xfrm>
+            <a:off x="10271000" y="2350000"/>
+            <a:ext cx="1240000" cy="1500000"/>
+          </a:xfrm>
+          <a:prstGeom prst="roundRect">
+            <a:avLst>
+              <a:gd name="adj" fmla="val 6000"/>
+            </a:avLst>
+          </a:prstGeom>
+          <a:solidFill>
+            <a:srgbClr val="C9A78D"/>
+          </a:solidFill>
+          <a:ln>
+            <a:noFill/>
+          </a:ln>
+        </p:spPr>
+        <p:txBody>
+          <a:bodyPr wrap="square" anchor="ctr" lIns="45720" rIns="45720">
+            <a:noAutofit/>
+          </a:bodyPr>
+          <a:lstStyle/>
+          <a:p>
+            <a:pPr algn="ctr"/>
+            <a:r>
+              <a:rPr lang="es-ES" sz="2400" b="1" dirty="0">
+                <a:solidFill>
+                  <a:srgbClr val="564D47"/>
+                </a:solidFill>
+              </a:rPr>
+              <a:t>F7</a:t>
+            </a:r>
+          </a:p>
+          <a:p>
+            <a:pPr algn="ctr"/>
+            <a:r>
+              <a:rPr lang="es-ES" sz="1050" dirty="0">
+                <a:solidFill>
+                  <a:srgbClr val="564D47"/>
+                </a:solidFill>
+              </a:rPr>
+              <a:t>Evolución o retirada</a:t>
+            </a:r>
+          </a:p>
+        </p:txBody>
+      </p:sp>
+      <p:sp>
+        <p:nvSpPr>
+          <p:cNvPr id="190" name="Texto 190"/>
+          <p:cNvSpPr txBox="1"/>
+          <p:nvPr/>
+        </p:nvSpPr>
+        <p:spPr>
+          <a:xfrm>
+            <a:off x="11181000" y="3900000"/>
+            <a:ext cx="800000" cy="300000"/>
+          </a:xfrm>
+          <a:prstGeom prst="rect">
+            <a:avLst/>
+          </a:prstGeom>
+          <a:noFill/>
+        </p:spPr>
+        <p:txBody>
+          <a:bodyPr wrap="square" anchor="t" lIns="45720" rIns="45720">
+            <a:noAutofit/>
+          </a:bodyPr>
+          <a:lstStyle/>
+          <a:p>
+            <a:pPr algn="ctr"/>
+            <a:r>
+              <a:rPr lang="es-ES" sz="1200" b="1" dirty="0">
+                <a:solidFill>
+                  <a:srgbClr val="990F3D"/>
+                </a:solidFill>
+              </a:rPr>
+              <a:t>G7</a:t>
+            </a:r>
+          </a:p>
+        </p:txBody>
+      </p:sp>
+      <p:sp>
+        <p:nvSpPr>
+          <p:cNvPr id="191" name="Texto 191"/>
+          <p:cNvSpPr txBox="1"/>
+          <p:nvPr/>
+        </p:nvSpPr>
+        <p:spPr>
+          <a:xfrm>
+            <a:off x="609600" y="4430000"/>
+            <a:ext cx="10972800" cy="600000"/>
+          </a:xfrm>
+          <a:prstGeom prst="rect">
+            <a:avLst/>
+          </a:prstGeom>
+          <a:noFill/>
+        </p:spPr>
+        <p:txBody>
+          <a:bodyPr wrap="square" anchor="t" lIns="45720" rIns="45720">
+            <a:noAutofit/>
+          </a:bodyPr>
+          <a:lstStyle/>
+          <a:p>
+            <a:pPr algn="ctr"/>
+            <a:r>
+              <a:rPr lang="es-ES" sz="2200" b="1" dirty="0">
+                <a:solidFill>
+                  <a:srgbClr val="0D7680"/>
+                </a:solidFill>
+              </a:rPr>
+              <a:t>EN USO · cada R6 confirma que sigue aportando valor bajo control</a:t>
             </a:r>
           </a:p>
         </p:txBody>
@@ -4198,7 +4276,7 @@
     <p:bg>
       <p:bgPr>
         <a:solidFill>
-          <a:srgbClr val="1A1817"/>
+          <a:srgbClr val="FBE2CD"/>
         </a:solidFill>
         <a:effectLst/>
       </p:bgPr>
@@ -4219,13 +4297,13 @@
       </p:grpSpPr>
       <p:sp>
         <p:nvSpPr>
-          <p:cNvPr id="193" name="Marca"/>
+          <p:cNvPr id="197" name="Marca"/>
           <p:cNvSpPr/>
           <p:nvPr/>
         </p:nvSpPr>
         <p:spPr>
           <a:xfrm>
-            <a:off x="609600" y="2400000"/>
+            <a:off x="609600" y="365760"/>
             <a:ext cx="182880" cy="182880"/>
           </a:xfrm>
           <a:prstGeom prst="rect">
@@ -4243,14 +4321,48 @@
       </p:sp>
       <p:sp>
         <p:nvSpPr>
-          <p:cNvPr id="194" name="Texto 194"/>
-          <p:cNvSpPr txBox="1"/>
-          <p:nvPr/>
-        </p:nvSpPr>
-        <p:spPr>
-          <a:xfrm>
-            <a:off x="838200" y="2320000"/>
-            <a:ext cx="9000000" cy="400000"/>
+          <p:cNvPr id="198" name="Texto 198"/>
+          <p:cNvSpPr txBox="1"/>
+          <p:nvPr/>
+        </p:nvSpPr>
+        <p:spPr>
+          <a:xfrm>
+            <a:off x="838200" y="300000"/>
+            <a:ext cx="10500000" cy="320000"/>
+          </a:xfrm>
+          <a:prstGeom prst="rect">
+            <a:avLst/>
+          </a:prstGeom>
+          <a:noFill/>
+        </p:spPr>
+        <p:txBody>
+          <a:bodyPr wrap="square" anchor="ctr" lIns="45720" rIns="45720">
+            <a:noAutofit/>
+          </a:bodyPr>
+          <a:lstStyle/>
+          <a:p>
+            <a:pPr algn="l"/>
+            <a:r>
+              <a:rPr lang="es-ES" sz="1400" b="1" dirty="0">
+                <a:solidFill>
+                  <a:srgbClr val="1A1817"/>
+                </a:solidFill>
+              </a:rPr>
+              <a:t>SEVEN-G · CURSO · EMPRESA · AUTOCONSULTORÍA</a:t>
+            </a:r>
+          </a:p>
+        </p:txBody>
+      </p:sp>
+      <p:sp>
+        <p:nvSpPr>
+          <p:cNvPr id="199" name="Texto 199"/>
+          <p:cNvSpPr txBox="1"/>
+          <p:nvPr/>
+        </p:nvSpPr>
+        <p:spPr>
+          <a:xfrm>
+            <a:off x="609600" y="700000"/>
+            <a:ext cx="10972800" cy="650000"/>
           </a:xfrm>
           <a:prstGeom prst="rect">
             <a:avLst/>
@@ -4265,26 +4377,26 @@
           <a:p>
             <a:pPr algn="l"/>
             <a:r>
-              <a:rPr lang="es-ES" sz="1600" b="1" dirty="0">
-                <a:solidFill>
-                  <a:srgbClr val="F3CFB2"/>
-                </a:solidFill>
-              </a:rPr>
-              <a:t>AUTOCONSULTORÍA</a:t>
-            </a:r>
-          </a:p>
-        </p:txBody>
-      </p:sp>
-      <p:sp>
-        <p:nvSpPr>
-          <p:cNvPr id="195" name="Texto 195"/>
-          <p:cNvSpPr txBox="1"/>
-          <p:nvPr/>
-        </p:nvSpPr>
-        <p:spPr>
-          <a:xfrm>
-            <a:off x="609600" y="2850000"/>
-            <a:ext cx="10972800" cy="1400000"/>
+              <a:rPr lang="es-ES" sz="2700" b="1" dirty="0">
+                <a:solidFill>
+                  <a:srgbClr val="990F3D"/>
+                </a:solidFill>
+              </a:rPr>
+              <a:t>Cómo se mide el valor</a:t>
+            </a:r>
+          </a:p>
+        </p:txBody>
+      </p:sp>
+      <p:sp>
+        <p:nvSpPr>
+          <p:cNvPr id="196" name="Texto 196"/>
+          <p:cNvSpPr txBox="1"/>
+          <p:nvPr/>
+        </p:nvSpPr>
+        <p:spPr>
+          <a:xfrm>
+            <a:off x="609600" y="1750000"/>
+            <a:ext cx="10972800" cy="4400000"/>
           </a:xfrm>
           <a:prstGeom prst="rect">
             <a:avLst/>
@@ -4297,48 +4409,103 @@
           </a:bodyPr>
           <a:lstStyle/>
           <a:p>
-            <a:pPr algn="l"/>
-            <a:r>
-              <a:rPr lang="es-ES" sz="4000" b="1" dirty="0">
-                <a:solidFill>
-                  <a:srgbClr val="FBE2CD"/>
-                </a:solidFill>
-              </a:rPr>
-              <a:t>Implantarlo en su compañía, por sus propios medios</a:t>
-            </a:r>
-          </a:p>
-        </p:txBody>
-      </p:sp>
-      <p:sp>
-        <p:nvSpPr>
-          <p:cNvPr id="196" name="Texto 196"/>
-          <p:cNvSpPr txBox="1"/>
-          <p:nvPr/>
-        </p:nvSpPr>
-        <p:spPr>
-          <a:xfrm>
-            <a:off x="609600" y="4400000"/>
-            <a:ext cx="10500000" cy="900000"/>
-          </a:xfrm>
-          <a:prstGeom prst="rect">
-            <a:avLst/>
-          </a:prstGeom>
-          <a:noFill/>
-        </p:spPr>
-        <p:txBody>
-          <a:bodyPr wrap="square" anchor="t" lIns="45720" rIns="45720">
-            <a:noAutofit/>
-          </a:bodyPr>
-          <a:lstStyle/>
-          <a:p>
-            <a:pPr algn="l"/>
-            <a:r>
-              <a:rPr lang="es-ES" sz="1700" dirty="0">
-                <a:solidFill>
-                  <a:srgbClr val="F3CFB2"/>
-                </a:solidFill>
-              </a:rPr>
-              <a:t>El marco está pensado para aplicarse sin contratar a nadie. Esto es lo que hace falta y en qué orden.</a:t>
+            <a:pPr marL="285750" indent="-285750">
+              <a:spcAft>
+                <a:spcPts val="400"/>
+              </a:spcAft>
+              <a:buClr>
+                <a:srgbClr val="990F3D"/>
+              </a:buClr>
+              <a:buFont typeface="Arial"/>
+              <a:buChar char="•"/>
+            </a:pPr>
+            <a:r>
+              <a:rPr lang="es-ES" sz="1800" dirty="0">
+                <a:solidFill>
+                  <a:srgbClr val="2F2B28"/>
+                </a:solidFill>
+              </a:rPr>
+              <a:t>Todo importe lleva fórmula y estado: validado (control de gestión), declarado (el equipo) o estimado.</a:t>
+            </a:r>
+          </a:p>
+          <a:p>
+            <a:pPr marL="285750" indent="-285750">
+              <a:spcAft>
+                <a:spcPts val="400"/>
+              </a:spcAft>
+              <a:buClr>
+                <a:srgbClr val="990F3D"/>
+              </a:buClr>
+              <a:buFont typeface="Arial"/>
+              <a:buChar char="•"/>
+            </a:pPr>
+            <a:r>
+              <a:rPr lang="es-ES" sz="1800" dirty="0">
+                <a:solidFill>
+                  <a:srgbClr val="2F2B28"/>
+                </a:solidFill>
+              </a:rPr>
+              <a:t>Las horas liberadas no son ahorro hasta que se materializan: baja un coste o se reasignan a una actividad con valor.</a:t>
+            </a:r>
+          </a:p>
+          <a:p>
+            <a:pPr marL="285750" indent="-285750">
+              <a:spcAft>
+                <a:spcPts val="400"/>
+              </a:spcAft>
+              <a:buClr>
+                <a:srgbClr val="990F3D"/>
+              </a:buClr>
+              <a:buFont typeface="Arial"/>
+              <a:buChar char="•"/>
+            </a:pPr>
+            <a:r>
+              <a:rPr lang="es-ES" sz="1800" dirty="0">
+                <a:solidFill>
+                  <a:srgbClr val="2F2B28"/>
+                </a:solidFill>
+              </a:rPr>
+              <a:t>El coste es completo: construcción, consumo, operación, supervisión humana y retirada.</a:t>
+            </a:r>
+          </a:p>
+          <a:p>
+            <a:pPr marL="285750" indent="-285750">
+              <a:spcAft>
+                <a:spcPts val="400"/>
+              </a:spcAft>
+              <a:buClr>
+                <a:srgbClr val="990F3D"/>
+              </a:buClr>
+              <a:buFont typeface="Arial"/>
+              <a:buChar char="•"/>
+            </a:pPr>
+            <a:r>
+              <a:rPr lang="es-ES" sz="1800" dirty="0">
+                <a:solidFill>
+                  <a:srgbClr val="2F2B28"/>
+                </a:solidFill>
+              </a:rPr>
+              <a:t>El índice de transformación usa ocho señales de evidencia para separar transformar de solo eficientar.</a:t>
+            </a:r>
+          </a:p>
+          <a:p>
+            <a:pPr marL="285750" indent="-285750">
+              <a:spcAft>
+                <a:spcPts val="400"/>
+              </a:spcAft>
+              <a:buClr>
+                <a:srgbClr val="990F3D"/>
+              </a:buClr>
+              <a:buFont typeface="Arial"/>
+              <a:buChar char="•"/>
+            </a:pPr>
+            <a:r>
+              <a:rPr lang="es-ES" sz="1800" dirty="0">
+                <a:solidFill>
+                  <a:srgbClr val="2F2B28"/>
+                </a:solidFill>
+              </a:rPr>
+              <a:t>Diez reglas de medición (documento 40). Ninguna cifra entra en el neto de la cartera sin su estado.</a:t>
             </a:r>
           </a:p>
         </p:txBody>
@@ -4639,7 +4806,7 @@
     <p:bg>
       <p:bgPr>
         <a:solidFill>
-          <a:srgbClr val="FBE2CD"/>
+          <a:srgbClr val="1A1817"/>
         </a:solidFill>
         <a:effectLst/>
       </p:bgPr>
@@ -4660,13 +4827,13 @@
       </p:grpSpPr>
       <p:sp>
         <p:nvSpPr>
-          <p:cNvPr id="198" name="Marca"/>
+          <p:cNvPr id="200" name="Marca"/>
           <p:cNvSpPr/>
           <p:nvPr/>
         </p:nvSpPr>
         <p:spPr>
           <a:xfrm>
-            <a:off x="609600" y="365760"/>
+            <a:off x="609600" y="2400000"/>
             <a:ext cx="182880" cy="182880"/>
           </a:xfrm>
           <a:prstGeom prst="rect">
@@ -4684,48 +4851,48 @@
       </p:sp>
       <p:sp>
         <p:nvSpPr>
-          <p:cNvPr id="199" name="Texto 199"/>
-          <p:cNvSpPr txBox="1"/>
-          <p:nvPr/>
-        </p:nvSpPr>
-        <p:spPr>
-          <a:xfrm>
-            <a:off x="838200" y="300000"/>
-            <a:ext cx="10500000" cy="320000"/>
-          </a:xfrm>
-          <a:prstGeom prst="rect">
-            <a:avLst/>
-          </a:prstGeom>
-          <a:noFill/>
-        </p:spPr>
-        <p:txBody>
-          <a:bodyPr wrap="square" anchor="ctr" lIns="45720" rIns="45720">
+          <p:cNvPr id="201" name="Texto 201"/>
+          <p:cNvSpPr txBox="1"/>
+          <p:nvPr/>
+        </p:nvSpPr>
+        <p:spPr>
+          <a:xfrm>
+            <a:off x="838200" y="2320000"/>
+            <a:ext cx="9000000" cy="400000"/>
+          </a:xfrm>
+          <a:prstGeom prst="rect">
+            <a:avLst/>
+          </a:prstGeom>
+          <a:noFill/>
+        </p:spPr>
+        <p:txBody>
+          <a:bodyPr wrap="square" anchor="t" lIns="45720" rIns="45720">
             <a:noAutofit/>
           </a:bodyPr>
           <a:lstStyle/>
           <a:p>
             <a:pPr algn="l"/>
             <a:r>
-              <a:rPr lang="es-ES" sz="1400" b="1" dirty="0">
-                <a:solidFill>
-                  <a:srgbClr val="1A1817"/>
-                </a:solidFill>
-              </a:rPr>
-              <a:t>SEVEN-G · CURSO · EMPRESA · AUTOCONSULTORÍA</a:t>
-            </a:r>
-          </a:p>
-        </p:txBody>
-      </p:sp>
-      <p:sp>
-        <p:nvSpPr>
-          <p:cNvPr id="200" name="Texto 200"/>
-          <p:cNvSpPr txBox="1"/>
-          <p:nvPr/>
-        </p:nvSpPr>
-        <p:spPr>
-          <a:xfrm>
-            <a:off x="609600" y="700000"/>
-            <a:ext cx="10972800" cy="650000"/>
+              <a:rPr lang="es-ES" sz="1600" b="1" dirty="0">
+                <a:solidFill>
+                  <a:srgbClr val="F3CFB2"/>
+                </a:solidFill>
+              </a:rPr>
+              <a:t>AUTOCONSULTORÍA</a:t>
+            </a:r>
+          </a:p>
+        </p:txBody>
+      </p:sp>
+      <p:sp>
+        <p:nvSpPr>
+          <p:cNvPr id="202" name="Texto 202"/>
+          <p:cNvSpPr txBox="1"/>
+          <p:nvPr/>
+        </p:nvSpPr>
+        <p:spPr>
+          <a:xfrm>
+            <a:off x="609600" y="2850000"/>
+            <a:ext cx="10972800" cy="1400000"/>
           </a:xfrm>
           <a:prstGeom prst="rect">
             <a:avLst/>
@@ -4740,26 +4907,26 @@
           <a:p>
             <a:pPr algn="l"/>
             <a:r>
-              <a:rPr lang="es-ES" sz="2700" b="1" dirty="0">
-                <a:solidFill>
-                  <a:srgbClr val="990F3D"/>
-                </a:solidFill>
-              </a:rPr>
-              <a:t>Antes de empezar: lo que la compañía necesita</a:t>
-            </a:r>
-          </a:p>
-        </p:txBody>
-      </p:sp>
-      <p:sp>
-        <p:nvSpPr>
-          <p:cNvPr id="197" name="Texto 197"/>
-          <p:cNvSpPr txBox="1"/>
-          <p:nvPr/>
-        </p:nvSpPr>
-        <p:spPr>
-          <a:xfrm>
-            <a:off x="609600" y="1750000"/>
-            <a:ext cx="10972800" cy="4400000"/>
+              <a:rPr lang="es-ES" sz="4000" b="1" dirty="0">
+                <a:solidFill>
+                  <a:srgbClr val="FBE2CD"/>
+                </a:solidFill>
+              </a:rPr>
+              <a:t>Implantarlo en su compañía, por sus propios medios</a:t>
+            </a:r>
+          </a:p>
+        </p:txBody>
+      </p:sp>
+      <p:sp>
+        <p:nvSpPr>
+          <p:cNvPr id="203" name="Texto 203"/>
+          <p:cNvSpPr txBox="1"/>
+          <p:nvPr/>
+        </p:nvSpPr>
+        <p:spPr>
+          <a:xfrm>
+            <a:off x="609600" y="4400000"/>
+            <a:ext cx="10500000" cy="900000"/>
           </a:xfrm>
           <a:prstGeom prst="rect">
             <a:avLst/>
@@ -4772,123 +4939,14 @@
           </a:bodyPr>
           <a:lstStyle/>
           <a:p>
-            <a:pPr marL="285750" indent="-285750">
-              <a:spcAft>
-                <a:spcPts val="400"/>
-              </a:spcAft>
-              <a:buClr>
-                <a:srgbClr val="990F3D"/>
-              </a:buClr>
-              <a:buFont typeface="Arial"/>
-              <a:buChar char="•"/>
-            </a:pPr>
-            <a:r>
-              <a:rPr lang="es-ES" sz="1800" dirty="0">
-                <a:solidFill>
-                  <a:srgbClr val="2F2B28"/>
-                </a:solidFill>
-              </a:rPr>
-              <a:t>Mandato de implantación firmado por la primera línea ejecutiva, con objetivo, perímetro y plazo (P32).</a:t>
-            </a:r>
-          </a:p>
-          <a:p>
-            <a:pPr marL="285750" indent="-285750">
-              <a:spcAft>
-                <a:spcPts val="400"/>
-              </a:spcAft>
-              <a:buClr>
-                <a:srgbClr val="990F3D"/>
-              </a:buClr>
-              <a:buFont typeface="Arial"/>
-              <a:buChar char="•"/>
-            </a:pPr>
-            <a:r>
-              <a:rPr lang="es-ES" sz="1800" dirty="0">
-                <a:solidFill>
-                  <a:srgbClr val="2F2B28"/>
-                </a:solidFill>
-              </a:rPr>
-              <a:t>El consejo conoce el plan y reserva una sesión hacia la semana 12 para aprobar la dirección (C2).</a:t>
-            </a:r>
-          </a:p>
-          <a:p>
-            <a:pPr marL="285750" indent="-285750">
-              <a:spcAft>
-                <a:spcPts val="400"/>
-              </a:spcAft>
-              <a:buClr>
-                <a:srgbClr val="990F3D"/>
-              </a:buClr>
-              <a:buFont typeface="Arial"/>
-              <a:buChar char="•"/>
-            </a:pPr>
-            <a:r>
-              <a:rPr lang="es-ES" sz="1800" dirty="0">
-                <a:solidFill>
-                  <a:srgbClr val="2F2B28"/>
-                </a:solidFill>
-              </a:rPr>
-              <a:t>Un responsable de implantación con dedicación real y un equipo núcleo: negocio, tecnología, datos, riesgos, cumplimiento, seguridad, personas y control de gestión.</a:t>
-            </a:r>
-          </a:p>
-          <a:p>
-            <a:pPr marL="285750" indent="-285750">
-              <a:spcAft>
-                <a:spcPts val="400"/>
-              </a:spcAft>
-              <a:buClr>
-                <a:srgbClr val="990F3D"/>
-              </a:buClr>
-              <a:buFont typeface="Arial"/>
-              <a:buChar char="•"/>
-            </a:pPr>
-            <a:r>
-              <a:rPr lang="es-ES" sz="1800" dirty="0">
-                <a:solidFill>
-                  <a:srgbClr val="2F2B28"/>
-                </a:solidFill>
-              </a:rPr>
-              <a:t>Auditoría interna informada y asesoría jurídica disponible para la clasificación regulatoria.</a:t>
-            </a:r>
-          </a:p>
-          <a:p>
-            <a:pPr marL="285750" indent="-285750">
-              <a:spcAft>
-                <a:spcPts val="400"/>
-              </a:spcAft>
-              <a:buClr>
-                <a:srgbClr val="990F3D"/>
-              </a:buClr>
-              <a:buFont typeface="Arial"/>
-              <a:buChar char="•"/>
-            </a:pPr>
-            <a:r>
-              <a:rPr lang="es-ES" sz="1800" dirty="0">
-                <a:solidFill>
-                  <a:srgbClr val="2F2B28"/>
-                </a:solidFill>
-              </a:rPr>
-              <a:t>Un soporte de registro: T01, o una hoja de cálculo con los mismos campos.</a:t>
-            </a:r>
-          </a:p>
-          <a:p>
-            <a:pPr marL="285750" indent="-285750">
-              <a:spcAft>
-                <a:spcPts val="400"/>
-              </a:spcAft>
-              <a:buClr>
-                <a:srgbClr val="990F3D"/>
-              </a:buClr>
-              <a:buFont typeface="Arial"/>
-              <a:buChar char="•"/>
-            </a:pPr>
-            <a:r>
-              <a:rPr lang="es-ES" sz="1800" dirty="0">
-                <a:solidFill>
-                  <a:srgbClr val="2F2B28"/>
-                </a:solidFill>
-              </a:rPr>
-              <a:t>Sin moratoria: la actividad de IA sigue; solo se detiene lo que el diagnóstico señale como riesgo inaceptable.</a:t>
+            <a:pPr algn="l"/>
+            <a:r>
+              <a:rPr lang="es-ES" sz="1700" dirty="0">
+                <a:solidFill>
+                  <a:srgbClr val="F3CFB2"/>
+                </a:solidFill>
+              </a:rPr>
+              <a:t>El marco está pensado para aplicarse sin contratar a nadie. Esto es lo que hace falta y en qué orden.</a:t>
             </a:r>
           </a:p>
         </p:txBody>
@@ -4928,7 +4986,7 @@
       </p:grpSpPr>
       <p:sp>
         <p:nvSpPr>
-          <p:cNvPr id="203" name="Marca"/>
+          <p:cNvPr id="205" name="Marca"/>
           <p:cNvSpPr/>
           <p:nvPr/>
         </p:nvSpPr>
@@ -4952,7 +5010,7 @@
       </p:sp>
       <p:sp>
         <p:nvSpPr>
-          <p:cNvPr id="204" name="Texto 204"/>
+          <p:cNvPr id="206" name="Texto 206"/>
           <p:cNvSpPr txBox="1"/>
           <p:nvPr/>
         </p:nvSpPr>
@@ -4986,7 +5044,7 @@
       </p:sp>
       <p:sp>
         <p:nvSpPr>
-          <p:cNvPr id="205" name="Texto 205"/>
+          <p:cNvPr id="207" name="Texto 207"/>
           <p:cNvSpPr txBox="1"/>
           <p:nvPr/>
         </p:nvSpPr>
@@ -5013,14 +5071,14 @@
                   <a:srgbClr val="990F3D"/>
                 </a:solidFill>
               </a:rPr>
-              <a:t>Lite o Enterprise: proporcionalidad</a:t>
-            </a:r>
-          </a:p>
-        </p:txBody>
-      </p:sp>
-      <p:sp>
-        <p:nvSpPr>
-          <p:cNvPr id="201" name="Texto 201"/>
+              <a:t>Antes de empezar: lo que la compañía necesita</a:t>
+            </a:r>
+          </a:p>
+        </p:txBody>
+      </p:sp>
+      <p:sp>
+        <p:nvSpPr>
+          <p:cNvPr id="204" name="Texto 204"/>
           <p:cNvSpPr txBox="1"/>
           <p:nvPr/>
         </p:nvSpPr>
@@ -5056,7 +5114,7 @@
                   <a:srgbClr val="2F2B28"/>
                 </a:solidFill>
               </a:rPr>
-              <a:t>Dos decisiones distintas: el alcance de implantación es de la compañía; la intensidad, de cada iniciativa.</a:t>
+              <a:t>Mandato de implantación firmado por la primera línea ejecutiva, con objetivo, perímetro y plazo (P32).</a:t>
             </a:r>
           </a:p>
           <a:p>
@@ -5076,7 +5134,7 @@
                   <a:srgbClr val="2F2B28"/>
                 </a:solidFill>
               </a:rPr>
-              <a:t>El tamaño no decide. Basta un criterio Enterprise en una iniciativa: alto riesgo, decisiones sobre personas, exposición directa, agentes que actúan, datos protegidos, función crítica, Transformar o inversión alta.</a:t>
+              <a:t>El consejo conoce el plan y reserva una sesión hacia la semana 12 para aprobar la dirección (C2).</a:t>
             </a:r>
           </a:p>
           <a:p>
@@ -5096,7 +5154,7 @@
                   <a:srgbClr val="2F2B28"/>
                 </a:solidFill>
               </a:rPr>
-              <a:t>Ruta mínima Lite: consejo con punto de IA trimestral, comité de dirección mensual y oficina de IA de una persona a tiempo parcial.</a:t>
+              <a:t>Un responsable de implantación con dedicación real y un equipo núcleo: negocio, tecnología, datos, riesgos, cumplimiento, seguridad, personas y control de gestión.</a:t>
             </a:r>
           </a:p>
           <a:p>
@@ -5116,7 +5174,7 @@
                   <a:srgbClr val="2F2B28"/>
                 </a:solidFill>
               </a:rPr>
-              <a:t>En Lite las puertas se agrupan (G0–G2 juntas, G4–G5 juntas, R6 semestral). G3 va siempre por separado.</a:t>
+              <a:t>Auditoría interna informada y asesoría jurídica disponible para la clasificación regulatoria.</a:t>
             </a:r>
           </a:p>
           <a:p>
@@ -5136,41 +5194,27 @@
                   <a:srgbClr val="2F2B28"/>
                 </a:solidFill>
               </a:rPr>
-              <a:t>Ninguna evidencia obligatoria se omite en Lite: se simplifica. El inventario nunca se reduce.</a:t>
-            </a:r>
-          </a:p>
-        </p:txBody>
-      </p:sp>
-      <p:sp>
-        <p:nvSpPr>
-          <p:cNvPr id="202" name="Texto 202"/>
-          <p:cNvSpPr txBox="1"/>
-          <p:nvPr/>
-        </p:nvSpPr>
-        <p:spPr>
-          <a:xfrm>
-            <a:off x="609600" y="6250000"/>
-            <a:ext cx="10972800" cy="450000"/>
-          </a:xfrm>
-          <a:prstGeom prst="rect">
-            <a:avLst/>
-          </a:prstGeom>
-          <a:noFill/>
-        </p:spPr>
-        <p:txBody>
-          <a:bodyPr wrap="square" anchor="t" lIns="45720" rIns="45720">
-            <a:noAutofit/>
-          </a:bodyPr>
-          <a:lstStyle/>
-          <a:p>
-            <a:pPr algn="l"/>
-            <a:r>
-              <a:rPr lang="es-ES" sz="1400" b="1" dirty="0">
-                <a:solidFill>
-                  <a:srgbClr val="0F5499"/>
-                </a:solidFill>
-              </a:rPr>
-              <a:t>Documento 90, sección 2.4, y matriz de obligatoriedad (documento 94).</a:t>
+              <a:t>Un soporte de registro: T01, o una hoja de cálculo con los mismos campos.</a:t>
+            </a:r>
+          </a:p>
+          <a:p>
+            <a:pPr marL="285750" indent="-285750">
+              <a:spcAft>
+                <a:spcPts val="400"/>
+              </a:spcAft>
+              <a:buClr>
+                <a:srgbClr val="990F3D"/>
+              </a:buClr>
+              <a:buFont typeface="Arial"/>
+              <a:buChar char="•"/>
+            </a:pPr>
+            <a:r>
+              <a:rPr lang="es-ES" sz="1800" dirty="0">
+                <a:solidFill>
+                  <a:srgbClr val="2F2B28"/>
+                </a:solidFill>
+              </a:rPr>
+              <a:t>Sin moratoria: la actividad de IA sigue; solo se detiene lo que el diagnóstico señale como riesgo inaceptable.</a:t>
             </a:r>
           </a:p>
         </p:txBody>
@@ -5210,7 +5254,7 @@
       </p:grpSpPr>
       <p:sp>
         <p:nvSpPr>
-          <p:cNvPr id="216" name="Marca"/>
+          <p:cNvPr id="210" name="Marca"/>
           <p:cNvSpPr/>
           <p:nvPr/>
         </p:nvSpPr>
@@ -5234,7 +5278,7 @@
       </p:sp>
       <p:sp>
         <p:nvSpPr>
-          <p:cNvPr id="217" name="Texto 217"/>
+          <p:cNvPr id="211" name="Texto 211"/>
           <p:cNvSpPr txBox="1"/>
           <p:nvPr/>
         </p:nvSpPr>
@@ -5268,7 +5312,7 @@
       </p:sp>
       <p:sp>
         <p:nvSpPr>
-          <p:cNvPr id="218" name="Texto 218"/>
+          <p:cNvPr id="212" name="Texto 212"/>
           <p:cNvSpPr txBox="1"/>
           <p:nvPr/>
         </p:nvSpPr>
@@ -5295,20 +5339,143 @@
                   <a:srgbClr val="990F3D"/>
                 </a:solidFill>
               </a:rPr>
-              <a:t>El plan de 90 días</a:t>
-            </a:r>
-          </a:p>
-        </p:txBody>
-      </p:sp>
-      <p:sp>
-        <p:nvSpPr>
-          <p:cNvPr id="219" name="Texto 219"/>
-          <p:cNvSpPr txBox="1"/>
-          <p:nvPr/>
-        </p:nvSpPr>
-        <p:spPr>
-          <a:xfrm>
-            <a:off x="609600" y="1330000"/>
+              <a:t>Lite o Enterprise: proporcionalidad</a:t>
+            </a:r>
+          </a:p>
+        </p:txBody>
+      </p:sp>
+      <p:sp>
+        <p:nvSpPr>
+          <p:cNvPr id="208" name="Texto 208"/>
+          <p:cNvSpPr txBox="1"/>
+          <p:nvPr/>
+        </p:nvSpPr>
+        <p:spPr>
+          <a:xfrm>
+            <a:off x="609600" y="1750000"/>
+            <a:ext cx="10972800" cy="4400000"/>
+          </a:xfrm>
+          <a:prstGeom prst="rect">
+            <a:avLst/>
+          </a:prstGeom>
+          <a:noFill/>
+        </p:spPr>
+        <p:txBody>
+          <a:bodyPr wrap="square" anchor="t" lIns="45720" rIns="45720">
+            <a:noAutofit/>
+          </a:bodyPr>
+          <a:lstStyle/>
+          <a:p>
+            <a:pPr marL="285750" indent="-285750">
+              <a:spcAft>
+                <a:spcPts val="400"/>
+              </a:spcAft>
+              <a:buClr>
+                <a:srgbClr val="990F3D"/>
+              </a:buClr>
+              <a:buFont typeface="Arial"/>
+              <a:buChar char="•"/>
+            </a:pPr>
+            <a:r>
+              <a:rPr lang="es-ES" sz="1800" dirty="0">
+                <a:solidFill>
+                  <a:srgbClr val="2F2B28"/>
+                </a:solidFill>
+              </a:rPr>
+              <a:t>Dos decisiones distintas: el alcance de implantación es de la compañía; la intensidad, de cada iniciativa.</a:t>
+            </a:r>
+          </a:p>
+          <a:p>
+            <a:pPr marL="285750" indent="-285750">
+              <a:spcAft>
+                <a:spcPts val="400"/>
+              </a:spcAft>
+              <a:buClr>
+                <a:srgbClr val="990F3D"/>
+              </a:buClr>
+              <a:buFont typeface="Arial"/>
+              <a:buChar char="•"/>
+            </a:pPr>
+            <a:r>
+              <a:rPr lang="es-ES" sz="1800" dirty="0">
+                <a:solidFill>
+                  <a:srgbClr val="2F2B28"/>
+                </a:solidFill>
+              </a:rPr>
+              <a:t>El tamaño no decide. Basta un criterio Enterprise en una iniciativa: alto riesgo, decisiones sobre personas, exposición directa, agentes que actúan, datos protegidos, función crítica, Transformar o inversión alta.</a:t>
+            </a:r>
+          </a:p>
+          <a:p>
+            <a:pPr marL="285750" indent="-285750">
+              <a:spcAft>
+                <a:spcPts val="400"/>
+              </a:spcAft>
+              <a:buClr>
+                <a:srgbClr val="990F3D"/>
+              </a:buClr>
+              <a:buFont typeface="Arial"/>
+              <a:buChar char="•"/>
+            </a:pPr>
+            <a:r>
+              <a:rPr lang="es-ES" sz="1800" dirty="0">
+                <a:solidFill>
+                  <a:srgbClr val="2F2B28"/>
+                </a:solidFill>
+              </a:rPr>
+              <a:t>Ruta mínima Lite: consejo con punto de IA trimestral, comité de dirección mensual y oficina de IA de una persona a tiempo parcial.</a:t>
+            </a:r>
+          </a:p>
+          <a:p>
+            <a:pPr marL="285750" indent="-285750">
+              <a:spcAft>
+                <a:spcPts val="400"/>
+              </a:spcAft>
+              <a:buClr>
+                <a:srgbClr val="990F3D"/>
+              </a:buClr>
+              <a:buFont typeface="Arial"/>
+              <a:buChar char="•"/>
+            </a:pPr>
+            <a:r>
+              <a:rPr lang="es-ES" sz="1800" dirty="0">
+                <a:solidFill>
+                  <a:srgbClr val="2F2B28"/>
+                </a:solidFill>
+              </a:rPr>
+              <a:t>En Lite las puertas se agrupan (G0–G2 juntas, G4–G5 juntas, R6 semestral). G3 va siempre por separado.</a:t>
+            </a:r>
+          </a:p>
+          <a:p>
+            <a:pPr marL="285750" indent="-285750">
+              <a:spcAft>
+                <a:spcPts val="400"/>
+              </a:spcAft>
+              <a:buClr>
+                <a:srgbClr val="990F3D"/>
+              </a:buClr>
+              <a:buFont typeface="Arial"/>
+              <a:buChar char="•"/>
+            </a:pPr>
+            <a:r>
+              <a:rPr lang="es-ES" sz="1800" dirty="0">
+                <a:solidFill>
+                  <a:srgbClr val="2F2B28"/>
+                </a:solidFill>
+              </a:rPr>
+              <a:t>Ninguna evidencia obligatoria se omite en Lite: se simplifica. El inventario nunca se reduce.</a:t>
+            </a:r>
+          </a:p>
+        </p:txBody>
+      </p:sp>
+      <p:sp>
+        <p:nvSpPr>
+          <p:cNvPr id="209" name="Texto 209"/>
+          <p:cNvSpPr txBox="1"/>
+          <p:nvPr/>
+        </p:nvSpPr>
+        <p:spPr>
+          <a:xfrm>
+            <a:off x="609600" y="6250000"/>
             <a:ext cx="10972800" cy="450000"/>
           </a:xfrm>
           <a:prstGeom prst="rect">
@@ -5324,394 +5491,12 @@
           <a:p>
             <a:pPr algn="l"/>
             <a:r>
-              <a:rPr lang="es-ES" sz="1500" dirty="0">
-                <a:solidFill>
-                  <a:srgbClr val="564D47"/>
-                </a:solidFill>
-              </a:rPr>
-              <a:t>Tres meses, tres resultados y una decisión del consejo</a:t>
-            </a:r>
-          </a:p>
-        </p:txBody>
-      </p:sp>
-      <p:sp>
-        <p:nvSpPr>
-          <p:cNvPr id="206" name="Caja 206"/>
-          <p:cNvSpPr/>
-          <p:nvPr/>
-        </p:nvSpPr>
-        <p:spPr>
-          <a:xfrm>
-            <a:off x="609600" y="2050000"/>
-            <a:ext cx="3577600" cy="800000"/>
-          </a:xfrm>
-          <a:prstGeom prst="roundRect">
-            <a:avLst>
-              <a:gd name="adj" fmla="val 6000"/>
-            </a:avLst>
-          </a:prstGeom>
-          <a:solidFill>
-            <a:srgbClr val="0F5499"/>
-          </a:solidFill>
-          <a:ln>
-            <a:noFill/>
-          </a:ln>
-        </p:spPr>
-        <p:txBody>
-          <a:bodyPr wrap="square" anchor="ctr" lIns="45720" rIns="45720">
-            <a:noAutofit/>
-          </a:bodyPr>
-          <a:lstStyle/>
-          <a:p>
-            <a:pPr algn="ctr"/>
-            <a:r>
-              <a:rPr lang="es-ES" sz="1700" b="1" dirty="0">
-                <a:solidFill>
-                  <a:srgbClr val="FFFFFF"/>
-                </a:solidFill>
-              </a:rPr>
-              <a:t>Mes 1 · Diagnóstico (C1)</a:t>
-            </a:r>
-          </a:p>
-        </p:txBody>
-      </p:sp>
-      <p:sp>
-        <p:nvSpPr>
-          <p:cNvPr id="207" name="Caja 207"/>
-          <p:cNvSpPr/>
-          <p:nvPr/>
-        </p:nvSpPr>
-        <p:spPr>
-          <a:xfrm>
-            <a:off x="609600" y="2790000"/>
-            <a:ext cx="3577600" cy="2500000"/>
-          </a:xfrm>
-          <a:prstGeom prst="roundRect">
-            <a:avLst>
-              <a:gd name="adj" fmla="val 6000"/>
-            </a:avLst>
-          </a:prstGeom>
-          <a:solidFill>
-            <a:srgbClr val="F3CFB2"/>
-          </a:solidFill>
-          <a:ln>
-            <a:noFill/>
-          </a:ln>
-        </p:spPr>
-        <p:txBody>
-          <a:bodyPr wrap="square" anchor="ctr" lIns="45720" rIns="45720">
-            <a:noAutofit/>
-          </a:bodyPr>
-          <a:lstStyle/>
-          <a:p>
-            <a:pPr algn="ctr"/>
-            <a:r>
-              <a:rPr lang="es-ES" sz="1000" b="1" dirty="0">
-                <a:solidFill>
-                  <a:srgbClr val="2F2B28"/>
-                </a:solidFill>
-              </a:rPr>
-              <a:t/>
-            </a:r>
-          </a:p>
-        </p:txBody>
-      </p:sp>
-      <p:sp>
-        <p:nvSpPr>
-          <p:cNvPr id="208" name="Texto 208"/>
-          <p:cNvSpPr txBox="1"/>
-          <p:nvPr/>
-        </p:nvSpPr>
-        <p:spPr>
-          <a:xfrm>
-            <a:off x="649600" y="2890000"/>
-            <a:ext cx="3497600" cy="2340000"/>
-          </a:xfrm>
-          <a:prstGeom prst="rect">
-            <a:avLst/>
-          </a:prstGeom>
-          <a:noFill/>
-        </p:spPr>
-        <p:txBody>
-          <a:bodyPr wrap="square" anchor="t" lIns="45720" rIns="45720">
-            <a:noAutofit/>
-          </a:bodyPr>
-          <a:lstStyle/>
-          <a:p>
-            <a:pPr algn="l"/>
-            <a:r>
-              <a:rPr lang="es-ES" sz="1300" dirty="0">
-                <a:solidFill>
-                  <a:srgbClr val="2F2B28"/>
-                </a:solidFill>
-              </a:rPr>
-              <a:t>Mandato (P32). Inventario de toda la IA, también la de terceros y la no autorizada, con declaración de completitud. Madurez con evidencia (T15) e índice de transformación (T14). Hito 1: informe C1 verificado (P33).</a:t>
-            </a:r>
-          </a:p>
-        </p:txBody>
-      </p:sp>
-      <p:sp>
-        <p:nvSpPr>
-          <p:cNvPr id="209" name="Caja 209"/>
-          <p:cNvSpPr/>
-          <p:nvPr/>
-        </p:nvSpPr>
-        <p:spPr>
-          <a:xfrm>
-            <a:off x="4307200" y="2050000"/>
-            <a:ext cx="3577600" cy="800000"/>
-          </a:xfrm>
-          <a:prstGeom prst="roundRect">
-            <a:avLst>
-              <a:gd name="adj" fmla="val 6000"/>
-            </a:avLst>
-          </a:prstGeom>
-          <a:solidFill>
-            <a:srgbClr val="593380"/>
-          </a:solidFill>
-          <a:ln>
-            <a:noFill/>
-          </a:ln>
-        </p:spPr>
-        <p:txBody>
-          <a:bodyPr wrap="square" anchor="ctr" lIns="45720" rIns="45720">
-            <a:noAutofit/>
-          </a:bodyPr>
-          <a:lstStyle/>
-          <a:p>
-            <a:pPr algn="ctr"/>
-            <a:r>
-              <a:rPr lang="es-ES" sz="1700" b="1" dirty="0">
-                <a:solidFill>
-                  <a:srgbClr val="FFFFFF"/>
-                </a:solidFill>
-              </a:rPr>
-              <a:t>Mes 2 · Riesgos y oportunidades</a:t>
-            </a:r>
-          </a:p>
-        </p:txBody>
-      </p:sp>
-      <p:sp>
-        <p:nvSpPr>
-          <p:cNvPr id="210" name="Caja 210"/>
-          <p:cNvSpPr/>
-          <p:nvPr/>
-        </p:nvSpPr>
-        <p:spPr>
-          <a:xfrm>
-            <a:off x="4307200" y="2790000"/>
-            <a:ext cx="3577600" cy="2500000"/>
-          </a:xfrm>
-          <a:prstGeom prst="roundRect">
-            <a:avLst>
-              <a:gd name="adj" fmla="val 6000"/>
-            </a:avLst>
-          </a:prstGeom>
-          <a:solidFill>
-            <a:srgbClr val="F3CFB2"/>
-          </a:solidFill>
-          <a:ln>
-            <a:noFill/>
-          </a:ln>
-        </p:spPr>
-        <p:txBody>
-          <a:bodyPr wrap="square" anchor="ctr" lIns="45720" rIns="45720">
-            <a:noAutofit/>
-          </a:bodyPr>
-          <a:lstStyle/>
-          <a:p>
-            <a:pPr algn="ctr"/>
-            <a:r>
-              <a:rPr lang="es-ES" sz="1000" b="1" dirty="0">
-                <a:solidFill>
-                  <a:srgbClr val="2F2B28"/>
-                </a:solidFill>
-              </a:rPr>
-              <a:t/>
-            </a:r>
-          </a:p>
-        </p:txBody>
-      </p:sp>
-      <p:sp>
-        <p:nvSpPr>
-          <p:cNvPr id="211" name="Texto 211"/>
-          <p:cNvSpPr txBox="1"/>
-          <p:nvPr/>
-        </p:nvSpPr>
-        <p:spPr>
-          <a:xfrm>
-            <a:off x="4347200" y="2890000"/>
-            <a:ext cx="3497600" cy="2340000"/>
-          </a:xfrm>
-          <a:prstGeom prst="rect">
-            <a:avLst/>
-          </a:prstGeom>
-          <a:noFill/>
-        </p:spPr>
-        <p:txBody>
-          <a:bodyPr wrap="square" anchor="t" lIns="45720" rIns="45720">
-            <a:noAutofit/>
-          </a:bodyPr>
-          <a:lstStyle/>
-          <a:p>
-            <a:pPr algn="l"/>
-            <a:r>
-              <a:rPr lang="es-ES" sz="1300" dirty="0">
-                <a:solidFill>
-                  <a:srgbClr val="2F2B28"/>
-                </a:solidFill>
-              </a:rPr>
-              <a:t>Talleres por esfera: riesgos de lo que ya existe (P11, P12) y oportunidades con valor estimado (P06, P07). Borrador de tesis de IA, ambición y apetito de riesgo (P35). Hito 2: propuesta de C2 lista para el consejo.</a:t>
-            </a:r>
-          </a:p>
-        </p:txBody>
-      </p:sp>
-      <p:sp>
-        <p:nvSpPr>
-          <p:cNvPr id="212" name="Caja 212"/>
-          <p:cNvSpPr/>
-          <p:nvPr/>
-        </p:nvSpPr>
-        <p:spPr>
-          <a:xfrm>
-            <a:off x="8004800" y="2050000"/>
-            <a:ext cx="3577600" cy="800000"/>
-          </a:xfrm>
-          <a:prstGeom prst="roundRect">
-            <a:avLst>
-              <a:gd name="adj" fmla="val 6000"/>
-            </a:avLst>
-          </a:prstGeom>
-          <a:solidFill>
-            <a:srgbClr val="0D7680"/>
-          </a:solidFill>
-          <a:ln>
-            <a:noFill/>
-          </a:ln>
-        </p:spPr>
-        <p:txBody>
-          <a:bodyPr wrap="square" anchor="ctr" lIns="45720" rIns="45720">
-            <a:noAutofit/>
-          </a:bodyPr>
-          <a:lstStyle/>
-          <a:p>
-            <a:pPr algn="ctr"/>
-            <a:r>
-              <a:rPr lang="es-ES" sz="1700" b="1" dirty="0">
-                <a:solidFill>
-                  <a:srgbClr val="FFFFFF"/>
-                </a:solidFill>
-              </a:rPr>
-              <a:t>Mes 3 · Gobierno y cartera</a:t>
-            </a:r>
-          </a:p>
-        </p:txBody>
-      </p:sp>
-      <p:sp>
-        <p:nvSpPr>
-          <p:cNvPr id="213" name="Caja 213"/>
-          <p:cNvSpPr/>
-          <p:nvPr/>
-        </p:nvSpPr>
-        <p:spPr>
-          <a:xfrm>
-            <a:off x="8004800" y="2790000"/>
-            <a:ext cx="3577600" cy="2500000"/>
-          </a:xfrm>
-          <a:prstGeom prst="roundRect">
-            <a:avLst>
-              <a:gd name="adj" fmla="val 6000"/>
-            </a:avLst>
-          </a:prstGeom>
-          <a:solidFill>
-            <a:srgbClr val="F3CFB2"/>
-          </a:solidFill>
-          <a:ln>
-            <a:noFill/>
-          </a:ln>
-        </p:spPr>
-        <p:txBody>
-          <a:bodyPr wrap="square" anchor="ctr" lIns="45720" rIns="45720">
-            <a:noAutofit/>
-          </a:bodyPr>
-          <a:lstStyle/>
-          <a:p>
-            <a:pPr algn="ctr"/>
-            <a:r>
-              <a:rPr lang="es-ES" sz="1000" b="1" dirty="0">
-                <a:solidFill>
-                  <a:srgbClr val="2F2B28"/>
-                </a:solidFill>
-              </a:rPr>
-              <a:t/>
-            </a:r>
-          </a:p>
-        </p:txBody>
-      </p:sp>
-      <p:sp>
-        <p:nvSpPr>
-          <p:cNvPr id="214" name="Texto 214"/>
-          <p:cNvSpPr txBox="1"/>
-          <p:nvPr/>
-        </p:nvSpPr>
-        <p:spPr>
-          <a:xfrm>
-            <a:off x="8044800" y="2890000"/>
-            <a:ext cx="3497600" cy="2340000"/>
-          </a:xfrm>
-          <a:prstGeom prst="rect">
-            <a:avLst/>
-          </a:prstGeom>
-          <a:noFill/>
-        </p:spPr>
-        <p:txBody>
-          <a:bodyPr wrap="square" anchor="t" lIns="45720" rIns="45720">
-            <a:noAutofit/>
-          </a:bodyPr>
-          <a:lstStyle/>
-          <a:p>
-            <a:pPr algn="l"/>
-            <a:r>
-              <a:rPr lang="es-ES" sz="1300" dirty="0">
-                <a:solidFill>
-                  <a:srgbClr val="2F2B28"/>
-                </a:solidFill>
-              </a:rPr>
-              <a:t>Órganos y roles sin incompatibilidades (P38, P03), puertas y políticas, primer panel con datos reales (T17) y cartera priorizada (P36). El consejo aprueba C2 y el comité, C3. Hito 3: régimen ordinario.</a:t>
-            </a:r>
-          </a:p>
-        </p:txBody>
-      </p:sp>
-      <p:sp>
-        <p:nvSpPr>
-          <p:cNvPr id="215" name="Texto 215"/>
-          <p:cNvSpPr txBox="1"/>
-          <p:nvPr/>
-        </p:nvSpPr>
-        <p:spPr>
-          <a:xfrm>
-            <a:off x="609600" y="6150000"/>
-            <a:ext cx="10972800" cy="500000"/>
-          </a:xfrm>
-          <a:prstGeom prst="rect">
-            <a:avLst/>
-          </a:prstGeom>
-          <a:noFill/>
-        </p:spPr>
-        <p:txBody>
-          <a:bodyPr wrap="square" anchor="t" lIns="45720" rIns="45720">
-            <a:noAutofit/>
-          </a:bodyPr>
-          <a:lstStyle/>
-          <a:p>
-            <a:pPr algn="l"/>
-            <a:r>
               <a:rPr lang="es-ES" sz="1400" b="1" dirty="0">
                 <a:solidFill>
                   <a:srgbClr val="0F5499"/>
                 </a:solidFill>
               </a:rPr>
-              <a:t>Desde la semana 13, ninguna iniciativa nueva consume presupuesto sin pasar por G0.</a:t>
+              <a:t>Documento 90, sección 2.4, y matriz de obligatoriedad (documento 94).</a:t>
             </a:r>
           </a:p>
         </p:txBody>
@@ -5751,7 +5536,7 @@
       </p:grpSpPr>
       <p:sp>
         <p:nvSpPr>
-          <p:cNvPr id="221" name="Marca"/>
+          <p:cNvPr id="223" name="Marca"/>
           <p:cNvSpPr/>
           <p:nvPr/>
         </p:nvSpPr>
@@ -5775,7 +5560,7 @@
       </p:sp>
       <p:sp>
         <p:nvSpPr>
-          <p:cNvPr id="222" name="Texto 222"/>
+          <p:cNvPr id="224" name="Texto 224"/>
           <p:cNvSpPr txBox="1"/>
           <p:nvPr/>
         </p:nvSpPr>
@@ -5809,7 +5594,7 @@
       </p:sp>
       <p:sp>
         <p:nvSpPr>
-          <p:cNvPr id="223" name="Texto 223"/>
+          <p:cNvPr id="225" name="Texto 225"/>
           <p:cNvSpPr txBox="1"/>
           <p:nvPr/>
         </p:nvSpPr>
@@ -5836,21 +5621,21 @@
                   <a:srgbClr val="990F3D"/>
                 </a:solidFill>
               </a:rPr>
-              <a:t>Tres garantías que no se negocian, ni en pequeño</a:t>
-            </a:r>
-          </a:p>
-        </p:txBody>
-      </p:sp>
-      <p:sp>
-        <p:nvSpPr>
-          <p:cNvPr id="220" name="Texto 220"/>
-          <p:cNvSpPr txBox="1"/>
-          <p:nvPr/>
-        </p:nvSpPr>
-        <p:spPr>
-          <a:xfrm>
-            <a:off x="609600" y="1750000"/>
-            <a:ext cx="10972800" cy="4400000"/>
+              <a:t>El plan de 90 días</a:t>
+            </a:r>
+          </a:p>
+        </p:txBody>
+      </p:sp>
+      <p:sp>
+        <p:nvSpPr>
+          <p:cNvPr id="226" name="Texto 226"/>
+          <p:cNvSpPr txBox="1"/>
+          <p:nvPr/>
+        </p:nvSpPr>
+        <p:spPr>
+          <a:xfrm>
+            <a:off x="609600" y="1330000"/>
+            <a:ext cx="10972800" cy="450000"/>
           </a:xfrm>
           <a:prstGeom prst="rect">
             <a:avLst/>
@@ -5863,103 +5648,396 @@
           </a:bodyPr>
           <a:lstStyle/>
           <a:p>
-            <a:pPr marL="285750" indent="-285750">
-              <a:spcAft>
-                <a:spcPts val="400"/>
-              </a:spcAft>
-              <a:buClr>
-                <a:srgbClr val="990F3D"/>
-              </a:buClr>
-              <a:buFont typeface="Arial"/>
-              <a:buChar char="•"/>
-            </a:pPr>
-            <a:r>
-              <a:rPr lang="es-ES" sz="1800" dirty="0">
-                <a:solidFill>
-                  <a:srgbClr val="2F2B28"/>
-                </a:solidFill>
-              </a:rPr>
-              <a:t>Quien construye no verifica ni decide su propio trabajo.</a:t>
-            </a:r>
-          </a:p>
-          <a:p>
-            <a:pPr marL="285750" indent="-285750">
-              <a:spcAft>
-                <a:spcPts val="400"/>
-              </a:spcAft>
-              <a:buClr>
-                <a:srgbClr val="990F3D"/>
-              </a:buClr>
-              <a:buFont typeface="Arial"/>
-              <a:buChar char="•"/>
-            </a:pPr>
-            <a:r>
-              <a:rPr lang="es-ES" sz="1800" dirty="0">
-                <a:solidFill>
-                  <a:srgbClr val="2F2B28"/>
-                </a:solidFill>
-              </a:rPr>
-              <a:t>La conformidad de riesgos la emite alguien independiente del equipo.</a:t>
-            </a:r>
-          </a:p>
-          <a:p>
-            <a:pPr marL="285750" indent="-285750">
-              <a:spcAft>
-                <a:spcPts val="400"/>
-              </a:spcAft>
-              <a:buClr>
-                <a:srgbClr val="990F3D"/>
-              </a:buClr>
-              <a:buFont typeface="Arial"/>
-              <a:buChar char="•"/>
-            </a:pPr>
-            <a:r>
-              <a:rPr lang="es-ES" sz="1800" dirty="0">
-                <a:solidFill>
-                  <a:srgbClr val="2F2B28"/>
-                </a:solidFill>
-              </a:rPr>
-              <a:t>El consejo aprueba la dirección y el apetito de riesgo: no se delega.</a:t>
-            </a:r>
-          </a:p>
-          <a:p>
-            <a:pPr marL="285750" indent="-285750">
-              <a:spcAft>
-                <a:spcPts val="400"/>
-              </a:spcAft>
-              <a:buClr>
-                <a:srgbClr val="990F3D"/>
-              </a:buClr>
-              <a:buFont typeface="Arial"/>
-              <a:buChar char="•"/>
-            </a:pPr>
-            <a:r>
-              <a:rPr lang="es-ES" sz="1800" dirty="0">
-                <a:solidFill>
-                  <a:srgbClr val="2F2B28"/>
-                </a:solidFill>
-              </a:rPr>
-              <a:t>Una misma persona puede tener varios roles si no son incompatibles; el registro T01 lo comprueba (P03).</a:t>
-            </a:r>
-          </a:p>
-          <a:p>
-            <a:pPr marL="285750" indent="-285750">
-              <a:spcAft>
-                <a:spcPts val="400"/>
-              </a:spcAft>
-              <a:buClr>
-                <a:srgbClr val="990F3D"/>
-              </a:buClr>
-              <a:buFont typeface="Arial"/>
-              <a:buChar char="•"/>
-            </a:pPr>
-            <a:r>
-              <a:rPr lang="es-ES" sz="1800" dirty="0">
-                <a:solidFill>
-                  <a:srgbClr val="2F2B28"/>
-                </a:solidFill>
-              </a:rPr>
-              <a:t>Lo existente se regulariza con plazos aprobados, no se ignora: inventario primero, después riesgos y después puertas.</a:t>
+            <a:pPr algn="l"/>
+            <a:r>
+              <a:rPr lang="es-ES" sz="1500" dirty="0">
+                <a:solidFill>
+                  <a:srgbClr val="564D47"/>
+                </a:solidFill>
+              </a:rPr>
+              <a:t>Tres meses, tres resultados y una decisión del consejo</a:t>
+            </a:r>
+          </a:p>
+        </p:txBody>
+      </p:sp>
+      <p:sp>
+        <p:nvSpPr>
+          <p:cNvPr id="213" name="Caja 213"/>
+          <p:cNvSpPr/>
+          <p:nvPr/>
+        </p:nvSpPr>
+        <p:spPr>
+          <a:xfrm>
+            <a:off x="609600" y="2050000"/>
+            <a:ext cx="3577600" cy="800000"/>
+          </a:xfrm>
+          <a:prstGeom prst="roundRect">
+            <a:avLst>
+              <a:gd name="adj" fmla="val 6000"/>
+            </a:avLst>
+          </a:prstGeom>
+          <a:solidFill>
+            <a:srgbClr val="0F5499"/>
+          </a:solidFill>
+          <a:ln>
+            <a:noFill/>
+          </a:ln>
+        </p:spPr>
+        <p:txBody>
+          <a:bodyPr wrap="square" anchor="ctr" lIns="45720" rIns="45720">
+            <a:noAutofit/>
+          </a:bodyPr>
+          <a:lstStyle/>
+          <a:p>
+            <a:pPr algn="ctr"/>
+            <a:r>
+              <a:rPr lang="es-ES" sz="1700" b="1" dirty="0">
+                <a:solidFill>
+                  <a:srgbClr val="FFFFFF"/>
+                </a:solidFill>
+              </a:rPr>
+              <a:t>Mes 1 · Diagnóstico (C1)</a:t>
+            </a:r>
+          </a:p>
+        </p:txBody>
+      </p:sp>
+      <p:sp>
+        <p:nvSpPr>
+          <p:cNvPr id="214" name="Caja 214"/>
+          <p:cNvSpPr/>
+          <p:nvPr/>
+        </p:nvSpPr>
+        <p:spPr>
+          <a:xfrm>
+            <a:off x="609600" y="2790000"/>
+            <a:ext cx="3577600" cy="2500000"/>
+          </a:xfrm>
+          <a:prstGeom prst="roundRect">
+            <a:avLst>
+              <a:gd name="adj" fmla="val 6000"/>
+            </a:avLst>
+          </a:prstGeom>
+          <a:solidFill>
+            <a:srgbClr val="F3CFB2"/>
+          </a:solidFill>
+          <a:ln>
+            <a:noFill/>
+          </a:ln>
+        </p:spPr>
+        <p:txBody>
+          <a:bodyPr wrap="square" anchor="ctr" lIns="45720" rIns="45720">
+            <a:noAutofit/>
+          </a:bodyPr>
+          <a:lstStyle/>
+          <a:p>
+            <a:pPr algn="ctr"/>
+            <a:r>
+              <a:rPr lang="es-ES" sz="1000" b="1" dirty="0">
+                <a:solidFill>
+                  <a:srgbClr val="2F2B28"/>
+                </a:solidFill>
+              </a:rPr>
+              <a:t/>
+            </a:r>
+          </a:p>
+        </p:txBody>
+      </p:sp>
+      <p:sp>
+        <p:nvSpPr>
+          <p:cNvPr id="215" name="Texto 215"/>
+          <p:cNvSpPr txBox="1"/>
+          <p:nvPr/>
+        </p:nvSpPr>
+        <p:spPr>
+          <a:xfrm>
+            <a:off x="649600" y="2890000"/>
+            <a:ext cx="3497600" cy="2340000"/>
+          </a:xfrm>
+          <a:prstGeom prst="rect">
+            <a:avLst/>
+          </a:prstGeom>
+          <a:noFill/>
+        </p:spPr>
+        <p:txBody>
+          <a:bodyPr wrap="square" anchor="t" lIns="45720" rIns="45720">
+            <a:noAutofit/>
+          </a:bodyPr>
+          <a:lstStyle/>
+          <a:p>
+            <a:pPr algn="l"/>
+            <a:r>
+              <a:rPr lang="es-ES" sz="1300" dirty="0">
+                <a:solidFill>
+                  <a:srgbClr val="2F2B28"/>
+                </a:solidFill>
+              </a:rPr>
+              <a:t>Mandato (P32). Inventario de toda la IA, también la de terceros y la no autorizada, con declaración de completitud. Madurez con evidencia (T15) e índice de transformación (T14). Hito 1: informe C1 verificado (P33).</a:t>
+            </a:r>
+          </a:p>
+        </p:txBody>
+      </p:sp>
+      <p:sp>
+        <p:nvSpPr>
+          <p:cNvPr id="216" name="Caja 216"/>
+          <p:cNvSpPr/>
+          <p:nvPr/>
+        </p:nvSpPr>
+        <p:spPr>
+          <a:xfrm>
+            <a:off x="4307200" y="2050000"/>
+            <a:ext cx="3577600" cy="800000"/>
+          </a:xfrm>
+          <a:prstGeom prst="roundRect">
+            <a:avLst>
+              <a:gd name="adj" fmla="val 6000"/>
+            </a:avLst>
+          </a:prstGeom>
+          <a:solidFill>
+            <a:srgbClr val="593380"/>
+          </a:solidFill>
+          <a:ln>
+            <a:noFill/>
+          </a:ln>
+        </p:spPr>
+        <p:txBody>
+          <a:bodyPr wrap="square" anchor="ctr" lIns="45720" rIns="45720">
+            <a:noAutofit/>
+          </a:bodyPr>
+          <a:lstStyle/>
+          <a:p>
+            <a:pPr algn="ctr"/>
+            <a:r>
+              <a:rPr lang="es-ES" sz="1700" b="1" dirty="0">
+                <a:solidFill>
+                  <a:srgbClr val="FFFFFF"/>
+                </a:solidFill>
+              </a:rPr>
+              <a:t>Mes 2 · Riesgos y oportunidades</a:t>
+            </a:r>
+          </a:p>
+        </p:txBody>
+      </p:sp>
+      <p:sp>
+        <p:nvSpPr>
+          <p:cNvPr id="217" name="Caja 217"/>
+          <p:cNvSpPr/>
+          <p:nvPr/>
+        </p:nvSpPr>
+        <p:spPr>
+          <a:xfrm>
+            <a:off x="4307200" y="2790000"/>
+            <a:ext cx="3577600" cy="2500000"/>
+          </a:xfrm>
+          <a:prstGeom prst="roundRect">
+            <a:avLst>
+              <a:gd name="adj" fmla="val 6000"/>
+            </a:avLst>
+          </a:prstGeom>
+          <a:solidFill>
+            <a:srgbClr val="F3CFB2"/>
+          </a:solidFill>
+          <a:ln>
+            <a:noFill/>
+          </a:ln>
+        </p:spPr>
+        <p:txBody>
+          <a:bodyPr wrap="square" anchor="ctr" lIns="45720" rIns="45720">
+            <a:noAutofit/>
+          </a:bodyPr>
+          <a:lstStyle/>
+          <a:p>
+            <a:pPr algn="ctr"/>
+            <a:r>
+              <a:rPr lang="es-ES" sz="1000" b="1" dirty="0">
+                <a:solidFill>
+                  <a:srgbClr val="2F2B28"/>
+                </a:solidFill>
+              </a:rPr>
+              <a:t/>
+            </a:r>
+          </a:p>
+        </p:txBody>
+      </p:sp>
+      <p:sp>
+        <p:nvSpPr>
+          <p:cNvPr id="218" name="Texto 218"/>
+          <p:cNvSpPr txBox="1"/>
+          <p:nvPr/>
+        </p:nvSpPr>
+        <p:spPr>
+          <a:xfrm>
+            <a:off x="4347200" y="2890000"/>
+            <a:ext cx="3497600" cy="2340000"/>
+          </a:xfrm>
+          <a:prstGeom prst="rect">
+            <a:avLst/>
+          </a:prstGeom>
+          <a:noFill/>
+        </p:spPr>
+        <p:txBody>
+          <a:bodyPr wrap="square" anchor="t" lIns="45720" rIns="45720">
+            <a:noAutofit/>
+          </a:bodyPr>
+          <a:lstStyle/>
+          <a:p>
+            <a:pPr algn="l"/>
+            <a:r>
+              <a:rPr lang="es-ES" sz="1300" dirty="0">
+                <a:solidFill>
+                  <a:srgbClr val="2F2B28"/>
+                </a:solidFill>
+              </a:rPr>
+              <a:t>Talleres por esfera: riesgos de lo que ya existe (P11, P12) y oportunidades con valor estimado (P06, P07). Borrador de tesis de IA, ambición y apetito de riesgo (P35). Hito 2: propuesta de C2 lista para el consejo.</a:t>
+            </a:r>
+          </a:p>
+        </p:txBody>
+      </p:sp>
+      <p:sp>
+        <p:nvSpPr>
+          <p:cNvPr id="219" name="Caja 219"/>
+          <p:cNvSpPr/>
+          <p:nvPr/>
+        </p:nvSpPr>
+        <p:spPr>
+          <a:xfrm>
+            <a:off x="8004800" y="2050000"/>
+            <a:ext cx="3577600" cy="800000"/>
+          </a:xfrm>
+          <a:prstGeom prst="roundRect">
+            <a:avLst>
+              <a:gd name="adj" fmla="val 6000"/>
+            </a:avLst>
+          </a:prstGeom>
+          <a:solidFill>
+            <a:srgbClr val="0D7680"/>
+          </a:solidFill>
+          <a:ln>
+            <a:noFill/>
+          </a:ln>
+        </p:spPr>
+        <p:txBody>
+          <a:bodyPr wrap="square" anchor="ctr" lIns="45720" rIns="45720">
+            <a:noAutofit/>
+          </a:bodyPr>
+          <a:lstStyle/>
+          <a:p>
+            <a:pPr algn="ctr"/>
+            <a:r>
+              <a:rPr lang="es-ES" sz="1700" b="1" dirty="0">
+                <a:solidFill>
+                  <a:srgbClr val="FFFFFF"/>
+                </a:solidFill>
+              </a:rPr>
+              <a:t>Mes 3 · Gobierno y cartera</a:t>
+            </a:r>
+          </a:p>
+        </p:txBody>
+      </p:sp>
+      <p:sp>
+        <p:nvSpPr>
+          <p:cNvPr id="220" name="Caja 220"/>
+          <p:cNvSpPr/>
+          <p:nvPr/>
+        </p:nvSpPr>
+        <p:spPr>
+          <a:xfrm>
+            <a:off x="8004800" y="2790000"/>
+            <a:ext cx="3577600" cy="2500000"/>
+          </a:xfrm>
+          <a:prstGeom prst="roundRect">
+            <a:avLst>
+              <a:gd name="adj" fmla="val 6000"/>
+            </a:avLst>
+          </a:prstGeom>
+          <a:solidFill>
+            <a:srgbClr val="F3CFB2"/>
+          </a:solidFill>
+          <a:ln>
+            <a:noFill/>
+          </a:ln>
+        </p:spPr>
+        <p:txBody>
+          <a:bodyPr wrap="square" anchor="ctr" lIns="45720" rIns="45720">
+            <a:noAutofit/>
+          </a:bodyPr>
+          <a:lstStyle/>
+          <a:p>
+            <a:pPr algn="ctr"/>
+            <a:r>
+              <a:rPr lang="es-ES" sz="1000" b="1" dirty="0">
+                <a:solidFill>
+                  <a:srgbClr val="2F2B28"/>
+                </a:solidFill>
+              </a:rPr>
+              <a:t/>
+            </a:r>
+          </a:p>
+        </p:txBody>
+      </p:sp>
+      <p:sp>
+        <p:nvSpPr>
+          <p:cNvPr id="221" name="Texto 221"/>
+          <p:cNvSpPr txBox="1"/>
+          <p:nvPr/>
+        </p:nvSpPr>
+        <p:spPr>
+          <a:xfrm>
+            <a:off x="8044800" y="2890000"/>
+            <a:ext cx="3497600" cy="2340000"/>
+          </a:xfrm>
+          <a:prstGeom prst="rect">
+            <a:avLst/>
+          </a:prstGeom>
+          <a:noFill/>
+        </p:spPr>
+        <p:txBody>
+          <a:bodyPr wrap="square" anchor="t" lIns="45720" rIns="45720">
+            <a:noAutofit/>
+          </a:bodyPr>
+          <a:lstStyle/>
+          <a:p>
+            <a:pPr algn="l"/>
+            <a:r>
+              <a:rPr lang="es-ES" sz="1300" dirty="0">
+                <a:solidFill>
+                  <a:srgbClr val="2F2B28"/>
+                </a:solidFill>
+              </a:rPr>
+              <a:t>Órganos y roles sin incompatibilidades (P38, P03), puertas y políticas, primer panel con datos reales (T17) y cartera priorizada (P36). El consejo aprueba C2 y el comité, C3. Hito 3: régimen ordinario.</a:t>
+            </a:r>
+          </a:p>
+        </p:txBody>
+      </p:sp>
+      <p:sp>
+        <p:nvSpPr>
+          <p:cNvPr id="222" name="Texto 222"/>
+          <p:cNvSpPr txBox="1"/>
+          <p:nvPr/>
+        </p:nvSpPr>
+        <p:spPr>
+          <a:xfrm>
+            <a:off x="609600" y="6150000"/>
+            <a:ext cx="10972800" cy="500000"/>
+          </a:xfrm>
+          <a:prstGeom prst="rect">
+            <a:avLst/>
+          </a:prstGeom>
+          <a:noFill/>
+        </p:spPr>
+        <p:txBody>
+          <a:bodyPr wrap="square" anchor="t" lIns="45720" rIns="45720">
+            <a:noAutofit/>
+          </a:bodyPr>
+          <a:lstStyle/>
+          <a:p>
+            <a:pPr algn="l"/>
+            <a:r>
+              <a:rPr lang="es-ES" sz="1400" b="1" dirty="0">
+                <a:solidFill>
+                  <a:srgbClr val="0F5499"/>
+                </a:solidFill>
+              </a:rPr>
+              <a:t>Desde la semana 13, ninguna iniciativa nueva consume presupuesto sin pasar por G0.</a:t>
             </a:r>
           </a:p>
         </p:txBody>
@@ -5999,7 +6077,7 @@
       </p:grpSpPr>
       <p:sp>
         <p:nvSpPr>
-          <p:cNvPr id="225" name="Marca"/>
+          <p:cNvPr id="228" name="Marca"/>
           <p:cNvSpPr/>
           <p:nvPr/>
         </p:nvSpPr>
@@ -6023,7 +6101,7 @@
       </p:sp>
       <p:sp>
         <p:nvSpPr>
-          <p:cNvPr id="226" name="Texto 226"/>
+          <p:cNvPr id="229" name="Texto 229"/>
           <p:cNvSpPr txBox="1"/>
           <p:nvPr/>
         </p:nvSpPr>
@@ -6057,7 +6135,7 @@
       </p:sp>
       <p:sp>
         <p:nvSpPr>
-          <p:cNvPr id="227" name="Texto 227"/>
+          <p:cNvPr id="230" name="Texto 230"/>
           <p:cNvSpPr txBox="1"/>
           <p:nvPr/>
         </p:nvSpPr>
@@ -6084,14 +6162,14 @@
                   <a:srgbClr val="990F3D"/>
                 </a:solidFill>
               </a:rPr>
-              <a:t>Errores frecuentes al implantarlo uno mismo</a:t>
-            </a:r>
-          </a:p>
-        </p:txBody>
-      </p:sp>
-      <p:sp>
-        <p:nvSpPr>
-          <p:cNvPr id="224" name="Texto 224"/>
+              <a:t>Tres garantías que no se negocian, ni en pequeño</a:t>
+            </a:r>
+          </a:p>
+        </p:txBody>
+      </p:sp>
+      <p:sp>
+        <p:nvSpPr>
+          <p:cNvPr id="227" name="Texto 227"/>
           <p:cNvSpPr txBox="1"/>
           <p:nvPr/>
         </p:nvSpPr>
@@ -6127,7 +6205,7 @@
                   <a:srgbClr val="2F2B28"/>
                 </a:solidFill>
               </a:rPr>
-              <a:t>Aplicar Enterprise a todo: el marco se vuelve pesado y se abandona. O no aplicar nada «porque somos pequeños».</a:t>
+              <a:t>Quien construye no verifica ni decide su propio trabajo.</a:t>
             </a:r>
           </a:p>
           <a:p>
@@ -6147,7 +6225,7 @@
                   <a:srgbClr val="2F2B28"/>
                 </a:solidFill>
               </a:rPr>
-              <a:t>Rellenar las plantillas después de decidir: la documentación a posteriori invalida la puerta.</a:t>
+              <a:t>La conformidad de riesgos la emite alguien independiente del equipo.</a:t>
             </a:r>
           </a:p>
           <a:p>
@@ -6167,7 +6245,7 @@
                   <a:srgbClr val="2F2B28"/>
                 </a:solidFill>
               </a:rPr>
-              <a:t>Sumar horas liberadas como ahorro en el panel.</a:t>
+              <a:t>El consejo aprueba la dirección y el apetito de riesgo: no se delega.</a:t>
             </a:r>
           </a:p>
           <a:p>
@@ -6187,7 +6265,7 @@
                   <a:srgbClr val="2F2B28"/>
                 </a:solidFill>
               </a:rPr>
-              <a:t>No parar nunca nada: una cartera sin paradas no tiene puertas, tiene trámites.</a:t>
+              <a:t>Una misma persona puede tener varios roles si no son incompatibles; el registro T01 lo comprueba (P03).</a:t>
             </a:r>
           </a:p>
           <a:p>
@@ -6207,27 +6285,7 @@
                   <a:srgbClr val="2F2B28"/>
                 </a:solidFill>
               </a:rPr>
-              <a:t>Un inventario incompleto: la IA de terceros y el uso no autorizado también cuentan.</a:t>
-            </a:r>
-          </a:p>
-          <a:p>
-            <a:pPr marL="285750" indent="-285750">
-              <a:spcAft>
-                <a:spcPts val="400"/>
-              </a:spcAft>
-              <a:buClr>
-                <a:srgbClr val="990F3D"/>
-              </a:buClr>
-              <a:buFont typeface="Arial"/>
-              <a:buChar char="•"/>
-            </a:pPr>
-            <a:r>
-              <a:rPr lang="es-ES" sz="1800" dirty="0">
-                <a:solidFill>
-                  <a:srgbClr val="2F2B28"/>
-                </a:solidFill>
-              </a:rPr>
-              <a:t>Dejar al consejo fuera hasta el final: su sesión se reserva el primer día.</a:t>
+              <a:t>Lo existente se regulariza con plazos aprobados, no se ignora: inventario primero, después riesgos y después puertas.</a:t>
             </a:r>
           </a:p>
         </p:txBody>
@@ -6267,7 +6325,7 @@
       </p:grpSpPr>
       <p:sp>
         <p:nvSpPr>
-          <p:cNvPr id="229" name="Marca"/>
+          <p:cNvPr id="232" name="Marca"/>
           <p:cNvSpPr/>
           <p:nvPr/>
         </p:nvSpPr>
@@ -6291,7 +6349,7 @@
       </p:sp>
       <p:sp>
         <p:nvSpPr>
-          <p:cNvPr id="230" name="Texto 230"/>
+          <p:cNvPr id="233" name="Texto 233"/>
           <p:cNvSpPr txBox="1"/>
           <p:nvPr/>
         </p:nvSpPr>
@@ -6325,7 +6383,7 @@
       </p:sp>
       <p:sp>
         <p:nvSpPr>
-          <p:cNvPr id="231" name="Texto 231"/>
+          <p:cNvPr id="234" name="Texto 234"/>
           <p:cNvSpPr txBox="1"/>
           <p:nvPr/>
         </p:nvSpPr>
@@ -6352,14 +6410,14 @@
                   <a:srgbClr val="990F3D"/>
                 </a:solidFill>
               </a:rPr>
-              <a:t>Por dónde empezar mañana</a:t>
-            </a:r>
-          </a:p>
-        </p:txBody>
-      </p:sp>
-      <p:sp>
-        <p:nvSpPr>
-          <p:cNvPr id="228" name="Texto 228"/>
+              <a:t>Errores frecuentes al implantarlo uno mismo</a:t>
+            </a:r>
+          </a:p>
+        </p:txBody>
+      </p:sp>
+      <p:sp>
+        <p:nvSpPr>
+          <p:cNvPr id="231" name="Texto 231"/>
           <p:cNvSpPr txBox="1"/>
           <p:nvPr/>
         </p:nvSpPr>
@@ -6395,7 +6453,7 @@
                   <a:srgbClr val="2F2B28"/>
                 </a:solidFill>
               </a:rPr>
-              <a:t>Una tarde: abra el registro de ejemplo (T01) y su panel (T17), y responda al diagnóstico de madurez (T15) con su situación real.</a:t>
+              <a:t>Aplicar Enterprise a todo: el marco se vuelve pesado y se abandona. O no aplicar nada «porque somos pequeños».</a:t>
             </a:r>
           </a:p>
           <a:p>
@@ -6415,7 +6473,7 @@
                   <a:srgbClr val="2F2B28"/>
                 </a:solidFill>
               </a:rPr>
-              <a:t>Una semana: documentos 00, 01 y 90; decida alcance Lite o Enterprise y redacte el mandato (P32).</a:t>
+              <a:t>Rellenar las plantillas después de decidir: la documentación a posteriori invalida la puerta.</a:t>
             </a:r>
           </a:p>
           <a:p>
@@ -6435,7 +6493,7 @@
                   <a:srgbClr val="2F2B28"/>
                 </a:solidFill>
               </a:rPr>
-              <a:t>La adopción puede ser modular: solo el registro, solo las puertas, solo la medición o solo el panel, y ampliar después.</a:t>
+              <a:t>Sumar horas liberadas como ahorro en el panel.</a:t>
             </a:r>
           </a:p>
           <a:p>
@@ -6455,7 +6513,7 @@
                   <a:srgbClr val="2F2B28"/>
                 </a:solidFill>
               </a:rPr>
-              <a:t>Si quiere acompañamiento, puede pedirlo a cualquier profesional; el documento 91 explica cómo evitar depender de él.</a:t>
+              <a:t>No parar nunca nada: una cartera sin paradas no tiene puertas, tiene trámites.</a:t>
             </a:r>
           </a:p>
           <a:p>
@@ -6475,7 +6533,27 @@
                   <a:srgbClr val="2F2B28"/>
                 </a:solidFill>
               </a:rPr>
-              <a:t>Nada de esto exige registrarse ni contratar a nadie.</a:t>
+              <a:t>Un inventario incompleto: la IA de terceros y el uso no autorizado también cuentan.</a:t>
+            </a:r>
+          </a:p>
+          <a:p>
+            <a:pPr marL="285750" indent="-285750">
+              <a:spcAft>
+                <a:spcPts val="400"/>
+              </a:spcAft>
+              <a:buClr>
+                <a:srgbClr val="990F3D"/>
+              </a:buClr>
+              <a:buFont typeface="Arial"/>
+              <a:buChar char="•"/>
+            </a:pPr>
+            <a:r>
+              <a:rPr lang="es-ES" sz="1800" dirty="0">
+                <a:solidFill>
+                  <a:srgbClr val="2F2B28"/>
+                </a:solidFill>
+              </a:rPr>
+              <a:t>Dejar al consejo fuera hasta el final: su sesión se reserva el primer día.</a:t>
             </a:r>
           </a:p>
         </p:txBody>
@@ -6515,7 +6593,255 @@
       </p:grpSpPr>
       <p:sp>
         <p:nvSpPr>
-          <p:cNvPr id="232" name="Texto 232"/>
+          <p:cNvPr id="236" name="Marca"/>
+          <p:cNvSpPr/>
+          <p:nvPr/>
+        </p:nvSpPr>
+        <p:spPr>
+          <a:xfrm>
+            <a:off x="609600" y="365760"/>
+            <a:ext cx="182880" cy="182880"/>
+          </a:xfrm>
+          <a:prstGeom prst="rect">
+            <a:avLst/>
+          </a:prstGeom>
+          <a:solidFill>
+            <a:srgbClr val="990F3D"/>
+          </a:solidFill>
+        </p:spPr>
+        <p:txBody>
+          <a:bodyPr/>
+          <a:lstStyle/>
+          <a:p/>
+        </p:txBody>
+      </p:sp>
+      <p:sp>
+        <p:nvSpPr>
+          <p:cNvPr id="237" name="Texto 237"/>
+          <p:cNvSpPr txBox="1"/>
+          <p:nvPr/>
+        </p:nvSpPr>
+        <p:spPr>
+          <a:xfrm>
+            <a:off x="838200" y="300000"/>
+            <a:ext cx="10500000" cy="320000"/>
+          </a:xfrm>
+          <a:prstGeom prst="rect">
+            <a:avLst/>
+          </a:prstGeom>
+          <a:noFill/>
+        </p:spPr>
+        <p:txBody>
+          <a:bodyPr wrap="square" anchor="ctr" lIns="45720" rIns="45720">
+            <a:noAutofit/>
+          </a:bodyPr>
+          <a:lstStyle/>
+          <a:p>
+            <a:pPr algn="l"/>
+            <a:r>
+              <a:rPr lang="es-ES" sz="1400" b="1" dirty="0">
+                <a:solidFill>
+                  <a:srgbClr val="1A1817"/>
+                </a:solidFill>
+              </a:rPr>
+              <a:t>SEVEN-G · CURSO · EMPRESA · AUTOCONSULTORÍA</a:t>
+            </a:r>
+          </a:p>
+        </p:txBody>
+      </p:sp>
+      <p:sp>
+        <p:nvSpPr>
+          <p:cNvPr id="238" name="Texto 238"/>
+          <p:cNvSpPr txBox="1"/>
+          <p:nvPr/>
+        </p:nvSpPr>
+        <p:spPr>
+          <a:xfrm>
+            <a:off x="609600" y="700000"/>
+            <a:ext cx="10972800" cy="650000"/>
+          </a:xfrm>
+          <a:prstGeom prst="rect">
+            <a:avLst/>
+          </a:prstGeom>
+          <a:noFill/>
+        </p:spPr>
+        <p:txBody>
+          <a:bodyPr wrap="square" anchor="t" lIns="45720" rIns="45720">
+            <a:noAutofit/>
+          </a:bodyPr>
+          <a:lstStyle/>
+          <a:p>
+            <a:pPr algn="l"/>
+            <a:r>
+              <a:rPr lang="es-ES" sz="2700" b="1" dirty="0">
+                <a:solidFill>
+                  <a:srgbClr val="990F3D"/>
+                </a:solidFill>
+              </a:rPr>
+              <a:t>Por dónde empezar mañana</a:t>
+            </a:r>
+          </a:p>
+        </p:txBody>
+      </p:sp>
+      <p:sp>
+        <p:nvSpPr>
+          <p:cNvPr id="235" name="Texto 235"/>
+          <p:cNvSpPr txBox="1"/>
+          <p:nvPr/>
+        </p:nvSpPr>
+        <p:spPr>
+          <a:xfrm>
+            <a:off x="609600" y="1750000"/>
+            <a:ext cx="10972800" cy="4400000"/>
+          </a:xfrm>
+          <a:prstGeom prst="rect">
+            <a:avLst/>
+          </a:prstGeom>
+          <a:noFill/>
+        </p:spPr>
+        <p:txBody>
+          <a:bodyPr wrap="square" anchor="t" lIns="45720" rIns="45720">
+            <a:noAutofit/>
+          </a:bodyPr>
+          <a:lstStyle/>
+          <a:p>
+            <a:pPr marL="285750" indent="-285750">
+              <a:spcAft>
+                <a:spcPts val="400"/>
+              </a:spcAft>
+              <a:buClr>
+                <a:srgbClr val="990F3D"/>
+              </a:buClr>
+              <a:buFont typeface="Arial"/>
+              <a:buChar char="•"/>
+            </a:pPr>
+            <a:r>
+              <a:rPr lang="es-ES" sz="1800" dirty="0">
+                <a:solidFill>
+                  <a:srgbClr val="2F2B28"/>
+                </a:solidFill>
+              </a:rPr>
+              <a:t>Una tarde: abra el registro de ejemplo (T01) y su panel (T17), y responda al diagnóstico de madurez (T15) con su situación real.</a:t>
+            </a:r>
+          </a:p>
+          <a:p>
+            <a:pPr marL="285750" indent="-285750">
+              <a:spcAft>
+                <a:spcPts val="400"/>
+              </a:spcAft>
+              <a:buClr>
+                <a:srgbClr val="990F3D"/>
+              </a:buClr>
+              <a:buFont typeface="Arial"/>
+              <a:buChar char="•"/>
+            </a:pPr>
+            <a:r>
+              <a:rPr lang="es-ES" sz="1800" dirty="0">
+                <a:solidFill>
+                  <a:srgbClr val="2F2B28"/>
+                </a:solidFill>
+              </a:rPr>
+              <a:t>Una semana: documentos 00, 01 y 90; decida alcance Lite o Enterprise y redacte el mandato (P32).</a:t>
+            </a:r>
+          </a:p>
+          <a:p>
+            <a:pPr marL="285750" indent="-285750">
+              <a:spcAft>
+                <a:spcPts val="400"/>
+              </a:spcAft>
+              <a:buClr>
+                <a:srgbClr val="990F3D"/>
+              </a:buClr>
+              <a:buFont typeface="Arial"/>
+              <a:buChar char="•"/>
+            </a:pPr>
+            <a:r>
+              <a:rPr lang="es-ES" sz="1800" dirty="0">
+                <a:solidFill>
+                  <a:srgbClr val="2F2B28"/>
+                </a:solidFill>
+              </a:rPr>
+              <a:t>La adopción puede ser modular: solo el registro, solo las puertas, solo la medición o solo el panel, y ampliar después.</a:t>
+            </a:r>
+          </a:p>
+          <a:p>
+            <a:pPr marL="285750" indent="-285750">
+              <a:spcAft>
+                <a:spcPts val="400"/>
+              </a:spcAft>
+              <a:buClr>
+                <a:srgbClr val="990F3D"/>
+              </a:buClr>
+              <a:buFont typeface="Arial"/>
+              <a:buChar char="•"/>
+            </a:pPr>
+            <a:r>
+              <a:rPr lang="es-ES" sz="1800" dirty="0">
+                <a:solidFill>
+                  <a:srgbClr val="2F2B28"/>
+                </a:solidFill>
+              </a:rPr>
+              <a:t>Si quiere acompañamiento, puede pedirlo a cualquier profesional; el documento 91 explica cómo evitar depender de él.</a:t>
+            </a:r>
+          </a:p>
+          <a:p>
+            <a:pPr marL="285750" indent="-285750">
+              <a:spcAft>
+                <a:spcPts val="400"/>
+              </a:spcAft>
+              <a:buClr>
+                <a:srgbClr val="990F3D"/>
+              </a:buClr>
+              <a:buFont typeface="Arial"/>
+              <a:buChar char="•"/>
+            </a:pPr>
+            <a:r>
+              <a:rPr lang="es-ES" sz="1800" dirty="0">
+                <a:solidFill>
+                  <a:srgbClr val="2F2B28"/>
+                </a:solidFill>
+              </a:rPr>
+              <a:t>Nada de esto exige registrarse ni contratar a nadie.</a:t>
+            </a:r>
+          </a:p>
+        </p:txBody>
+      </p:sp>
+    </p:spTree>
+  </p:cSld>
+  <p:clrMapOvr>
+    <a:overrideClrMapping bg1="lt1" tx1="dk1" bg2="lt2" tx2="dk2" accent1="accent1" accent2="accent2" accent3="accent3" accent4="accent4" accent5="accent5" accent6="accent6" hlink="hlink" folHlink="folHlink"/>
+  </p:clrMapOvr>
+</p:sld>
+</file>
+
+<file path=ppt/slides/slide27.xml><?xml version="1.0" encoding="utf-8"?>
+<p:sld xmlns:a="http://schemas.openxmlformats.org/drawingml/2006/main" xmlns:r="http://schemas.openxmlformats.org/officeDocument/2006/relationships" xmlns:p="http://schemas.openxmlformats.org/presentationml/2006/main">
+  <p:cSld>
+    <p:bg>
+      <p:bgPr>
+        <a:solidFill>
+          <a:srgbClr val="FBE2CD"/>
+        </a:solidFill>
+        <a:effectLst/>
+      </p:bgPr>
+    </p:bg>
+    <p:spTree>
+      <p:nvGrpSpPr>
+        <p:cNvPr id="1" name=""/>
+        <p:cNvGrpSpPr/>
+        <p:nvPr/>
+      </p:nvGrpSpPr>
+      <p:grpSpPr>
+        <a:xfrm>
+          <a:off x="0" y="0"/>
+          <a:ext cx="0" cy="0"/>
+          <a:chOff x="0" y="0"/>
+          <a:chExt cx="0" cy="0"/>
+        </a:xfrm>
+      </p:grpSpPr>
+      <p:sp>
+        <p:nvSpPr>
+          <p:cNvPr id="239" name="Texto 239"/>
           <p:cNvSpPr txBox="1"/>
           <p:nvPr/>
         </p:nvSpPr>
@@ -6549,7 +6875,7 @@
       </p:sp>
       <p:sp>
         <p:nvSpPr>
-          <p:cNvPr id="233" name="Texto 233"/>
+          <p:cNvPr id="240" name="Texto 240"/>
           <p:cNvSpPr txBox="1"/>
           <p:nvPr/>
         </p:nvSpPr>
@@ -6583,7 +6909,7 @@
       </p:sp>
       <p:sp>
         <p:nvSpPr>
-          <p:cNvPr id="234" name="Texto 234"/>
+          <p:cNvPr id="241" name="Texto 241"/>
           <p:cNvSpPr txBox="1"/>
           <p:nvPr/>
         </p:nvSpPr>
@@ -6617,7 +6943,7 @@
       </p:sp>
       <p:sp>
         <p:nvSpPr>
-          <p:cNvPr id="235" name="Texto 235"/>
+          <p:cNvPr id="242" name="Texto 242"/>
           <p:cNvSpPr txBox="1"/>
           <p:nvPr/>
         </p:nvSpPr>
@@ -6651,7 +6977,7 @@
       </p:sp>
       <p:sp>
         <p:nvSpPr>
-          <p:cNvPr id="236" name="Texto 236"/>
+          <p:cNvPr id="243" name="Texto 243"/>
           <p:cNvSpPr txBox="1"/>
           <p:nvPr/>
         </p:nvSpPr>
